--- a/presentation/2강3강_발표자료_초안.pptx
+++ b/presentation/2강3강_발표자료_초안.pptx
@@ -32,6 +32,12 @@
     <p:sldId id="280" r:id="rId31"/>
     <p:sldId id="281" r:id="rId32"/>
     <p:sldId id="282" r:id="rId33"/>
+    <p:sldId id="283" r:id="rId34"/>
+    <p:sldId id="284" r:id="rId35"/>
+    <p:sldId id="285" r:id="rId36"/>
+    <p:sldId id="286" r:id="rId37"/>
+    <p:sldId id="287" r:id="rId38"/>
+    <p:sldId id="288" r:id="rId39"/>
   </p:sldIdLst>
   <p:sldSz cx="12191695" cy="6858000" type="screen4x3"/>
   <p:notesSz cx="6858000" cy="9144000"/>
@@ -3465,7 +3471,7 @@
                 </a:solidFill>
                 <a:latin typeface="맑은 고딕"/>
               </a:rPr>
-              <a:t>10 / 27</a:t>
+              <a:t>10 / 33</a:t>
             </a:r>
           </a:p>
         </p:txBody>
@@ -3732,7 +3738,7 @@
                 </a:solidFill>
                 <a:latin typeface="맑은 고딕"/>
               </a:rPr>
-              <a:t>11 / 27</a:t>
+              <a:t>11 / 33</a:t>
             </a:r>
           </a:p>
         </p:txBody>
@@ -4093,7 +4099,7 @@
                 </a:solidFill>
                 <a:latin typeface="맑은 고딕"/>
               </a:rPr>
-              <a:t>SIS ↔ ISIS 계산적 동치성</a:t>
+              <a:t>SIS ≤ ISIS 증명 (Claim 1)</a:t>
             </a:r>
           </a:p>
         </p:txBody>
@@ -4132,7 +4138,7 @@
                 </a:solidFill>
                 <a:latin typeface="맑은 고딕"/>
               </a:rPr>
-              <a:t>2강 SIS · Part 6</a:t>
+              <a:t>2강 SIS · Part 6.1</a:t>
             </a:r>
           </a:p>
         </p:txBody>
@@ -4171,21 +4177,248 @@
                 </a:solidFill>
                 <a:latin typeface="맑은 고딕"/>
               </a:rPr>
-              <a:t>12 / 27</a:t>
-            </a:r>
-          </a:p>
-        </p:txBody>
-      </p:sp>
-      <p:sp>
-        <p:nvSpPr>
-          <p:cNvPr id="6" name="TextBox 5"/>
-          <p:cNvSpPr txBox="1"/>
-          <p:nvPr/>
-        </p:nvSpPr>
-        <p:spPr>
-          <a:xfrm>
-            <a:off x="685800" y="1463040"/>
-            <a:ext cx="10789920" cy="4572000"/>
+              <a:t>12 / 33</a:t>
+            </a:r>
+          </a:p>
+        </p:txBody>
+      </p:sp>
+      <p:sp>
+        <p:nvSpPr>
+          <p:cNvPr id="6" name="Rectangle 5"/>
+          <p:cNvSpPr/>
+          <p:nvPr/>
+        </p:nvSpPr>
+        <p:spPr>
+          <a:xfrm>
+            <a:off x="4206240" y="1417320"/>
+            <a:ext cx="2377440" cy="960120"/>
+          </a:xfrm>
+          <a:prstGeom prst="rect">
+            <a:avLst/>
+          </a:prstGeom>
+          <a:solidFill>
+            <a:srgbClr val="F4F5F7"/>
+          </a:solidFill>
+          <a:ln w="15875">
+            <a:solidFill>
+              <a:srgbClr val="C7CBD3"/>
+            </a:solidFill>
+          </a:ln>
+          <a:effectLst/>
+        </p:spPr>
+        <p:style>
+          <a:lnRef idx="1">
+            <a:schemeClr val="accent1"/>
+          </a:lnRef>
+          <a:fillRef idx="3">
+            <a:schemeClr val="accent1"/>
+          </a:fillRef>
+          <a:effectRef idx="2">
+            <a:schemeClr val="accent1"/>
+          </a:effectRef>
+          <a:fontRef idx="minor">
+            <a:schemeClr val="lt1"/>
+          </a:fontRef>
+        </p:style>
+        <p:txBody>
+          <a:bodyPr rtlCol="0" anchor="ctr" wrap="square"/>
+          <a:lstStyle/>
+          <a:p>
+            <a:pPr algn="ctr"/>
+            <a:r>
+              <a:rPr sz="2400" b="0" i="1">
+                <a:solidFill>
+                  <a:srgbClr val="222222"/>
+                </a:solidFill>
+                <a:latin typeface="Cambria Math"/>
+              </a:rPr>
+              <a:t>A′</a:t>
+            </a:r>
+          </a:p>
+        </p:txBody>
+      </p:sp>
+      <p:sp>
+        <p:nvSpPr>
+          <p:cNvPr id="7" name="TextBox 6"/>
+          <p:cNvSpPr txBox="1"/>
+          <p:nvPr/>
+        </p:nvSpPr>
+        <p:spPr>
+          <a:xfrm>
+            <a:off x="4206240" y="2404872"/>
+            <a:ext cx="2377440" cy="274320"/>
+          </a:xfrm>
+          <a:prstGeom prst="rect">
+            <a:avLst/>
+          </a:prstGeom>
+          <a:noFill/>
+        </p:spPr>
+        <p:txBody>
+          <a:bodyPr wrap="square" anchor="t" lIns="0" rIns="0" tIns="0" bIns="0">
+            <a:spAutoFit/>
+          </a:bodyPr>
+          <a:lstStyle/>
+          <a:p>
+            <a:pPr algn="ctr">
+              <a:lnSpc>
+                <a:spcPct val="115000"/>
+              </a:lnSpc>
+            </a:pPr>
+            <a:r>
+              <a:rPr sz="1200" b="0" i="1">
+                <a:solidFill>
+                  <a:srgbClr val="5A5A5A"/>
+                </a:solidFill>
+                <a:latin typeface="맑은 고딕"/>
+              </a:rPr>
+              <a:t>n × (m−1)</a:t>
+            </a:r>
+          </a:p>
+        </p:txBody>
+      </p:sp>
+      <p:sp>
+        <p:nvSpPr>
+          <p:cNvPr id="8" name="Rectangle 7"/>
+          <p:cNvSpPr/>
+          <p:nvPr/>
+        </p:nvSpPr>
+        <p:spPr>
+          <a:xfrm>
+            <a:off x="6583679" y="1417320"/>
+            <a:ext cx="566928" cy="960120"/>
+          </a:xfrm>
+          <a:prstGeom prst="rect">
+            <a:avLst/>
+          </a:prstGeom>
+          <a:solidFill>
+            <a:srgbClr val="FBE7D4"/>
+          </a:solidFill>
+          <a:ln w="15875">
+            <a:solidFill>
+              <a:srgbClr val="C7CBD3"/>
+            </a:solidFill>
+          </a:ln>
+          <a:effectLst/>
+        </p:spPr>
+        <p:style>
+          <a:lnRef idx="1">
+            <a:schemeClr val="accent1"/>
+          </a:lnRef>
+          <a:fillRef idx="3">
+            <a:schemeClr val="accent1"/>
+          </a:fillRef>
+          <a:effectRef idx="2">
+            <a:schemeClr val="accent1"/>
+          </a:effectRef>
+          <a:fontRef idx="minor">
+            <a:schemeClr val="lt1"/>
+          </a:fontRef>
+        </p:style>
+        <p:txBody>
+          <a:bodyPr rtlCol="0" anchor="ctr" wrap="square"/>
+          <a:lstStyle/>
+          <a:p>
+            <a:pPr algn="ctr"/>
+            <a:r>
+              <a:rPr sz="1600" b="0" i="1">
+                <a:solidFill>
+                  <a:srgbClr val="222222"/>
+                </a:solidFill>
+                <a:latin typeface="Cambria Math"/>
+              </a:rPr>
+              <a:t>−b′</a:t>
+            </a:r>
+          </a:p>
+        </p:txBody>
+      </p:sp>
+      <p:sp>
+        <p:nvSpPr>
+          <p:cNvPr id="9" name="TextBox 8"/>
+          <p:cNvSpPr txBox="1"/>
+          <p:nvPr/>
+        </p:nvSpPr>
+        <p:spPr>
+          <a:xfrm>
+            <a:off x="6583679" y="2404872"/>
+            <a:ext cx="566928" cy="274320"/>
+          </a:xfrm>
+          <a:prstGeom prst="rect">
+            <a:avLst/>
+          </a:prstGeom>
+          <a:noFill/>
+        </p:spPr>
+        <p:txBody>
+          <a:bodyPr wrap="square" anchor="t" lIns="0" rIns="0" tIns="0" bIns="0">
+            <a:spAutoFit/>
+          </a:bodyPr>
+          <a:lstStyle/>
+          <a:p>
+            <a:pPr algn="ctr">
+              <a:lnSpc>
+                <a:spcPct val="115000"/>
+              </a:lnSpc>
+            </a:pPr>
+            <a:r>
+              <a:rPr sz="1200" b="0" i="1">
+                <a:solidFill>
+                  <a:srgbClr val="5A5A5A"/>
+                </a:solidFill>
+                <a:latin typeface="맑은 고딕"/>
+              </a:rPr>
+              <a:t>n × 1</a:t>
+            </a:r>
+          </a:p>
+        </p:txBody>
+      </p:sp>
+      <p:sp>
+        <p:nvSpPr>
+          <p:cNvPr id="10" name="TextBox 9"/>
+          <p:cNvSpPr txBox="1"/>
+          <p:nvPr/>
+        </p:nvSpPr>
+        <p:spPr>
+          <a:xfrm>
+            <a:off x="3291839" y="1417320"/>
+            <a:ext cx="822960" cy="960120"/>
+          </a:xfrm>
+          <a:prstGeom prst="rect">
+            <a:avLst/>
+          </a:prstGeom>
+          <a:noFill/>
+        </p:spPr>
+        <p:txBody>
+          <a:bodyPr wrap="square" anchor="ctr" lIns="0" rIns="0" tIns="0" bIns="0">
+            <a:spAutoFit/>
+          </a:bodyPr>
+          <a:lstStyle/>
+          <a:p>
+            <a:pPr algn="r">
+              <a:lnSpc>
+                <a:spcPct val="115000"/>
+              </a:lnSpc>
+            </a:pPr>
+            <a:r>
+              <a:rPr sz="2400" b="0" i="1">
+                <a:solidFill>
+                  <a:srgbClr val="222222"/>
+                </a:solidFill>
+                <a:latin typeface="맑은 고딕"/>
+              </a:rPr>
+              <a:t>A =</a:t>
+            </a:r>
+          </a:p>
+        </p:txBody>
+      </p:sp>
+      <p:sp>
+        <p:nvSpPr>
+          <p:cNvPr id="11" name="TextBox 10"/>
+          <p:cNvSpPr txBox="1"/>
+          <p:nvPr/>
+        </p:nvSpPr>
+        <p:spPr>
+          <a:xfrm>
+            <a:off x="685800" y="2788920"/>
+            <a:ext cx="10789920" cy="1874519"/>
           </a:xfrm>
           <a:prstGeom prst="rect">
             <a:avLst/>
@@ -4203,17 +4436,17 @@
                 <a:spcPct val="125000"/>
               </a:lnSpc>
               <a:spcAft>
-                <a:spcPts val="1600"/>
+                <a:spcPts val="800"/>
               </a:spcAft>
             </a:pPr>
             <a:r>
-              <a:rPr sz="1900">
+              <a:rPr sz="1750">
                 <a:solidFill>
                   <a:srgbClr val="222222"/>
                 </a:solidFill>
                 <a:latin typeface="맑은 고딕"/>
               </a:rPr>
-              <a:t>—  SIS ≤ ISIS: A의 마지막 열을 분리해 A=[A'|−b'] — zₘ=1로 고정하면 Az≡0 풀기가 A'z'≡b' (ISIS) 풀기와 같아짐</a:t>
+              <a:t>—  A의 마지막 열을 aₘ이라 하면 b′ := −aₘ mod q로 정의(별도 계산 아님), 나머지 m−1개 열이 A′</a:t>
             </a:r>
           </a:p>
           <a:p>
@@ -4222,17 +4455,17 @@
                 <a:spcPct val="125000"/>
               </a:lnSpc>
               <a:spcAft>
-                <a:spcPts val="1600"/>
+                <a:spcPts val="800"/>
               </a:spcAft>
             </a:pPr>
             <a:r>
-              <a:rPr sz="1900">
+              <a:rPr sz="1750">
                 <a:solidFill>
                   <a:srgbClr val="222222"/>
                 </a:solidFill>
                 <a:latin typeface="맑은 고딕"/>
               </a:rPr>
-              <a:t>—  ISIS ≤ SIS: 랜덤 위치 j에 열 −c⁻¹b 삽입 — SIS 오라클 해의 j번째 성분이 미리 찍어둔 c와 맞으면 b가 상쇄되어 ISIS 해로 변환 (확률적 환원)</a:t>
+              <a:t>—  zₘ=1로 고정하면 Az = A′z′+aₘzₘ = A′z′−b′ 이므로, Az≡0 풀기 ⟺ A′z′≡b′ (바로 ISIS 방정식)</a:t>
             </a:r>
           </a:p>
           <a:p>
@@ -4241,17 +4474,103 @@
                 <a:spcPct val="125000"/>
               </a:lnSpc>
               <a:spcAft>
-                <a:spcPts val="1600"/>
+                <a:spcPts val="800"/>
               </a:spcAft>
             </a:pPr>
             <a:r>
-              <a:rPr sz="1900">
+              <a:rPr sz="1750">
                 <a:solidFill>
                   <a:srgbClr val="222222"/>
                 </a:solidFill>
                 <a:latin typeface="맑은 고딕"/>
               </a:rPr>
-              <a:t>—  두 방향 모두 다항식 시간 환원 가능 → SIS와 ISIS는 계산적으로 동치</a:t>
+              <a:t>—  ISIS 오라클로 (A′,b′)의 해 z′∈[-B,B]^(m−1) 을 구하면 z=(z′;1) 이 SIS 해 — z≠0 자동 보장(마지막 좌표 1), z∈[-B,B]ᵐ 이려면 B≥1 필요</a:t>
+            </a:r>
+          </a:p>
+        </p:txBody>
+      </p:sp>
+      <p:sp>
+        <p:nvSpPr>
+          <p:cNvPr id="12" name="TextBox 11"/>
+          <p:cNvSpPr txBox="1"/>
+          <p:nvPr/>
+        </p:nvSpPr>
+        <p:spPr>
+          <a:xfrm>
+            <a:off x="685800" y="4846320"/>
+            <a:ext cx="10789920" cy="274320"/>
+          </a:xfrm>
+          <a:prstGeom prst="rect">
+            <a:avLst/>
+          </a:prstGeom>
+          <a:noFill/>
+        </p:spPr>
+        <p:txBody>
+          <a:bodyPr wrap="square" anchor="t" lIns="0" rIns="0" tIns="0" bIns="0">
+            <a:spAutoFit/>
+          </a:bodyPr>
+          <a:lstStyle/>
+          <a:p>
+            <a:pPr algn="l">
+              <a:lnSpc>
+                <a:spcPct val="115000"/>
+              </a:lnSpc>
+            </a:pPr>
+            <a:r>
+              <a:rPr sz="1500" b="1" i="0">
+                <a:solidFill>
+                  <a:srgbClr val="5A5A5A"/>
+                </a:solidFill>
+                <a:latin typeface="맑은 고딕"/>
+              </a:rPr>
+              <a:t>작은 수로 검산 (n=2, m=4, q=5)</a:t>
+            </a:r>
+          </a:p>
+        </p:txBody>
+      </p:sp>
+      <p:sp>
+        <p:nvSpPr>
+          <p:cNvPr id="13" name="TextBox 12"/>
+          <p:cNvSpPr txBox="1"/>
+          <p:nvPr/>
+        </p:nvSpPr>
+        <p:spPr>
+          <a:xfrm>
+            <a:off x="822960" y="5166360"/>
+            <a:ext cx="10515600" cy="1280160"/>
+          </a:xfrm>
+          <a:prstGeom prst="rect">
+            <a:avLst/>
+          </a:prstGeom>
+          <a:noFill/>
+        </p:spPr>
+        <p:txBody>
+          <a:bodyPr wrap="none">
+            <a:spAutoFit/>
+          </a:bodyPr>
+          <a:lstStyle/>
+          <a:p>
+            <a:pPr algn="l"/>
+            <a:r>
+              <a:rPr sz="1350">
+                <a:solidFill>
+                  <a:srgbClr val="222222"/>
+                </a:solidFill>
+                <a:latin typeface="Consolas"/>
+              </a:rPr>
+              <a:t>A=[1 2 3 4; 4 3 2 1] → a₄=(4,1), b′=−a₄ mod5=(1,4), A′=[1 2 3; 4 3 2]</a:t>
+            </a:r>
+          </a:p>
+          <a:p>
+            <a:pPr algn="l"/>
+            <a:r>
+              <a:rPr sz="1350">
+                <a:solidFill>
+                  <a:srgbClr val="222222"/>
+                </a:solidFill>
+                <a:latin typeface="Consolas"/>
+              </a:rPr>
+              <a:t>A′z′≡(1,4) 의 해 z′=(1,0,0) → z=(1,0,0,1): Az=(1+4,4+1)=(5,5)≡(0,0) ✓, z≠0 ✓</a:t>
             </a:r>
           </a:p>
         </p:txBody>
@@ -4360,7 +4679,7 @@
                 </a:solidFill>
                 <a:latin typeface="맑은 고딕"/>
               </a:rPr>
-              <a:t>Normal-form ISIS</a:t>
+              <a:t>ISIS ≤ SIS 증명 (Claim 2)</a:t>
             </a:r>
           </a:p>
         </p:txBody>
@@ -4399,7 +4718,7 @@
                 </a:solidFill>
                 <a:latin typeface="맑은 고딕"/>
               </a:rPr>
-              <a:t>2강 SIS · Part 7</a:t>
+              <a:t>2강 SIS · Part 6.2</a:t>
             </a:r>
           </a:p>
         </p:txBody>
@@ -4438,35 +4757,66 @@
                 </a:solidFill>
                 <a:latin typeface="맑은 고딕"/>
               </a:rPr>
-              <a:t>13 / 27</a:t>
-            </a:r>
-          </a:p>
-        </p:txBody>
-      </p:sp>
-      <p:pic>
-        <p:nvPicPr>
-          <p:cNvPr id="6" name="Picture 5" descr="m_s13_def.png"/>
-          <p:cNvPicPr>
-            <a:picLocks noChangeAspect="1"/>
-          </p:cNvPicPr>
-          <p:nvPr/>
-        </p:nvPicPr>
-        <p:blipFill>
-          <a:blip r:embed="rId2"/>
-          <a:stretch>
-            <a:fillRect/>
-          </a:stretch>
-        </p:blipFill>
-        <p:spPr>
-          <a:xfrm>
-            <a:off x="2209647" y="1691640"/>
-            <a:ext cx="7772400" cy="561340"/>
-          </a:xfrm>
-          <a:prstGeom prst="rect">
-            <a:avLst/>
-          </a:prstGeom>
-        </p:spPr>
-      </p:pic>
+              <a:t>13 / 33</a:t>
+            </a:r>
+          </a:p>
+        </p:txBody>
+      </p:sp>
+      <p:sp>
+        <p:nvSpPr>
+          <p:cNvPr id="6" name="Rectangle 5"/>
+          <p:cNvSpPr/>
+          <p:nvPr/>
+        </p:nvSpPr>
+        <p:spPr>
+          <a:xfrm>
+            <a:off x="3327044" y="1257300"/>
+            <a:ext cx="1247241" cy="960120"/>
+          </a:xfrm>
+          <a:prstGeom prst="rect">
+            <a:avLst/>
+          </a:prstGeom>
+          <a:solidFill>
+            <a:srgbClr val="F4F5F7"/>
+          </a:solidFill>
+          <a:ln w="15875">
+            <a:solidFill>
+              <a:srgbClr val="C7CBD3"/>
+            </a:solidFill>
+          </a:ln>
+          <a:effectLst/>
+        </p:spPr>
+        <p:style>
+          <a:lnRef idx="1">
+            <a:schemeClr val="accent1"/>
+          </a:lnRef>
+          <a:fillRef idx="3">
+            <a:schemeClr val="accent1"/>
+          </a:fillRef>
+          <a:effectRef idx="2">
+            <a:schemeClr val="accent1"/>
+          </a:effectRef>
+          <a:fontRef idx="minor">
+            <a:schemeClr val="lt1"/>
+          </a:fontRef>
+        </p:style>
+        <p:txBody>
+          <a:bodyPr rtlCol="0" anchor="ctr" wrap="square"/>
+          <a:lstStyle/>
+          <a:p>
+            <a:pPr algn="ctr"/>
+            <a:r>
+              <a:rPr sz="2200" b="0" i="1">
+                <a:solidFill>
+                  <a:srgbClr val="222222"/>
+                </a:solidFill>
+                <a:latin typeface="Cambria Math"/>
+              </a:rPr>
+              <a:t>A′</a:t>
+            </a:r>
+          </a:p>
+        </p:txBody>
+      </p:sp>
       <p:sp>
         <p:nvSpPr>
           <p:cNvPr id="7" name="TextBox 6"/>
@@ -4475,8 +4825,352 @@
         </p:nvSpPr>
         <p:spPr>
           <a:xfrm>
-            <a:off x="685800" y="3017520"/>
-            <a:ext cx="10789920" cy="3108960"/>
+            <a:off x="3327044" y="2244851"/>
+            <a:ext cx="1247241" cy="274320"/>
+          </a:xfrm>
+          <a:prstGeom prst="rect">
+            <a:avLst/>
+          </a:prstGeom>
+          <a:noFill/>
+        </p:spPr>
+        <p:txBody>
+          <a:bodyPr wrap="square" anchor="t" lIns="0" rIns="0" tIns="0" bIns="0">
+            <a:spAutoFit/>
+          </a:bodyPr>
+          <a:lstStyle/>
+          <a:p>
+            <a:pPr algn="ctr">
+              <a:lnSpc>
+                <a:spcPct val="115000"/>
+              </a:lnSpc>
+            </a:pPr>
+            <a:r>
+              <a:rPr sz="1200" b="0" i="1">
+                <a:solidFill>
+                  <a:srgbClr val="5A5A5A"/>
+                </a:solidFill>
+                <a:latin typeface="맑은 고딕"/>
+              </a:rPr>
+              <a:t>n × (m+1)</a:t>
+            </a:r>
+          </a:p>
+        </p:txBody>
+      </p:sp>
+      <p:sp>
+        <p:nvSpPr>
+          <p:cNvPr id="8" name="TextBox 7"/>
+          <p:cNvSpPr txBox="1"/>
+          <p:nvPr/>
+        </p:nvSpPr>
+        <p:spPr>
+          <a:xfrm>
+            <a:off x="4775454" y="1257300"/>
+            <a:ext cx="457200" cy="960120"/>
+          </a:xfrm>
+          <a:prstGeom prst="rect">
+            <a:avLst/>
+          </a:prstGeom>
+          <a:noFill/>
+        </p:spPr>
+        <p:txBody>
+          <a:bodyPr wrap="square" anchor="ctr" lIns="0" rIns="0" tIns="0" bIns="0">
+            <a:spAutoFit/>
+          </a:bodyPr>
+          <a:lstStyle/>
+          <a:p>
+            <a:pPr algn="ctr">
+              <a:lnSpc>
+                <a:spcPct val="115000"/>
+              </a:lnSpc>
+            </a:pPr>
+            <a:r>
+              <a:rPr sz="2800" b="0" i="0">
+                <a:solidFill>
+                  <a:srgbClr val="222222"/>
+                </a:solidFill>
+                <a:latin typeface="맑은 고딕"/>
+              </a:rPr>
+              <a:t/>
+            </a:r>
+          </a:p>
+        </p:txBody>
+      </p:sp>
+      <p:sp>
+        <p:nvSpPr>
+          <p:cNvPr id="9" name="Rectangle 8"/>
+          <p:cNvSpPr/>
+          <p:nvPr/>
+        </p:nvSpPr>
+        <p:spPr>
+          <a:xfrm>
+            <a:off x="5479542" y="1257300"/>
+            <a:ext cx="453542" cy="960120"/>
+          </a:xfrm>
+          <a:prstGeom prst="rect">
+            <a:avLst/>
+          </a:prstGeom>
+          <a:solidFill>
+            <a:srgbClr val="F4F5F7"/>
+          </a:solidFill>
+          <a:ln w="15875">
+            <a:solidFill>
+              <a:srgbClr val="C7CBD3"/>
+            </a:solidFill>
+          </a:ln>
+          <a:effectLst/>
+        </p:spPr>
+        <p:style>
+          <a:lnRef idx="1">
+            <a:schemeClr val="accent1"/>
+          </a:lnRef>
+          <a:fillRef idx="3">
+            <a:schemeClr val="accent1"/>
+          </a:fillRef>
+          <a:effectRef idx="2">
+            <a:schemeClr val="accent1"/>
+          </a:effectRef>
+          <a:fontRef idx="minor">
+            <a:schemeClr val="lt1"/>
+          </a:fontRef>
+        </p:style>
+        <p:txBody>
+          <a:bodyPr rtlCol="0" anchor="ctr" wrap="square"/>
+          <a:lstStyle/>
+          <a:p>
+            <a:pPr algn="ctr"/>
+            <a:r>
+              <a:rPr sz="2200" b="0" i="1">
+                <a:solidFill>
+                  <a:srgbClr val="222222"/>
+                </a:solidFill>
+                <a:latin typeface="Cambria Math"/>
+              </a:rPr>
+              <a:t>z′</a:t>
+            </a:r>
+          </a:p>
+        </p:txBody>
+      </p:sp>
+      <p:sp>
+        <p:nvSpPr>
+          <p:cNvPr id="10" name="TextBox 9"/>
+          <p:cNvSpPr txBox="1"/>
+          <p:nvPr/>
+        </p:nvSpPr>
+        <p:spPr>
+          <a:xfrm>
+            <a:off x="5479542" y="2244851"/>
+            <a:ext cx="453542" cy="274320"/>
+          </a:xfrm>
+          <a:prstGeom prst="rect">
+            <a:avLst/>
+          </a:prstGeom>
+          <a:noFill/>
+        </p:spPr>
+        <p:txBody>
+          <a:bodyPr wrap="square" anchor="t" lIns="0" rIns="0" tIns="0" bIns="0">
+            <a:spAutoFit/>
+          </a:bodyPr>
+          <a:lstStyle/>
+          <a:p>
+            <a:pPr algn="ctr">
+              <a:lnSpc>
+                <a:spcPct val="115000"/>
+              </a:lnSpc>
+            </a:pPr>
+            <a:r>
+              <a:rPr sz="1200" b="0" i="1">
+                <a:solidFill>
+                  <a:srgbClr val="5A5A5A"/>
+                </a:solidFill>
+                <a:latin typeface="맑은 고딕"/>
+              </a:rPr>
+              <a:t>(m+1) × 1</a:t>
+            </a:r>
+          </a:p>
+        </p:txBody>
+      </p:sp>
+      <p:sp>
+        <p:nvSpPr>
+          <p:cNvPr id="11" name="TextBox 10"/>
+          <p:cNvSpPr txBox="1"/>
+          <p:nvPr/>
+        </p:nvSpPr>
+        <p:spPr>
+          <a:xfrm>
+            <a:off x="6134252" y="1257300"/>
+            <a:ext cx="457200" cy="960120"/>
+          </a:xfrm>
+          <a:prstGeom prst="rect">
+            <a:avLst/>
+          </a:prstGeom>
+          <a:noFill/>
+        </p:spPr>
+        <p:txBody>
+          <a:bodyPr wrap="square" anchor="ctr" lIns="0" rIns="0" tIns="0" bIns="0">
+            <a:spAutoFit/>
+          </a:bodyPr>
+          <a:lstStyle/>
+          <a:p>
+            <a:pPr algn="ctr">
+              <a:lnSpc>
+                <a:spcPct val="115000"/>
+              </a:lnSpc>
+            </a:pPr>
+            <a:r>
+              <a:rPr sz="2800" b="0" i="0">
+                <a:solidFill>
+                  <a:srgbClr val="222222"/>
+                </a:solidFill>
+                <a:latin typeface="맑은 고딕"/>
+              </a:rPr>
+              <a:t>=</a:t>
+            </a:r>
+          </a:p>
+        </p:txBody>
+      </p:sp>
+      <p:sp>
+        <p:nvSpPr>
+          <p:cNvPr id="12" name="Rectangle 11"/>
+          <p:cNvSpPr/>
+          <p:nvPr/>
+        </p:nvSpPr>
+        <p:spPr>
+          <a:xfrm>
+            <a:off x="6838340" y="1257300"/>
+            <a:ext cx="453542" cy="960120"/>
+          </a:xfrm>
+          <a:prstGeom prst="rect">
+            <a:avLst/>
+          </a:prstGeom>
+          <a:solidFill>
+            <a:srgbClr val="F4F5F7"/>
+          </a:solidFill>
+          <a:ln w="15875">
+            <a:solidFill>
+              <a:srgbClr val="C7CBD3"/>
+            </a:solidFill>
+          </a:ln>
+          <a:effectLst/>
+        </p:spPr>
+        <p:style>
+          <a:lnRef idx="1">
+            <a:schemeClr val="accent1"/>
+          </a:lnRef>
+          <a:fillRef idx="3">
+            <a:schemeClr val="accent1"/>
+          </a:fillRef>
+          <a:effectRef idx="2">
+            <a:schemeClr val="accent1"/>
+          </a:effectRef>
+          <a:fontRef idx="minor">
+            <a:schemeClr val="lt1"/>
+          </a:fontRef>
+        </p:style>
+        <p:txBody>
+          <a:bodyPr rtlCol="0" anchor="ctr" wrap="square"/>
+          <a:lstStyle/>
+          <a:p>
+            <a:pPr algn="ctr"/>
+            <a:r>
+              <a:rPr sz="2200" b="0" i="1">
+                <a:solidFill>
+                  <a:srgbClr val="222222"/>
+                </a:solidFill>
+                <a:latin typeface="Cambria Math"/>
+              </a:rPr>
+              <a:t>0</a:t>
+            </a:r>
+          </a:p>
+        </p:txBody>
+      </p:sp>
+      <p:sp>
+        <p:nvSpPr>
+          <p:cNvPr id="13" name="TextBox 12"/>
+          <p:cNvSpPr txBox="1"/>
+          <p:nvPr/>
+        </p:nvSpPr>
+        <p:spPr>
+          <a:xfrm>
+            <a:off x="6838340" y="2244851"/>
+            <a:ext cx="453542" cy="274320"/>
+          </a:xfrm>
+          <a:prstGeom prst="rect">
+            <a:avLst/>
+          </a:prstGeom>
+          <a:noFill/>
+        </p:spPr>
+        <p:txBody>
+          <a:bodyPr wrap="square" anchor="t" lIns="0" rIns="0" tIns="0" bIns="0">
+            <a:spAutoFit/>
+          </a:bodyPr>
+          <a:lstStyle/>
+          <a:p>
+            <a:pPr algn="ctr">
+              <a:lnSpc>
+                <a:spcPct val="115000"/>
+              </a:lnSpc>
+            </a:pPr>
+            <a:r>
+              <a:rPr sz="1200" b="0" i="1">
+                <a:solidFill>
+                  <a:srgbClr val="5A5A5A"/>
+                </a:solidFill>
+                <a:latin typeface="맑은 고딕"/>
+              </a:rPr>
+              <a:t>n × 1</a:t>
+            </a:r>
+          </a:p>
+        </p:txBody>
+      </p:sp>
+      <p:sp>
+        <p:nvSpPr>
+          <p:cNvPr id="14" name="TextBox 13"/>
+          <p:cNvSpPr txBox="1"/>
+          <p:nvPr/>
+        </p:nvSpPr>
+        <p:spPr>
+          <a:xfrm>
+            <a:off x="7493050" y="1257300"/>
+            <a:ext cx="1371600" cy="960120"/>
+          </a:xfrm>
+          <a:prstGeom prst="rect">
+            <a:avLst/>
+          </a:prstGeom>
+          <a:noFill/>
+        </p:spPr>
+        <p:txBody>
+          <a:bodyPr wrap="square" anchor="ctr" lIns="0" rIns="0" tIns="0" bIns="0">
+            <a:spAutoFit/>
+          </a:bodyPr>
+          <a:lstStyle/>
+          <a:p>
+            <a:pPr algn="ctr">
+              <a:lnSpc>
+                <a:spcPct val="115000"/>
+              </a:lnSpc>
+            </a:pPr>
+            <a:r>
+              <a:rPr sz="1600" b="0" i="0">
+                <a:solidFill>
+                  <a:srgbClr val="5A5A5A"/>
+                </a:solidFill>
+                <a:latin typeface="맑은 고딕"/>
+              </a:rPr>
+              <a:t>(mod q)</a:t>
+            </a:r>
+          </a:p>
+        </p:txBody>
+      </p:sp>
+      <p:sp>
+        <p:nvSpPr>
+          <p:cNvPr id="15" name="TextBox 14"/>
+          <p:cNvSpPr txBox="1"/>
+          <p:nvPr/>
+        </p:nvSpPr>
+        <p:spPr>
+          <a:xfrm>
+            <a:off x="685800" y="2880360"/>
+            <a:ext cx="10789920" cy="2148840"/>
           </a:xfrm>
           <a:prstGeom prst="rect">
             <a:avLst/>
@@ -4494,17 +5188,17 @@
                 <a:spcPct val="125000"/>
               </a:lnSpc>
               <a:spcAft>
-                <a:spcPts val="1600"/>
+                <a:spcPts val="700"/>
               </a:spcAft>
             </a:pPr>
             <a:r>
-              <a:rPr sz="2000">
+              <a:rPr sz="1650">
                 <a:solidFill>
                   <a:srgbClr val="222222"/>
                 </a:solidFill>
                 <a:latin typeface="맑은 고딕"/>
               </a:rPr>
-              <a:t>—  계수행렬의 뒤쪽 n개 열이 이미 단위행렬 I_n으로 “정규화”된 특수한 ISIS</a:t>
+              <a:t>—  ISIS 인스턴스 (A,b): j∈[1,m+1], c∈[-B,B] (c≠0)을 랜덤 선택 → A의 j번째 자리에 새 열 −c⁻¹b mod q를 삽입해 A′ 구성</a:t>
             </a:r>
           </a:p>
           <a:p>
@@ -4513,17 +5207,141 @@
                 <a:spcPct val="125000"/>
               </a:lnSpc>
               <a:spcAft>
-                <a:spcPts val="1600"/>
+                <a:spcPts val="700"/>
               </a:spcAft>
             </a:pPr>
             <a:r>
-              <a:rPr sz="2000">
+              <a:rPr sz="1650">
                 <a:solidFill>
                   <a:srgbClr val="222222"/>
                 </a:solidFill>
                 <a:latin typeface="맑은 고딕"/>
               </a:rPr>
-              <a:t>—  nf-ISIS(n,m,q,B)와 ISIS(n,m+n,q,B)는 동치 — 가역행렬 C를 곱해 서로 변환 가능</a:t>
+              <a:t>—  SIS 오라클로 A′z′≡0의 해 z′∈[-B,B]^(m+1) 을 구함</a:t>
+            </a:r>
+          </a:p>
+          <a:p>
+            <a:pPr>
+              <a:lnSpc>
+                <a:spcPct val="125000"/>
+              </a:lnSpc>
+              <a:spcAft>
+                <a:spcPts val="700"/>
+              </a:spcAft>
+            </a:pPr>
+            <a:r>
+              <a:rPr sz="1650">
+                <a:solidFill>
+                  <a:srgbClr val="222222"/>
+                </a:solidFill>
+                <a:latin typeface="맑은 고딕"/>
+              </a:rPr>
+              <a:t>—  z′의 j번째 성분이 정확히 c라면: 그 성분을 뺀 나머지 z가 Az≡b (mod q)를 만족하는 ISIS 해 — b가 정확히 한 번 상쇄되도록 열을 설계했기 때문</a:t>
+            </a:r>
+          </a:p>
+          <a:p>
+            <a:pPr>
+              <a:lnSpc>
+                <a:spcPct val="125000"/>
+              </a:lnSpc>
+              <a:spcAft>
+                <a:spcPts val="700"/>
+              </a:spcAft>
+            </a:pPr>
+            <a:r>
+              <a:rPr sz="1650">
+                <a:solidFill>
+                  <a:srgbClr val="222222"/>
+                </a:solidFill>
+                <a:latin typeface="맑은 고딕"/>
+              </a:rPr>
+              <a:t>—  z′의 j번째 성분이 c일 확률 ≈ 1/(2Bm) — 확률적(randomized) 환원</a:t>
+            </a:r>
+          </a:p>
+        </p:txBody>
+      </p:sp>
+      <p:sp>
+        <p:nvSpPr>
+          <p:cNvPr id="16" name="TextBox 15"/>
+          <p:cNvSpPr txBox="1"/>
+          <p:nvPr/>
+        </p:nvSpPr>
+        <p:spPr>
+          <a:xfrm>
+            <a:off x="685800" y="5120640"/>
+            <a:ext cx="10789920" cy="274320"/>
+          </a:xfrm>
+          <a:prstGeom prst="rect">
+            <a:avLst/>
+          </a:prstGeom>
+          <a:noFill/>
+        </p:spPr>
+        <p:txBody>
+          <a:bodyPr wrap="square" anchor="t" lIns="0" rIns="0" tIns="0" bIns="0">
+            <a:spAutoFit/>
+          </a:bodyPr>
+          <a:lstStyle/>
+          <a:p>
+            <a:pPr algn="l">
+              <a:lnSpc>
+                <a:spcPct val="115000"/>
+              </a:lnSpc>
+            </a:pPr>
+            <a:r>
+              <a:rPr sz="1500" b="1" i="0">
+                <a:solidFill>
+                  <a:srgbClr val="5A5A5A"/>
+                </a:solidFill>
+                <a:latin typeface="맑은 고딕"/>
+              </a:rPr>
+              <a:t>작은 수로 검산 (n=2, m=2, q=5, B=2)</a:t>
+            </a:r>
+          </a:p>
+        </p:txBody>
+      </p:sp>
+      <p:sp>
+        <p:nvSpPr>
+          <p:cNvPr id="17" name="TextBox 16"/>
+          <p:cNvSpPr txBox="1"/>
+          <p:nvPr/>
+        </p:nvSpPr>
+        <p:spPr>
+          <a:xfrm>
+            <a:off x="822960" y="5440680"/>
+            <a:ext cx="10515600" cy="914400"/>
+          </a:xfrm>
+          <a:prstGeom prst="rect">
+            <a:avLst/>
+          </a:prstGeom>
+          <a:noFill/>
+        </p:spPr>
+        <p:txBody>
+          <a:bodyPr wrap="none">
+            <a:spAutoFit/>
+          </a:bodyPr>
+          <a:lstStyle/>
+          <a:p>
+            <a:pPr algn="l"/>
+            <a:r>
+              <a:rPr sz="1350">
+                <a:solidFill>
+                  <a:srgbClr val="222222"/>
+                </a:solidFill>
+                <a:latin typeface="Consolas"/>
+              </a:rPr>
+              <a:t>A=[1 2; 3 4], b=(1,2). j=3,c=1 → 새 열=−1⁻¹·(1,2) mod5=(4,3), A′=[1 2 4; 3 4 3]</a:t>
+            </a:r>
+          </a:p>
+          <a:p>
+            <a:pPr algn="l"/>
+            <a:r>
+              <a:rPr sz="1350">
+                <a:solidFill>
+                  <a:srgbClr val="222222"/>
+                </a:solidFill>
+                <a:latin typeface="Consolas"/>
+              </a:rPr>
+              <a:t>SIS 오라클이 z′=(0,-2,1) 반환(z′₃=c=1) → z=(0,-2): Az=(-4,-8)≡(1,2)=b (mod5) ✓</a:t>
             </a:r>
           </a:p>
         </p:txBody>
@@ -4632,7 +5450,7 @@
                 </a:solidFill>
                 <a:latin typeface="맑은 고딕"/>
               </a:rPr>
-              <a:t>SIS 파트 정리</a:t>
+              <a:t>Normal-form ISIS</a:t>
             </a:r>
           </a:p>
         </p:txBody>
@@ -4671,7 +5489,7 @@
                 </a:solidFill>
                 <a:latin typeface="맑은 고딕"/>
               </a:rPr>
-              <a:t>2강 SIS</a:t>
+              <a:t>2강 SIS · Part 7</a:t>
             </a:r>
           </a:p>
         </p:txBody>
@@ -4710,7 +5528,360 @@
                 </a:solidFill>
                 <a:latin typeface="맑은 고딕"/>
               </a:rPr>
-              <a:t>14 / 27</a:t>
+              <a:t>14 / 33</a:t>
+            </a:r>
+          </a:p>
+        </p:txBody>
+      </p:sp>
+      <p:pic>
+        <p:nvPicPr>
+          <p:cNvPr id="6" name="Picture 5" descr="m_s13_def.png"/>
+          <p:cNvPicPr>
+            <a:picLocks noChangeAspect="1"/>
+          </p:cNvPicPr>
+          <p:nvPr/>
+        </p:nvPicPr>
+        <p:blipFill>
+          <a:blip r:embed="rId2"/>
+          <a:stretch>
+            <a:fillRect/>
+          </a:stretch>
+        </p:blipFill>
+        <p:spPr>
+          <a:xfrm>
+            <a:off x="2209647" y="1371600"/>
+            <a:ext cx="7772400" cy="561340"/>
+          </a:xfrm>
+          <a:prstGeom prst="rect">
+            <a:avLst/>
+          </a:prstGeom>
+        </p:spPr>
+      </p:pic>
+      <p:sp>
+        <p:nvSpPr>
+          <p:cNvPr id="7" name="TextBox 6"/>
+          <p:cNvSpPr txBox="1"/>
+          <p:nvPr/>
+        </p:nvSpPr>
+        <p:spPr>
+          <a:xfrm>
+            <a:off x="685800" y="2651760"/>
+            <a:ext cx="10789920" cy="822960"/>
+          </a:xfrm>
+          <a:prstGeom prst="rect">
+            <a:avLst/>
+          </a:prstGeom>
+          <a:noFill/>
+        </p:spPr>
+        <p:txBody>
+          <a:bodyPr wrap="square" lIns="0" rIns="0" tIns="0" bIns="0">
+            <a:spAutoFit/>
+          </a:bodyPr>
+          <a:lstStyle/>
+          <a:p>
+            <a:pPr>
+              <a:lnSpc>
+                <a:spcPct val="125000"/>
+              </a:lnSpc>
+              <a:spcAft>
+                <a:spcPts val="1000"/>
+              </a:spcAft>
+            </a:pPr>
+            <a:r>
+              <a:rPr sz="1700">
+                <a:solidFill>
+                  <a:srgbClr val="222222"/>
+                </a:solidFill>
+                <a:latin typeface="맑은 고딕"/>
+              </a:rPr>
+              <a:t>—  계수행렬의 뒤쪽 n개 열이 이미 단위행렬 Iₙ으로 “정규화”된 특수한 ISIS — nf-ISIS(n,m,q,B) ≡ ISIS(n,m+n,q,B)</a:t>
+            </a:r>
+          </a:p>
+        </p:txBody>
+      </p:sp>
+      <p:sp>
+        <p:nvSpPr>
+          <p:cNvPr id="8" name="TextBox 7"/>
+          <p:cNvSpPr txBox="1"/>
+          <p:nvPr/>
+        </p:nvSpPr>
+        <p:spPr>
+          <a:xfrm>
+            <a:off x="685800" y="3611880"/>
+            <a:ext cx="10789920" cy="274320"/>
+          </a:xfrm>
+          <a:prstGeom prst="rect">
+            <a:avLst/>
+          </a:prstGeom>
+          <a:noFill/>
+        </p:spPr>
+        <p:txBody>
+          <a:bodyPr wrap="square" anchor="t" lIns="0" rIns="0" tIns="0" bIns="0">
+            <a:spAutoFit/>
+          </a:bodyPr>
+          <a:lstStyle/>
+          <a:p>
+            <a:pPr algn="l">
+              <a:lnSpc>
+                <a:spcPct val="115000"/>
+              </a:lnSpc>
+            </a:pPr>
+            <a:r>
+              <a:rPr sz="1500" b="1" i="0">
+                <a:solidFill>
+                  <a:srgbClr val="5A5A5A"/>
+                </a:solidFill>
+                <a:latin typeface="맑은 고딕"/>
+              </a:rPr>
+              <a:t>Claim 증명 — 양방향 모두 가역행렬 C를 곱해 변환</a:t>
+            </a:r>
+          </a:p>
+        </p:txBody>
+      </p:sp>
+      <p:sp>
+        <p:nvSpPr>
+          <p:cNvPr id="9" name="TextBox 8"/>
+          <p:cNvSpPr txBox="1"/>
+          <p:nvPr/>
+        </p:nvSpPr>
+        <p:spPr>
+          <a:xfrm>
+            <a:off x="822960" y="3931920"/>
+            <a:ext cx="10424160" cy="2651760"/>
+          </a:xfrm>
+          <a:prstGeom prst="rect">
+            <a:avLst/>
+          </a:prstGeom>
+          <a:noFill/>
+        </p:spPr>
+        <p:txBody>
+          <a:bodyPr wrap="square" lIns="0" rIns="0" tIns="0" bIns="0">
+            <a:spAutoFit/>
+          </a:bodyPr>
+          <a:lstStyle/>
+          <a:p>
+            <a:pPr>
+              <a:lnSpc>
+                <a:spcPct val="125000"/>
+              </a:lnSpc>
+              <a:spcAft>
+                <a:spcPts val="1000"/>
+              </a:spcAft>
+            </a:pPr>
+            <a:r>
+              <a:rPr sz="1650">
+                <a:solidFill>
+                  <a:srgbClr val="222222"/>
+                </a:solidFill>
+                <a:latin typeface="맑은 고딕"/>
+              </a:rPr>
+              <a:t>—  (nf-ISIS ≤ ISIS): nf-ISIS 인스턴스 (A,b)에서 C∈R ℤq^(n×n) 선택(≈(q-1)/q 확률로 가역) → ([CA|C], Cb)는 nf-ISIS와 같은 해 공간을 갖는 ISIS 인스턴스</a:t>
+            </a:r>
+          </a:p>
+          <a:p>
+            <a:pPr>
+              <a:lnSpc>
+                <a:spcPct val="125000"/>
+              </a:lnSpc>
+              <a:spcAft>
+                <a:spcPts val="1000"/>
+              </a:spcAft>
+            </a:pPr>
+            <a:r>
+              <a:rPr sz="1650">
+                <a:solidFill>
+                  <a:srgbClr val="222222"/>
+                </a:solidFill>
+                <a:latin typeface="맑은 고딕"/>
+              </a:rPr>
+              <a:t>—  (ISIS ≤ nf-ISIS): ISIS 인스턴스 (A,b)에서 A=[A′|C]로 분해(C는 n×n, ≈(q-1)/q 확률로 가역) → ([C⁻¹A′|Iₙ], C⁻¹b)는 ISIS와 같은 해 공간을 갖는 nf-ISIS 인스턴스</a:t>
+            </a:r>
+          </a:p>
+        </p:txBody>
+      </p:sp>
+    </p:spTree>
+  </p:cSld>
+  <p:clrMapOvr>
+    <a:masterClrMapping/>
+  </p:clrMapOvr>
+</p:sld>
+</file>
+
+<file path=ppt/slides/slide15.xml><?xml version="1.0" encoding="utf-8"?>
+<p:sld xmlns:a="http://schemas.openxmlformats.org/drawingml/2006/main" xmlns:p="http://schemas.openxmlformats.org/presentationml/2006/main" xmlns:r="http://schemas.openxmlformats.org/officeDocument/2006/relationships">
+  <p:cSld>
+    <p:bg>
+      <p:bgPr>
+        <a:solidFill>
+          <a:srgbClr val="FFFFFF"/>
+        </a:solidFill>
+        <a:effectLst/>
+      </p:bgPr>
+    </p:bg>
+    <p:spTree>
+      <p:nvGrpSpPr>
+        <p:cNvPr id="1" name=""/>
+        <p:cNvGrpSpPr/>
+        <p:nvPr/>
+      </p:nvGrpSpPr>
+      <p:grpSpPr/>
+      <p:sp>
+        <p:nvSpPr>
+          <p:cNvPr id="2" name="Rectangle 1"/>
+          <p:cNvSpPr/>
+          <p:nvPr/>
+        </p:nvSpPr>
+        <p:spPr>
+          <a:xfrm>
+            <a:off x="0" y="0"/>
+            <a:ext cx="12191695" cy="1051560"/>
+          </a:xfrm>
+          <a:prstGeom prst="rect">
+            <a:avLst/>
+          </a:prstGeom>
+          <a:solidFill>
+            <a:srgbClr val="2C3E86"/>
+          </a:solidFill>
+          <a:ln>
+            <a:noFill/>
+          </a:ln>
+          <a:effectLst/>
+        </p:spPr>
+        <p:style>
+          <a:lnRef idx="1">
+            <a:schemeClr val="accent1"/>
+          </a:lnRef>
+          <a:fillRef idx="3">
+            <a:schemeClr val="accent1"/>
+          </a:fillRef>
+          <a:effectRef idx="2">
+            <a:schemeClr val="accent1"/>
+          </a:effectRef>
+          <a:fontRef idx="minor">
+            <a:schemeClr val="lt1"/>
+          </a:fontRef>
+        </p:style>
+        <p:txBody>
+          <a:bodyPr rtlCol="0" anchor="ctr"/>
+          <a:lstStyle/>
+          <a:p>
+            <a:pPr algn="ctr"/>
+          </a:p>
+        </p:txBody>
+      </p:sp>
+      <p:sp>
+        <p:nvSpPr>
+          <p:cNvPr id="3" name="TextBox 2"/>
+          <p:cNvSpPr txBox="1"/>
+          <p:nvPr/>
+        </p:nvSpPr>
+        <p:spPr>
+          <a:xfrm>
+            <a:off x="502920" y="118872"/>
+            <a:ext cx="11185855" cy="822960"/>
+          </a:xfrm>
+          <a:prstGeom prst="rect">
+            <a:avLst/>
+          </a:prstGeom>
+          <a:noFill/>
+        </p:spPr>
+        <p:txBody>
+          <a:bodyPr wrap="square" anchor="ctr" lIns="0" rIns="0" tIns="0" bIns="0">
+            <a:spAutoFit/>
+          </a:bodyPr>
+          <a:lstStyle/>
+          <a:p>
+            <a:pPr algn="l">
+              <a:lnSpc>
+                <a:spcPct val="115000"/>
+              </a:lnSpc>
+            </a:pPr>
+            <a:r>
+              <a:rPr sz="2700" b="1" i="0">
+                <a:solidFill>
+                  <a:srgbClr val="FFFFFF"/>
+                </a:solidFill>
+                <a:latin typeface="맑은 고딕"/>
+              </a:rPr>
+              <a:t>SIS 파트 정리</a:t>
+            </a:r>
+          </a:p>
+        </p:txBody>
+      </p:sp>
+      <p:sp>
+        <p:nvSpPr>
+          <p:cNvPr id="4" name="TextBox 3"/>
+          <p:cNvSpPr txBox="1"/>
+          <p:nvPr/>
+        </p:nvSpPr>
+        <p:spPr>
+          <a:xfrm>
+            <a:off x="502920" y="6473952"/>
+            <a:ext cx="5486400" cy="320040"/>
+          </a:xfrm>
+          <a:prstGeom prst="rect">
+            <a:avLst/>
+          </a:prstGeom>
+          <a:noFill/>
+        </p:spPr>
+        <p:txBody>
+          <a:bodyPr wrap="square" anchor="t" lIns="0" rIns="0" tIns="0" bIns="0">
+            <a:spAutoFit/>
+          </a:bodyPr>
+          <a:lstStyle/>
+          <a:p>
+            <a:pPr algn="l">
+              <a:lnSpc>
+                <a:spcPct val="115000"/>
+              </a:lnSpc>
+            </a:pPr>
+            <a:r>
+              <a:rPr sz="1100" b="0" i="0">
+                <a:solidFill>
+                  <a:srgbClr val="5A5A5A"/>
+                </a:solidFill>
+                <a:latin typeface="맑은 고딕"/>
+              </a:rPr>
+              <a:t>2강 SIS</a:t>
+            </a:r>
+          </a:p>
+        </p:txBody>
+      </p:sp>
+      <p:sp>
+        <p:nvSpPr>
+          <p:cNvPr id="5" name="TextBox 4"/>
+          <p:cNvSpPr txBox="1"/>
+          <p:nvPr/>
+        </p:nvSpPr>
+        <p:spPr>
+          <a:xfrm>
+            <a:off x="11002975" y="6473952"/>
+            <a:ext cx="822960" cy="320040"/>
+          </a:xfrm>
+          <a:prstGeom prst="rect">
+            <a:avLst/>
+          </a:prstGeom>
+          <a:noFill/>
+        </p:spPr>
+        <p:txBody>
+          <a:bodyPr wrap="square" anchor="t" lIns="0" rIns="0" tIns="0" bIns="0">
+            <a:spAutoFit/>
+          </a:bodyPr>
+          <a:lstStyle/>
+          <a:p>
+            <a:pPr algn="r">
+              <a:lnSpc>
+                <a:spcPct val="115000"/>
+              </a:lnSpc>
+            </a:pPr>
+            <a:r>
+              <a:rPr sz="1100" b="0" i="0">
+                <a:solidFill>
+                  <a:srgbClr val="5A5A5A"/>
+                </a:solidFill>
+                <a:latin typeface="맑은 고딕"/>
+              </a:rPr>
+              <a:t>15 / 33</a:t>
             </a:r>
           </a:p>
         </p:txBody>
@@ -5095,7 +6266,7 @@
 </p:sld>
 </file>
 
-<file path=ppt/slides/slide15.xml><?xml version="1.0" encoding="utf-8"?>
+<file path=ppt/slides/slide16.xml><?xml version="1.0" encoding="utf-8"?>
 <p:sld xmlns:a="http://schemas.openxmlformats.org/drawingml/2006/main" xmlns:p="http://schemas.openxmlformats.org/presentationml/2006/main" xmlns:r="http://schemas.openxmlformats.org/officeDocument/2006/relationships">
   <p:cSld>
     <p:bg>
@@ -5269,7 +6440,7 @@
                 </a:solidFill>
                 <a:latin typeface="맑은 고딕"/>
               </a:rPr>
-              <a:t>15 / 27</a:t>
+              <a:t>16 / 33</a:t>
             </a:r>
           </a:p>
         </p:txBody>
@@ -6087,273 +7258,6 @@
 </p:sld>
 </file>
 
-<file path=ppt/slides/slide16.xml><?xml version="1.0" encoding="utf-8"?>
-<p:sld xmlns:a="http://schemas.openxmlformats.org/drawingml/2006/main" xmlns:p="http://schemas.openxmlformats.org/presentationml/2006/main" xmlns:r="http://schemas.openxmlformats.org/officeDocument/2006/relationships">
-  <p:cSld>
-    <p:bg>
-      <p:bgPr>
-        <a:solidFill>
-          <a:srgbClr val="FFFFFF"/>
-        </a:solidFill>
-        <a:effectLst/>
-      </p:bgPr>
-    </p:bg>
-    <p:spTree>
-      <p:nvGrpSpPr>
-        <p:cNvPr id="1" name=""/>
-        <p:cNvGrpSpPr/>
-        <p:nvPr/>
-      </p:nvGrpSpPr>
-      <p:grpSpPr/>
-      <p:sp>
-        <p:nvSpPr>
-          <p:cNvPr id="2" name="Rectangle 1"/>
-          <p:cNvSpPr/>
-          <p:nvPr/>
-        </p:nvSpPr>
-        <p:spPr>
-          <a:xfrm>
-            <a:off x="0" y="0"/>
-            <a:ext cx="12191695" cy="1051560"/>
-          </a:xfrm>
-          <a:prstGeom prst="rect">
-            <a:avLst/>
-          </a:prstGeom>
-          <a:solidFill>
-            <a:srgbClr val="0E6E6A"/>
-          </a:solidFill>
-          <a:ln>
-            <a:noFill/>
-          </a:ln>
-          <a:effectLst/>
-        </p:spPr>
-        <p:style>
-          <a:lnRef idx="1">
-            <a:schemeClr val="accent1"/>
-          </a:lnRef>
-          <a:fillRef idx="3">
-            <a:schemeClr val="accent1"/>
-          </a:fillRef>
-          <a:effectRef idx="2">
-            <a:schemeClr val="accent1"/>
-          </a:effectRef>
-          <a:fontRef idx="minor">
-            <a:schemeClr val="lt1"/>
-          </a:fontRef>
-        </p:style>
-        <p:txBody>
-          <a:bodyPr rtlCol="0" anchor="ctr"/>
-          <a:lstStyle/>
-          <a:p>
-            <a:pPr algn="ctr"/>
-          </a:p>
-        </p:txBody>
-      </p:sp>
-      <p:sp>
-        <p:nvSpPr>
-          <p:cNvPr id="3" name="TextBox 2"/>
-          <p:cNvSpPr txBox="1"/>
-          <p:nvPr/>
-        </p:nvSpPr>
-        <p:spPr>
-          <a:xfrm>
-            <a:off x="502920" y="118872"/>
-            <a:ext cx="11185855" cy="822960"/>
-          </a:xfrm>
-          <a:prstGeom prst="rect">
-            <a:avLst/>
-          </a:prstGeom>
-          <a:noFill/>
-        </p:spPr>
-        <p:txBody>
-          <a:bodyPr wrap="square" anchor="ctr" lIns="0" rIns="0" tIns="0" bIns="0">
-            <a:spAutoFit/>
-          </a:bodyPr>
-          <a:lstStyle/>
-          <a:p>
-            <a:pPr algn="l">
-              <a:lnSpc>
-                <a:spcPct val="115000"/>
-              </a:lnSpc>
-            </a:pPr>
-            <a:r>
-              <a:rPr sz="2700" b="1" i="0">
-                <a:solidFill>
-                  <a:srgbClr val="FFFFFF"/>
-                </a:solidFill>
-                <a:latin typeface="맑은 고딕"/>
-              </a:rPr>
-              <a:t>왜 어려운가: 잡음이 만드는 비선형성</a:t>
-            </a:r>
-          </a:p>
-        </p:txBody>
-      </p:sp>
-      <p:sp>
-        <p:nvSpPr>
-          <p:cNvPr id="4" name="TextBox 3"/>
-          <p:cNvSpPr txBox="1"/>
-          <p:nvPr/>
-        </p:nvSpPr>
-        <p:spPr>
-          <a:xfrm>
-            <a:off x="502920" y="6473952"/>
-            <a:ext cx="5486400" cy="320040"/>
-          </a:xfrm>
-          <a:prstGeom prst="rect">
-            <a:avLst/>
-          </a:prstGeom>
-          <a:noFill/>
-        </p:spPr>
-        <p:txBody>
-          <a:bodyPr wrap="square" anchor="t" lIns="0" rIns="0" tIns="0" bIns="0">
-            <a:spAutoFit/>
-          </a:bodyPr>
-          <a:lstStyle/>
-          <a:p>
-            <a:pPr algn="l">
-              <a:lnSpc>
-                <a:spcPct val="115000"/>
-              </a:lnSpc>
-            </a:pPr>
-            <a:r>
-              <a:rPr sz="1100" b="0" i="0">
-                <a:solidFill>
-                  <a:srgbClr val="5A5A5A"/>
-                </a:solidFill>
-                <a:latin typeface="맑은 고딕"/>
-              </a:rPr>
-              <a:t>3강 LWE · Part 1.2</a:t>
-            </a:r>
-          </a:p>
-        </p:txBody>
-      </p:sp>
-      <p:sp>
-        <p:nvSpPr>
-          <p:cNvPr id="5" name="TextBox 4"/>
-          <p:cNvSpPr txBox="1"/>
-          <p:nvPr/>
-        </p:nvSpPr>
-        <p:spPr>
-          <a:xfrm>
-            <a:off x="11002975" y="6473952"/>
-            <a:ext cx="822960" cy="320040"/>
-          </a:xfrm>
-          <a:prstGeom prst="rect">
-            <a:avLst/>
-          </a:prstGeom>
-          <a:noFill/>
-        </p:spPr>
-        <p:txBody>
-          <a:bodyPr wrap="square" anchor="t" lIns="0" rIns="0" tIns="0" bIns="0">
-            <a:spAutoFit/>
-          </a:bodyPr>
-          <a:lstStyle/>
-          <a:p>
-            <a:pPr algn="r">
-              <a:lnSpc>
-                <a:spcPct val="115000"/>
-              </a:lnSpc>
-            </a:pPr>
-            <a:r>
-              <a:rPr sz="1100" b="0" i="0">
-                <a:solidFill>
-                  <a:srgbClr val="5A5A5A"/>
-                </a:solidFill>
-                <a:latin typeface="맑은 고딕"/>
-              </a:rPr>
-              <a:t>16 / 27</a:t>
-            </a:r>
-          </a:p>
-        </p:txBody>
-      </p:sp>
-      <p:sp>
-        <p:nvSpPr>
-          <p:cNvPr id="6" name="TextBox 5"/>
-          <p:cNvSpPr txBox="1"/>
-          <p:nvPr/>
-        </p:nvSpPr>
-        <p:spPr>
-          <a:xfrm>
-            <a:off x="685800" y="1554480"/>
-            <a:ext cx="10789920" cy="4206240"/>
-          </a:xfrm>
-          <a:prstGeom prst="rect">
-            <a:avLst/>
-          </a:prstGeom>
-          <a:noFill/>
-        </p:spPr>
-        <p:txBody>
-          <a:bodyPr wrap="square" lIns="0" rIns="0" tIns="0" bIns="0">
-            <a:spAutoFit/>
-          </a:bodyPr>
-          <a:lstStyle/>
-          <a:p>
-            <a:pPr>
-              <a:lnSpc>
-                <a:spcPct val="125000"/>
-              </a:lnSpc>
-              <a:spcAft>
-                <a:spcPts val="1800"/>
-              </a:spcAft>
-            </a:pPr>
-            <a:r>
-              <a:rPr sz="2000">
-                <a:solidFill>
-                  <a:srgbClr val="222222"/>
-                </a:solidFill>
-                <a:latin typeface="맑은 고딕"/>
-              </a:rPr>
-              <a:t>—  e = 0 이면 As ≡ b (mod q)는 순수 선형방정식 — 가우스 소거법으로 다항식 시간에 풀림</a:t>
-            </a:r>
-          </a:p>
-          <a:p>
-            <a:pPr>
-              <a:lnSpc>
-                <a:spcPct val="125000"/>
-              </a:lnSpc>
-              <a:spcAft>
-                <a:spcPts val="1800"/>
-              </a:spcAft>
-            </a:pPr>
-            <a:r>
-              <a:rPr sz="2000">
-                <a:solidFill>
-                  <a:srgbClr val="222222"/>
-                </a:solidFill>
-                <a:latin typeface="맑은 고딕"/>
-              </a:rPr>
-              <a:t>—  잡음 벡터 e가 섞이면 “이 값이 정확히 As의 성분과 같다”는 등식 자체가 깨진다</a:t>
-            </a:r>
-          </a:p>
-          <a:p>
-            <a:pPr>
-              <a:lnSpc>
-                <a:spcPct val="125000"/>
-              </a:lnSpc>
-              <a:spcAft>
-                <a:spcPts val="1800"/>
-              </a:spcAft>
-            </a:pPr>
-            <a:r>
-              <a:rPr sz="2000">
-                <a:solidFill>
-                  <a:srgbClr val="222222"/>
-                </a:solidFill>
-                <a:latin typeface="맑은 고딕"/>
-              </a:rPr>
-              <a:t>—  LWE는 정확한 선형대수 문제가 아니라 잡음 섞인 선형대수 문제 — 가우스 소거법이 통하지 않는다</a:t>
-            </a:r>
-          </a:p>
-        </p:txBody>
-      </p:sp>
-    </p:spTree>
-  </p:cSld>
-  <p:clrMapOvr>
-    <a:masterClrMapping/>
-  </p:clrMapOvr>
-</p:sld>
-</file>
-
 <file path=ppt/slides/slide17.xml><?xml version="1.0" encoding="utf-8"?>
 <p:sld xmlns:a="http://schemas.openxmlformats.org/drawingml/2006/main" xmlns:p="http://schemas.openxmlformats.org/presentationml/2006/main" xmlns:r="http://schemas.openxmlformats.org/officeDocument/2006/relationships">
   <p:cSld>
@@ -6450,7 +7354,7 @@
                 </a:solidFill>
                 <a:latin typeface="맑은 고딕"/>
               </a:rPr>
-              <a:t>숫자 예제 — 해가 여러 개인 이유</a:t>
+              <a:t>왜 어려운가: 잡음이 만드는 비선형성</a:t>
             </a:r>
           </a:p>
         </p:txBody>
@@ -6489,7 +7393,7 @@
                 </a:solidFill>
                 <a:latin typeface="맑은 고딕"/>
               </a:rPr>
-              <a:t>3강 LWE · Part 1.4 · 2.2</a:t>
+              <a:t>3강 LWE · Part 1.2</a:t>
             </a:r>
           </a:p>
         </p:txBody>
@@ -6528,7 +7432,7 @@
                 </a:solidFill>
                 <a:latin typeface="맑은 고딕"/>
               </a:rPr>
-              <a:t>17 / 27</a:t>
+              <a:t>17 / 33</a:t>
             </a:r>
           </a:p>
         </p:txBody>
@@ -6541,236 +7445,74 @@
         </p:nvSpPr>
         <p:spPr>
           <a:xfrm>
-            <a:off x="685800" y="1371600"/>
-            <a:ext cx="10058400" cy="365760"/>
-          </a:xfrm>
-          <a:prstGeom prst="rect">
-            <a:avLst/>
-          </a:prstGeom>
-          <a:noFill/>
-        </p:spPr>
-        <p:txBody>
-          <a:bodyPr wrap="square" anchor="t" lIns="0" rIns="0" tIns="0" bIns="0">
-            <a:spAutoFit/>
-          </a:bodyPr>
-          <a:lstStyle/>
-          <a:p>
-            <a:pPr algn="l">
-              <a:lnSpc>
-                <a:spcPct val="115000"/>
-              </a:lnSpc>
-            </a:pPr>
-            <a:r>
-              <a:rPr sz="1900" b="1" i="0">
+            <a:off x="685800" y="1554480"/>
+            <a:ext cx="10789920" cy="4206240"/>
+          </a:xfrm>
+          <a:prstGeom prst="rect">
+            <a:avLst/>
+          </a:prstGeom>
+          <a:noFill/>
+        </p:spPr>
+        <p:txBody>
+          <a:bodyPr wrap="square" lIns="0" rIns="0" tIns="0" bIns="0">
+            <a:spAutoFit/>
+          </a:bodyPr>
+          <a:lstStyle/>
+          <a:p>
+            <a:pPr>
+              <a:lnSpc>
+                <a:spcPct val="125000"/>
+              </a:lnSpc>
+              <a:spcAft>
+                <a:spcPts val="1800"/>
+              </a:spcAft>
+            </a:pPr>
+            <a:r>
+              <a:rPr sz="2000">
                 <a:solidFill>
                   <a:srgbClr val="222222"/>
                 </a:solidFill>
                 <a:latin typeface="맑은 고딕"/>
               </a:rPr>
-              <a:t>m = 5, n = 3, q = 31, B = 2</a:t>
-            </a:r>
-          </a:p>
-        </p:txBody>
-      </p:sp>
-      <p:sp>
-        <p:nvSpPr>
-          <p:cNvPr id="7" name="TextBox 6"/>
-          <p:cNvSpPr txBox="1"/>
-          <p:nvPr/>
-        </p:nvSpPr>
-        <p:spPr>
-          <a:xfrm>
-            <a:off x="822960" y="1828800"/>
-            <a:ext cx="7315200" cy="1463040"/>
-          </a:xfrm>
-          <a:prstGeom prst="rect">
-            <a:avLst/>
-          </a:prstGeom>
-          <a:noFill/>
-        </p:spPr>
-        <p:txBody>
-          <a:bodyPr wrap="none">
-            <a:spAutoFit/>
-          </a:bodyPr>
-          <a:lstStyle/>
-          <a:p>
-            <a:pPr algn="l"/>
-            <a:r>
-              <a:rPr sz="1450">
+              <a:t>—  e = 0 이면 As ≡ b (mod q)는 순수 선형방정식 — 가우스 소거법으로 다항식 시간에 풀림</a:t>
+            </a:r>
+          </a:p>
+          <a:p>
+            <a:pPr>
+              <a:lnSpc>
+                <a:spcPct val="125000"/>
+              </a:lnSpc>
+              <a:spcAft>
+                <a:spcPts val="1800"/>
+              </a:spcAft>
+            </a:pPr>
+            <a:r>
+              <a:rPr sz="2000">
                 <a:solidFill>
                   <a:srgbClr val="222222"/>
                 </a:solidFill>
-                <a:latin typeface="Consolas"/>
-              </a:rPr>
-              <a:t>A = [ 11   3  27 ]           [ 25 ]</a:t>
-            </a:r>
-          </a:p>
-          <a:p>
-            <a:pPr algn="l"/>
-            <a:r>
-              <a:rPr sz="1450">
+                <a:latin typeface="맑은 고딕"/>
+              </a:rPr>
+              <a:t>—  잡음 벡터 e가 섞이면 “이 값이 정확히 As의 성분과 같다”는 등식 자체가 깨진다</a:t>
+            </a:r>
+          </a:p>
+          <a:p>
+            <a:pPr>
+              <a:lnSpc>
+                <a:spcPct val="125000"/>
+              </a:lnSpc>
+              <a:spcAft>
+                <a:spcPts val="1800"/>
+              </a:spcAft>
+            </a:pPr>
+            <a:r>
+              <a:rPr sz="2000">
                 <a:solidFill>
                   <a:srgbClr val="222222"/>
                 </a:solidFill>
-                <a:latin typeface="Consolas"/>
-              </a:rPr>
-              <a:t>    [ 12  21   7 ]           [ 25 ]</a:t>
-            </a:r>
-          </a:p>
-          <a:p>
-            <a:pPr algn="l"/>
-            <a:r>
-              <a:rPr sz="1450">
-                <a:solidFill>
-                  <a:srgbClr val="222222"/>
-                </a:solidFill>
-                <a:latin typeface="Consolas"/>
-              </a:rPr>
-              <a:t>    [  6  23  30 ] ,   b  =  [ 12 ]</a:t>
-            </a:r>
-          </a:p>
-          <a:p>
-            <a:pPr algn="l"/>
-            <a:r>
-              <a:rPr sz="1450">
-                <a:solidFill>
-                  <a:srgbClr val="222222"/>
-                </a:solidFill>
-                <a:latin typeface="Consolas"/>
-              </a:rPr>
-              <a:t>    [  5   6   2 ]           [ 29 ]</a:t>
-            </a:r>
-          </a:p>
-          <a:p>
-            <a:pPr algn="l"/>
-            <a:r>
-              <a:rPr sz="1450">
-                <a:solidFill>
-                  <a:srgbClr val="222222"/>
-                </a:solidFill>
-                <a:latin typeface="Consolas"/>
-              </a:rPr>
-              <a:t>    [ 21   0  14 ]           [ 17 ]</a:t>
-            </a:r>
-          </a:p>
-        </p:txBody>
-      </p:sp>
-      <p:sp>
-        <p:nvSpPr>
-          <p:cNvPr id="8" name="TextBox 7"/>
-          <p:cNvSpPr txBox="1"/>
-          <p:nvPr/>
-        </p:nvSpPr>
-        <p:spPr>
-          <a:xfrm>
-            <a:off x="822960" y="3703320"/>
-            <a:ext cx="10424160" cy="2651760"/>
-          </a:xfrm>
-          <a:prstGeom prst="rect">
-            <a:avLst/>
-          </a:prstGeom>
-          <a:noFill/>
-        </p:spPr>
-        <p:txBody>
-          <a:bodyPr wrap="square" lIns="0" rIns="0" tIns="0" bIns="0">
-            <a:spAutoFit/>
-          </a:bodyPr>
-          <a:lstStyle/>
-          <a:p>
-            <a:pPr>
-              <a:lnSpc>
-                <a:spcPct val="125000"/>
-              </a:lnSpc>
-              <a:spcAft>
-                <a:spcPts val="1000"/>
-              </a:spcAft>
-            </a:pPr>
-            <a:r>
-              <a:rPr sz="1800">
-                <a:solidFill>
-                  <a:srgbClr val="222222"/>
-                </a:solidFill>
-                <a:latin typeface="맑은 고딕"/>
-              </a:rPr>
-              <a:t>—  세 개의 (s,e) 해가 존재 — 일반적으로 LWE 해의 유일성은 보장되지 않는다</a:t>
-            </a:r>
-          </a:p>
-          <a:p>
-            <a:pPr>
-              <a:lnSpc>
-                <a:spcPct val="125000"/>
-              </a:lnSpc>
-              <a:spcAft>
-                <a:spcPts val="1000"/>
-              </a:spcAft>
-            </a:pPr>
-            <a:r>
-              <a:rPr sz="1800">
-                <a:solidFill>
-                  <a:srgbClr val="222222"/>
-                </a:solidFill>
-                <a:latin typeface="맑은 고딕"/>
-              </a:rPr>
-              <a:t>—  이 예제는 m이 일부러 작게 설정되어 다음 슬라이드의 유일성 조건을 만족하지 못함</a:t>
-            </a:r>
-          </a:p>
-        </p:txBody>
-      </p:sp>
-      <p:sp>
-        <p:nvSpPr>
-          <p:cNvPr id="9" name="TextBox 8"/>
-          <p:cNvSpPr txBox="1"/>
-          <p:nvPr/>
-        </p:nvSpPr>
-        <p:spPr>
-          <a:xfrm>
-            <a:off x="822960" y="4892040"/>
-            <a:ext cx="10424160" cy="1463040"/>
-          </a:xfrm>
-          <a:prstGeom prst="rect">
-            <a:avLst/>
-          </a:prstGeom>
-          <a:noFill/>
-        </p:spPr>
-        <p:txBody>
-          <a:bodyPr wrap="none">
-            <a:spAutoFit/>
-          </a:bodyPr>
-          <a:lstStyle/>
-          <a:p>
-            <a:pPr algn="l"/>
-            <a:r>
-              <a:rPr sz="1350">
-                <a:solidFill>
-                  <a:srgbClr val="222222"/>
-                </a:solidFill>
-                <a:latin typeface="Consolas"/>
-              </a:rPr>
-              <a:t>s=(2,11,7),  e=(-2,0,2,1,1)</a:t>
-            </a:r>
-          </a:p>
-          <a:p>
-            <a:pPr algn="l"/>
-            <a:r>
-              <a:rPr sz="1350">
-                <a:solidFill>
-                  <a:srgbClr val="222222"/>
-                </a:solidFill>
-                <a:latin typeface="Consolas"/>
-              </a:rPr>
-              <a:t>s=(27,13,16), e=(1,-2,1,1,1)</a:t>
-            </a:r>
-          </a:p>
-          <a:p>
-            <a:pPr algn="l"/>
-            <a:r>
-              <a:rPr sz="1350">
-                <a:solidFill>
-                  <a:srgbClr val="222222"/>
-                </a:solidFill>
-                <a:latin typeface="Consolas"/>
-              </a:rPr>
-              <a:t>s=(30,9,5),  e=(-2,-1,2,1,-1)</a:t>
+                <a:latin typeface="맑은 고딕"/>
+              </a:rPr>
+              <a:t>—  LWE는 정확한 선형대수 문제가 아니라 잡음 섞인 선형대수 문제 — 가우스 소거법이 통하지 않는다</a:t>
             </a:r>
           </a:p>
         </p:txBody>
@@ -6879,7 +7621,7 @@
                 </a:solidFill>
                 <a:latin typeface="맑은 고딕"/>
               </a:rPr>
-              <a:t>파라미터 B의 역할 — 잡음 크기의 두 극단</a:t>
+              <a:t>숫자 예제 — 해가 여러 개인 이유</a:t>
             </a:r>
           </a:p>
         </p:txBody>
@@ -6918,7 +7660,7 @@
                 </a:solidFill>
                 <a:latin typeface="맑은 고딕"/>
               </a:rPr>
-              <a:t>3강 LWE · Part 2.1</a:t>
+              <a:t>3강 LWE · Part 1.4 · 2.2</a:t>
             </a:r>
           </a:p>
         </p:txBody>
@@ -6957,7 +7699,7 @@
                 </a:solidFill>
                 <a:latin typeface="맑은 고딕"/>
               </a:rPr>
-              <a:t>18 / 27</a:t>
+              <a:t>18 / 33</a:t>
             </a:r>
           </a:p>
         </p:txBody>
@@ -6970,8 +7712,130 @@
         </p:nvSpPr>
         <p:spPr>
           <a:xfrm>
-            <a:off x="685800" y="1463040"/>
-            <a:ext cx="10789920" cy="4572000"/>
+            <a:off x="685800" y="1371600"/>
+            <a:ext cx="10058400" cy="365760"/>
+          </a:xfrm>
+          <a:prstGeom prst="rect">
+            <a:avLst/>
+          </a:prstGeom>
+          <a:noFill/>
+        </p:spPr>
+        <p:txBody>
+          <a:bodyPr wrap="square" anchor="t" lIns="0" rIns="0" tIns="0" bIns="0">
+            <a:spAutoFit/>
+          </a:bodyPr>
+          <a:lstStyle/>
+          <a:p>
+            <a:pPr algn="l">
+              <a:lnSpc>
+                <a:spcPct val="115000"/>
+              </a:lnSpc>
+            </a:pPr>
+            <a:r>
+              <a:rPr sz="1900" b="1" i="0">
+                <a:solidFill>
+                  <a:srgbClr val="222222"/>
+                </a:solidFill>
+                <a:latin typeface="맑은 고딕"/>
+              </a:rPr>
+              <a:t>m = 5, n = 3, q = 31, B = 2</a:t>
+            </a:r>
+          </a:p>
+        </p:txBody>
+      </p:sp>
+      <p:sp>
+        <p:nvSpPr>
+          <p:cNvPr id="7" name="TextBox 6"/>
+          <p:cNvSpPr txBox="1"/>
+          <p:nvPr/>
+        </p:nvSpPr>
+        <p:spPr>
+          <a:xfrm>
+            <a:off x="822960" y="1828800"/>
+            <a:ext cx="7315200" cy="1463040"/>
+          </a:xfrm>
+          <a:prstGeom prst="rect">
+            <a:avLst/>
+          </a:prstGeom>
+          <a:noFill/>
+        </p:spPr>
+        <p:txBody>
+          <a:bodyPr wrap="none">
+            <a:spAutoFit/>
+          </a:bodyPr>
+          <a:lstStyle/>
+          <a:p>
+            <a:pPr algn="l"/>
+            <a:r>
+              <a:rPr sz="1450">
+                <a:solidFill>
+                  <a:srgbClr val="222222"/>
+                </a:solidFill>
+                <a:latin typeface="Consolas"/>
+              </a:rPr>
+              <a:t>A = [ 11   3  27 ]           [ 25 ]</a:t>
+            </a:r>
+          </a:p>
+          <a:p>
+            <a:pPr algn="l"/>
+            <a:r>
+              <a:rPr sz="1450">
+                <a:solidFill>
+                  <a:srgbClr val="222222"/>
+                </a:solidFill>
+                <a:latin typeface="Consolas"/>
+              </a:rPr>
+              <a:t>    [ 12  21   7 ]           [ 25 ]</a:t>
+            </a:r>
+          </a:p>
+          <a:p>
+            <a:pPr algn="l"/>
+            <a:r>
+              <a:rPr sz="1450">
+                <a:solidFill>
+                  <a:srgbClr val="222222"/>
+                </a:solidFill>
+                <a:latin typeface="Consolas"/>
+              </a:rPr>
+              <a:t>    [  6  23  30 ] ,   b  =  [ 12 ]</a:t>
+            </a:r>
+          </a:p>
+          <a:p>
+            <a:pPr algn="l"/>
+            <a:r>
+              <a:rPr sz="1450">
+                <a:solidFill>
+                  <a:srgbClr val="222222"/>
+                </a:solidFill>
+                <a:latin typeface="Consolas"/>
+              </a:rPr>
+              <a:t>    [  5   6   2 ]           [ 29 ]</a:t>
+            </a:r>
+          </a:p>
+          <a:p>
+            <a:pPr algn="l"/>
+            <a:r>
+              <a:rPr sz="1450">
+                <a:solidFill>
+                  <a:srgbClr val="222222"/>
+                </a:solidFill>
+                <a:latin typeface="Consolas"/>
+              </a:rPr>
+              <a:t>    [ 21   0  14 ]           [ 17 ]</a:t>
+            </a:r>
+          </a:p>
+        </p:txBody>
+      </p:sp>
+      <p:sp>
+        <p:nvSpPr>
+          <p:cNvPr id="8" name="TextBox 7"/>
+          <p:cNvSpPr txBox="1"/>
+          <p:nvPr/>
+        </p:nvSpPr>
+        <p:spPr>
+          <a:xfrm>
+            <a:off x="822960" y="3703320"/>
+            <a:ext cx="10424160" cy="2651760"/>
           </a:xfrm>
           <a:prstGeom prst="rect">
             <a:avLst/>
@@ -6989,17 +7853,17 @@
                 <a:spcPct val="125000"/>
               </a:lnSpc>
               <a:spcAft>
-                <a:spcPts val="1600"/>
+                <a:spcPts val="1000"/>
               </a:spcAft>
             </a:pPr>
             <a:r>
-              <a:rPr sz="1950">
+              <a:rPr sz="1800">
                 <a:solidFill>
                   <a:srgbClr val="222222"/>
                 </a:solidFill>
                 <a:latin typeface="맑은 고딕"/>
               </a:rPr>
-              <a:t>—  B = 0 (e=0): 순수 선형방정식 — 가우스 소거법으로 쉽게 풀림</a:t>
+              <a:t>—  세 개의 (s,e) 해가 존재 — 일반적으로 LWE 해의 유일성은 보장되지 않는다</a:t>
             </a:r>
           </a:p>
           <a:p>
@@ -7008,55 +7872,76 @@
                 <a:spcPct val="125000"/>
               </a:lnSpc>
               <a:spcAft>
-                <a:spcPts val="1600"/>
+                <a:spcPts val="1000"/>
               </a:spcAft>
             </a:pPr>
             <a:r>
-              <a:rPr sz="1950">
+              <a:rPr sz="1800">
                 <a:solidFill>
                   <a:srgbClr val="222222"/>
                 </a:solidFill>
                 <a:latin typeface="맑은 고딕"/>
               </a:rPr>
-              <a:t>—  B = (q-1)/2: e가 ℤq 위에서 완전히 균등 → b가 s에 대한 정보를 전혀 담지 않음 (일회용 패드와 같은 논증) — 정보이론적으로 불가능</a:t>
-            </a:r>
-          </a:p>
-          <a:p>
-            <a:pPr>
-              <a:lnSpc>
-                <a:spcPct val="125000"/>
-              </a:lnSpc>
-              <a:spcAft>
-                <a:spcPts val="1600"/>
-              </a:spcAft>
-            </a:pPr>
-            <a:r>
-              <a:rPr sz="1950">
+              <a:t>—  이 예제는 m이 일부러 작게 설정되어 다음 슬라이드의 유일성 조건을 만족하지 못함</a:t>
+            </a:r>
+          </a:p>
+        </p:txBody>
+      </p:sp>
+      <p:sp>
+        <p:nvSpPr>
+          <p:cNvPr id="9" name="TextBox 8"/>
+          <p:cNvSpPr txBox="1"/>
+          <p:nvPr/>
+        </p:nvSpPr>
+        <p:spPr>
+          <a:xfrm>
+            <a:off x="822960" y="4892040"/>
+            <a:ext cx="10424160" cy="1463040"/>
+          </a:xfrm>
+          <a:prstGeom prst="rect">
+            <a:avLst/>
+          </a:prstGeom>
+          <a:noFill/>
+        </p:spPr>
+        <p:txBody>
+          <a:bodyPr wrap="none">
+            <a:spAutoFit/>
+          </a:bodyPr>
+          <a:lstStyle/>
+          <a:p>
+            <a:pPr algn="l"/>
+            <a:r>
+              <a:rPr sz="1350">
                 <a:solidFill>
                   <a:srgbClr val="222222"/>
                 </a:solidFill>
-                <a:latin typeface="맑은 고딕"/>
-              </a:rPr>
-              <a:t>—  B가 √n보다 점근적으로 작으면 (Arora-Ge 공격): 준지수 시간에 풀림</a:t>
-            </a:r>
-          </a:p>
-          <a:p>
-            <a:pPr>
-              <a:lnSpc>
-                <a:spcPct val="125000"/>
-              </a:lnSpc>
-              <a:spcAft>
-                <a:spcPts val="1600"/>
-              </a:spcAft>
-            </a:pPr>
-            <a:r>
-              <a:rPr sz="1950">
+                <a:latin typeface="Consolas"/>
+              </a:rPr>
+              <a:t>s=(2,11,7),  e=(-2,0,2,1,1)</a:t>
+            </a:r>
+          </a:p>
+          <a:p>
+            <a:pPr algn="l"/>
+            <a:r>
+              <a:rPr sz="1350">
                 <a:solidFill>
                   <a:srgbClr val="222222"/>
                 </a:solidFill>
-                <a:latin typeface="맑은 고딕"/>
-              </a:rPr>
-              <a:t>—  그래서 B는 “적당히” 커야 한다 — Kyber/Dilithium이 극단적으로 작은 B 대신 이항분포를 쓰는 이유</a:t>
+                <a:latin typeface="Consolas"/>
+              </a:rPr>
+              <a:t>s=(27,13,16), e=(1,-2,1,1,1)</a:t>
+            </a:r>
+          </a:p>
+          <a:p>
+            <a:pPr algn="l"/>
+            <a:r>
+              <a:rPr sz="1350">
+                <a:solidFill>
+                  <a:srgbClr val="222222"/>
+                </a:solidFill>
+                <a:latin typeface="Consolas"/>
+              </a:rPr>
+              <a:t>s=(30,9,5),  e=(-2,-1,2,1,-1)</a:t>
             </a:r>
           </a:p>
         </p:txBody>
@@ -7165,7 +8050,7 @@
                 </a:solidFill>
                 <a:latin typeface="맑은 고딕"/>
               </a:rPr>
-              <a:t>파라미터 m, n — 해의 유일성</a:t>
+              <a:t>파라미터 B의 역할 — 잡음 크기의 두 극단</a:t>
             </a:r>
           </a:p>
         </p:txBody>
@@ -7204,7 +8089,7 @@
                 </a:solidFill>
                 <a:latin typeface="맑은 고딕"/>
               </a:rPr>
-              <a:t>3강 LWE · Part 2.2</a:t>
+              <a:t>3강 LWE · Part 2.1</a:t>
             </a:r>
           </a:p>
         </p:txBody>
@@ -7243,692 +8128,106 @@
                 </a:solidFill>
                 <a:latin typeface="맑은 고딕"/>
               </a:rPr>
-              <a:t>19 / 27</a:t>
-            </a:r>
-          </a:p>
-        </p:txBody>
-      </p:sp>
-      <p:sp>
-        <p:nvSpPr>
-          <p:cNvPr id="6" name="Rounded Rectangle 5"/>
-          <p:cNvSpPr/>
-          <p:nvPr/>
-        </p:nvSpPr>
-        <p:spPr>
-          <a:xfrm>
-            <a:off x="914400" y="1691640"/>
-            <a:ext cx="10332720" cy="2103120"/>
-          </a:xfrm>
-          <a:prstGeom prst="roundRect">
-            <a:avLst/>
-          </a:prstGeom>
-          <a:solidFill>
-            <a:srgbClr val="F4F5F7"/>
-          </a:solidFill>
-          <a:ln>
-            <a:solidFill>
-              <a:srgbClr val="C7CBD3"/>
-            </a:solidFill>
-          </a:ln>
-          <a:effectLst/>
-        </p:spPr>
-        <p:style>
-          <a:lnRef idx="1">
-            <a:schemeClr val="accent1"/>
-          </a:lnRef>
-          <a:fillRef idx="3">
-            <a:schemeClr val="accent1"/>
-          </a:fillRef>
-          <a:effectRef idx="2">
-            <a:schemeClr val="accent1"/>
-          </a:effectRef>
-          <a:fontRef idx="minor">
-            <a:schemeClr val="lt1"/>
-          </a:fontRef>
-        </p:style>
-        <p:txBody>
-          <a:bodyPr rtlCol="0" anchor="ctr"/>
-          <a:lstStyle/>
-          <a:p>
-            <a:pPr algn="ctr"/>
-          </a:p>
-        </p:txBody>
-      </p:sp>
-      <p:sp>
-        <p:nvSpPr>
-          <p:cNvPr id="7" name="Oval 6"/>
-          <p:cNvSpPr/>
-          <p:nvPr/>
-        </p:nvSpPr>
-        <p:spPr>
-          <a:xfrm>
-            <a:off x="1097280" y="2103120"/>
-            <a:ext cx="768096" cy="768096"/>
-          </a:xfrm>
-          <a:prstGeom prst="ellipse">
-            <a:avLst/>
-          </a:prstGeom>
-          <a:noFill/>
-          <a:ln w="22225">
-            <a:solidFill>
-              <a:srgbClr val="B8860B"/>
-            </a:solidFill>
-            <a:prstDash val="dash"/>
-          </a:ln>
-          <a:effectLst/>
-        </p:spPr>
-        <p:style>
-          <a:lnRef idx="1">
-            <a:schemeClr val="accent1"/>
-          </a:lnRef>
-          <a:fillRef idx="3">
-            <a:schemeClr val="accent1"/>
-          </a:fillRef>
-          <a:effectRef idx="2">
-            <a:schemeClr val="accent1"/>
-          </a:effectRef>
-          <a:fontRef idx="minor">
-            <a:schemeClr val="lt1"/>
-          </a:fontRef>
-        </p:style>
-        <p:txBody>
-          <a:bodyPr rtlCol="0" anchor="ctr"/>
-          <a:lstStyle/>
-          <a:p>
-            <a:pPr algn="ctr"/>
-          </a:p>
-        </p:txBody>
-      </p:sp>
-      <p:sp>
-        <p:nvSpPr>
-          <p:cNvPr id="8" name="Oval 7"/>
-          <p:cNvSpPr/>
-          <p:nvPr/>
-        </p:nvSpPr>
-        <p:spPr>
-          <a:xfrm>
-            <a:off x="1440180" y="2446020"/>
-            <a:ext cx="82296" cy="82296"/>
-          </a:xfrm>
-          <a:prstGeom prst="ellipse">
-            <a:avLst/>
-          </a:prstGeom>
-          <a:solidFill>
-            <a:srgbClr val="B3361E"/>
-          </a:solidFill>
-          <a:ln>
-            <a:solidFill>
-              <a:srgbClr val="B3361E"/>
-            </a:solidFill>
-          </a:ln>
-          <a:effectLst/>
-        </p:spPr>
-        <p:style>
-          <a:lnRef idx="1">
-            <a:schemeClr val="accent1"/>
-          </a:lnRef>
-          <a:fillRef idx="3">
-            <a:schemeClr val="accent1"/>
-          </a:fillRef>
-          <a:effectRef idx="2">
-            <a:schemeClr val="accent1"/>
-          </a:effectRef>
-          <a:fontRef idx="minor">
-            <a:schemeClr val="lt1"/>
-          </a:fontRef>
-        </p:style>
-        <p:txBody>
-          <a:bodyPr rtlCol="0" anchor="ctr"/>
-          <a:lstStyle/>
-          <a:p>
-            <a:pPr algn="ctr"/>
-          </a:p>
-        </p:txBody>
-      </p:sp>
-      <p:sp>
-        <p:nvSpPr>
-          <p:cNvPr id="9" name="TextBox 8"/>
-          <p:cNvSpPr txBox="1"/>
-          <p:nvPr/>
-        </p:nvSpPr>
-        <p:spPr>
-          <a:xfrm>
-            <a:off x="978407" y="1792223"/>
-            <a:ext cx="1005840" cy="274320"/>
-          </a:xfrm>
-          <a:prstGeom prst="rect">
-            <a:avLst/>
-          </a:prstGeom>
-          <a:noFill/>
-        </p:spPr>
-        <p:txBody>
-          <a:bodyPr wrap="square" anchor="t" lIns="0" rIns="0" tIns="0" bIns="0">
-            <a:spAutoFit/>
-          </a:bodyPr>
-          <a:lstStyle/>
-          <a:p>
-            <a:pPr algn="ctr">
-              <a:lnSpc>
-                <a:spcPct val="115000"/>
-              </a:lnSpc>
-            </a:pPr>
-            <a:r>
-              <a:rPr sz="1300" b="0" i="1">
+              <a:t>19 / 33</a:t>
+            </a:r>
+          </a:p>
+        </p:txBody>
+      </p:sp>
+      <p:sp>
+        <p:nvSpPr>
+          <p:cNvPr id="6" name="TextBox 5"/>
+          <p:cNvSpPr txBox="1"/>
+          <p:nvPr/>
+        </p:nvSpPr>
+        <p:spPr>
+          <a:xfrm>
+            <a:off x="685800" y="1463040"/>
+            <a:ext cx="10789920" cy="4572000"/>
+          </a:xfrm>
+          <a:prstGeom prst="rect">
+            <a:avLst/>
+          </a:prstGeom>
+          <a:noFill/>
+        </p:spPr>
+        <p:txBody>
+          <a:bodyPr wrap="square" lIns="0" rIns="0" tIns="0" bIns="0">
+            <a:spAutoFit/>
+          </a:bodyPr>
+          <a:lstStyle/>
+          <a:p>
+            <a:pPr>
+              <a:lnSpc>
+                <a:spcPct val="125000"/>
+              </a:lnSpc>
+              <a:spcAft>
+                <a:spcPts val="1600"/>
+              </a:spcAft>
+            </a:pPr>
+            <a:r>
+              <a:rPr sz="1950">
                 <a:solidFill>
                   <a:srgbClr val="222222"/>
                 </a:solidFill>
                 <a:latin typeface="맑은 고딕"/>
               </a:rPr>
-              <a:t>As₁</a:t>
-            </a:r>
-          </a:p>
-        </p:txBody>
-      </p:sp>
-      <p:sp>
-        <p:nvSpPr>
-          <p:cNvPr id="10" name="Oval 9"/>
-          <p:cNvSpPr/>
-          <p:nvPr/>
-        </p:nvSpPr>
-        <p:spPr>
-          <a:xfrm>
-            <a:off x="4163568" y="2615184"/>
-            <a:ext cx="768096" cy="768096"/>
-          </a:xfrm>
-          <a:prstGeom prst="ellipse">
-            <a:avLst/>
-          </a:prstGeom>
-          <a:noFill/>
-          <a:ln w="22225">
-            <a:solidFill>
-              <a:srgbClr val="B8860B"/>
-            </a:solidFill>
-            <a:prstDash val="dash"/>
-          </a:ln>
-          <a:effectLst/>
-        </p:spPr>
-        <p:style>
-          <a:lnRef idx="1">
-            <a:schemeClr val="accent1"/>
-          </a:lnRef>
-          <a:fillRef idx="3">
-            <a:schemeClr val="accent1"/>
-          </a:fillRef>
-          <a:effectRef idx="2">
-            <a:schemeClr val="accent1"/>
-          </a:effectRef>
-          <a:fontRef idx="minor">
-            <a:schemeClr val="lt1"/>
-          </a:fontRef>
-        </p:style>
-        <p:txBody>
-          <a:bodyPr rtlCol="0" anchor="ctr"/>
-          <a:lstStyle/>
-          <a:p>
-            <a:pPr algn="ctr"/>
-          </a:p>
-        </p:txBody>
-      </p:sp>
-      <p:sp>
-        <p:nvSpPr>
-          <p:cNvPr id="11" name="Oval 10"/>
-          <p:cNvSpPr/>
-          <p:nvPr/>
-        </p:nvSpPr>
-        <p:spPr>
-          <a:xfrm>
-            <a:off x="4506468" y="2958084"/>
-            <a:ext cx="82296" cy="82296"/>
-          </a:xfrm>
-          <a:prstGeom prst="ellipse">
-            <a:avLst/>
-          </a:prstGeom>
-          <a:solidFill>
-            <a:srgbClr val="B3361E"/>
-          </a:solidFill>
-          <a:ln>
-            <a:solidFill>
-              <a:srgbClr val="B3361E"/>
-            </a:solidFill>
-          </a:ln>
-          <a:effectLst/>
-        </p:spPr>
-        <p:style>
-          <a:lnRef idx="1">
-            <a:schemeClr val="accent1"/>
-          </a:lnRef>
-          <a:fillRef idx="3">
-            <a:schemeClr val="accent1"/>
-          </a:fillRef>
-          <a:effectRef idx="2">
-            <a:schemeClr val="accent1"/>
-          </a:effectRef>
-          <a:fontRef idx="minor">
-            <a:schemeClr val="lt1"/>
-          </a:fontRef>
-        </p:style>
-        <p:txBody>
-          <a:bodyPr rtlCol="0" anchor="ctr"/>
-          <a:lstStyle/>
-          <a:p>
-            <a:pPr algn="ctr"/>
-          </a:p>
-        </p:txBody>
-      </p:sp>
-      <p:sp>
-        <p:nvSpPr>
-          <p:cNvPr id="12" name="TextBox 11"/>
-          <p:cNvSpPr txBox="1"/>
-          <p:nvPr/>
-        </p:nvSpPr>
-        <p:spPr>
-          <a:xfrm>
-            <a:off x="4044696" y="2304288"/>
-            <a:ext cx="1005840" cy="274320"/>
-          </a:xfrm>
-          <a:prstGeom prst="rect">
-            <a:avLst/>
-          </a:prstGeom>
-          <a:noFill/>
-        </p:spPr>
-        <p:txBody>
-          <a:bodyPr wrap="square" anchor="t" lIns="0" rIns="0" tIns="0" bIns="0">
-            <a:spAutoFit/>
-          </a:bodyPr>
-          <a:lstStyle/>
-          <a:p>
-            <a:pPr algn="ctr">
-              <a:lnSpc>
-                <a:spcPct val="115000"/>
-              </a:lnSpc>
-            </a:pPr>
-            <a:r>
-              <a:rPr sz="1300" b="0" i="1">
+              <a:t>—  B = 0 (e=0): 순수 선형방정식 — 가우스 소거법으로 쉽게 풀림</a:t>
+            </a:r>
+          </a:p>
+          <a:p>
+            <a:pPr>
+              <a:lnSpc>
+                <a:spcPct val="125000"/>
+              </a:lnSpc>
+              <a:spcAft>
+                <a:spcPts val="1600"/>
+              </a:spcAft>
+            </a:pPr>
+            <a:r>
+              <a:rPr sz="1950">
                 <a:solidFill>
                   <a:srgbClr val="222222"/>
                 </a:solidFill>
                 <a:latin typeface="맑은 고딕"/>
               </a:rPr>
-              <a:t>As₂</a:t>
-            </a:r>
-          </a:p>
-        </p:txBody>
-      </p:sp>
-      <p:sp>
-        <p:nvSpPr>
-          <p:cNvPr id="13" name="Oval 12"/>
-          <p:cNvSpPr/>
-          <p:nvPr/>
-        </p:nvSpPr>
-        <p:spPr>
-          <a:xfrm>
-            <a:off x="7229856" y="2103120"/>
-            <a:ext cx="768096" cy="768096"/>
-          </a:xfrm>
-          <a:prstGeom prst="ellipse">
-            <a:avLst/>
-          </a:prstGeom>
-          <a:noFill/>
-          <a:ln w="22225">
-            <a:solidFill>
-              <a:srgbClr val="B8860B"/>
-            </a:solidFill>
-            <a:prstDash val="dash"/>
-          </a:ln>
-          <a:effectLst/>
-        </p:spPr>
-        <p:style>
-          <a:lnRef idx="1">
-            <a:schemeClr val="accent1"/>
-          </a:lnRef>
-          <a:fillRef idx="3">
-            <a:schemeClr val="accent1"/>
-          </a:fillRef>
-          <a:effectRef idx="2">
-            <a:schemeClr val="accent1"/>
-          </a:effectRef>
-          <a:fontRef idx="minor">
-            <a:schemeClr val="lt1"/>
-          </a:fontRef>
-        </p:style>
-        <p:txBody>
-          <a:bodyPr rtlCol="0" anchor="ctr"/>
-          <a:lstStyle/>
-          <a:p>
-            <a:pPr algn="ctr"/>
-          </a:p>
-        </p:txBody>
-      </p:sp>
-      <p:sp>
-        <p:nvSpPr>
-          <p:cNvPr id="14" name="Oval 13"/>
-          <p:cNvSpPr/>
-          <p:nvPr/>
-        </p:nvSpPr>
-        <p:spPr>
-          <a:xfrm>
-            <a:off x="7572756" y="2446020"/>
-            <a:ext cx="82296" cy="82296"/>
-          </a:xfrm>
-          <a:prstGeom prst="ellipse">
-            <a:avLst/>
-          </a:prstGeom>
-          <a:solidFill>
-            <a:srgbClr val="B3361E"/>
-          </a:solidFill>
-          <a:ln>
-            <a:solidFill>
-              <a:srgbClr val="B3361E"/>
-            </a:solidFill>
-          </a:ln>
-          <a:effectLst/>
-        </p:spPr>
-        <p:style>
-          <a:lnRef idx="1">
-            <a:schemeClr val="accent1"/>
-          </a:lnRef>
-          <a:fillRef idx="3">
-            <a:schemeClr val="accent1"/>
-          </a:fillRef>
-          <a:effectRef idx="2">
-            <a:schemeClr val="accent1"/>
-          </a:effectRef>
-          <a:fontRef idx="minor">
-            <a:schemeClr val="lt1"/>
-          </a:fontRef>
-        </p:style>
-        <p:txBody>
-          <a:bodyPr rtlCol="0" anchor="ctr"/>
-          <a:lstStyle/>
-          <a:p>
-            <a:pPr algn="ctr"/>
-          </a:p>
-        </p:txBody>
-      </p:sp>
-      <p:sp>
-        <p:nvSpPr>
-          <p:cNvPr id="15" name="TextBox 14"/>
-          <p:cNvSpPr txBox="1"/>
-          <p:nvPr/>
-        </p:nvSpPr>
-        <p:spPr>
-          <a:xfrm>
-            <a:off x="7110984" y="1792223"/>
-            <a:ext cx="1005840" cy="274320"/>
-          </a:xfrm>
-          <a:prstGeom prst="rect">
-            <a:avLst/>
-          </a:prstGeom>
-          <a:noFill/>
-        </p:spPr>
-        <p:txBody>
-          <a:bodyPr wrap="square" anchor="t" lIns="0" rIns="0" tIns="0" bIns="0">
-            <a:spAutoFit/>
-          </a:bodyPr>
-          <a:lstStyle/>
-          <a:p>
-            <a:pPr algn="ctr">
-              <a:lnSpc>
-                <a:spcPct val="115000"/>
-              </a:lnSpc>
-            </a:pPr>
-            <a:r>
-              <a:rPr sz="1300" b="0" i="1">
+              <a:t>—  B = (q-1)/2: e가 ℤq 위에서 완전히 균등 → b가 s에 대한 정보를 전혀 담지 않음 (일회용 패드와 같은 논증) — 정보이론적으로 불가능</a:t>
+            </a:r>
+          </a:p>
+          <a:p>
+            <a:pPr>
+              <a:lnSpc>
+                <a:spcPct val="125000"/>
+              </a:lnSpc>
+              <a:spcAft>
+                <a:spcPts val="1600"/>
+              </a:spcAft>
+            </a:pPr>
+            <a:r>
+              <a:rPr sz="1950">
                 <a:solidFill>
                   <a:srgbClr val="222222"/>
                 </a:solidFill>
                 <a:latin typeface="맑은 고딕"/>
               </a:rPr>
-              <a:t>As₃</a:t>
-            </a:r>
-          </a:p>
-        </p:txBody>
-      </p:sp>
-      <p:sp>
-        <p:nvSpPr>
-          <p:cNvPr id="16" name="Oval 15"/>
-          <p:cNvSpPr/>
-          <p:nvPr/>
-        </p:nvSpPr>
-        <p:spPr>
-          <a:xfrm>
-            <a:off x="10296144" y="2615184"/>
-            <a:ext cx="768096" cy="768096"/>
-          </a:xfrm>
-          <a:prstGeom prst="ellipse">
-            <a:avLst/>
-          </a:prstGeom>
-          <a:noFill/>
-          <a:ln w="22225">
-            <a:solidFill>
-              <a:srgbClr val="B8860B"/>
-            </a:solidFill>
-            <a:prstDash val="dash"/>
-          </a:ln>
-          <a:effectLst/>
-        </p:spPr>
-        <p:style>
-          <a:lnRef idx="1">
-            <a:schemeClr val="accent1"/>
-          </a:lnRef>
-          <a:fillRef idx="3">
-            <a:schemeClr val="accent1"/>
-          </a:fillRef>
-          <a:effectRef idx="2">
-            <a:schemeClr val="accent1"/>
-          </a:effectRef>
-          <a:fontRef idx="minor">
-            <a:schemeClr val="lt1"/>
-          </a:fontRef>
-        </p:style>
-        <p:txBody>
-          <a:bodyPr rtlCol="0" anchor="ctr"/>
-          <a:lstStyle/>
-          <a:p>
-            <a:pPr algn="ctr"/>
-          </a:p>
-        </p:txBody>
-      </p:sp>
-      <p:sp>
-        <p:nvSpPr>
-          <p:cNvPr id="17" name="Oval 16"/>
-          <p:cNvSpPr/>
-          <p:nvPr/>
-        </p:nvSpPr>
-        <p:spPr>
-          <a:xfrm>
-            <a:off x="10639044" y="2958084"/>
-            <a:ext cx="82296" cy="82296"/>
-          </a:xfrm>
-          <a:prstGeom prst="ellipse">
-            <a:avLst/>
-          </a:prstGeom>
-          <a:solidFill>
-            <a:srgbClr val="B3361E"/>
-          </a:solidFill>
-          <a:ln>
-            <a:solidFill>
-              <a:srgbClr val="B3361E"/>
-            </a:solidFill>
-          </a:ln>
-          <a:effectLst/>
-        </p:spPr>
-        <p:style>
-          <a:lnRef idx="1">
-            <a:schemeClr val="accent1"/>
-          </a:lnRef>
-          <a:fillRef idx="3">
-            <a:schemeClr val="accent1"/>
-          </a:fillRef>
-          <a:effectRef idx="2">
-            <a:schemeClr val="accent1"/>
-          </a:effectRef>
-          <a:fontRef idx="minor">
-            <a:schemeClr val="lt1"/>
-          </a:fontRef>
-        </p:style>
-        <p:txBody>
-          <a:bodyPr rtlCol="0" anchor="ctr"/>
-          <a:lstStyle/>
-          <a:p>
-            <a:pPr algn="ctr"/>
-          </a:p>
-        </p:txBody>
-      </p:sp>
-      <p:sp>
-        <p:nvSpPr>
-          <p:cNvPr id="18" name="TextBox 17"/>
-          <p:cNvSpPr txBox="1"/>
-          <p:nvPr/>
-        </p:nvSpPr>
-        <p:spPr>
-          <a:xfrm>
-            <a:off x="10177272" y="2304288"/>
-            <a:ext cx="1005840" cy="274320"/>
-          </a:xfrm>
-          <a:prstGeom prst="rect">
-            <a:avLst/>
-          </a:prstGeom>
-          <a:noFill/>
-        </p:spPr>
-        <p:txBody>
-          <a:bodyPr wrap="square" anchor="t" lIns="0" rIns="0" tIns="0" bIns="0">
-            <a:spAutoFit/>
-          </a:bodyPr>
-          <a:lstStyle/>
-          <a:p>
-            <a:pPr algn="ctr">
-              <a:lnSpc>
-                <a:spcPct val="115000"/>
-              </a:lnSpc>
-            </a:pPr>
-            <a:r>
-              <a:rPr sz="1300" b="0" i="1">
+              <a:t>—  B가 √n보다 점근적으로 작으면 (Arora-Ge 공격): 준지수 시간에 풀림</a:t>
+            </a:r>
+          </a:p>
+          <a:p>
+            <a:pPr>
+              <a:lnSpc>
+                <a:spcPct val="125000"/>
+              </a:lnSpc>
+              <a:spcAft>
+                <a:spcPts val="1600"/>
+              </a:spcAft>
+            </a:pPr>
+            <a:r>
+              <a:rPr sz="1950">
                 <a:solidFill>
                   <a:srgbClr val="222222"/>
                 </a:solidFill>
                 <a:latin typeface="맑은 고딕"/>
               </a:rPr>
-              <a:t>As₄</a:t>
-            </a:r>
-          </a:p>
-        </p:txBody>
-      </p:sp>
-      <p:sp>
-        <p:nvSpPr>
-          <p:cNvPr id="19" name="TextBox 18"/>
-          <p:cNvSpPr txBox="1"/>
-          <p:nvPr/>
-        </p:nvSpPr>
-        <p:spPr>
-          <a:xfrm>
-            <a:off x="1051560" y="3483864"/>
-            <a:ext cx="10058400" cy="274320"/>
-          </a:xfrm>
-          <a:prstGeom prst="rect">
-            <a:avLst/>
-          </a:prstGeom>
-          <a:noFill/>
-        </p:spPr>
-        <p:txBody>
-          <a:bodyPr wrap="square" anchor="t" lIns="0" rIns="0" tIns="0" bIns="0">
-            <a:spAutoFit/>
-          </a:bodyPr>
-          <a:lstStyle/>
-          <a:p>
-            <a:pPr algn="ctr">
-              <a:lnSpc>
-                <a:spcPct val="115000"/>
-              </a:lnSpc>
-            </a:pPr>
-            <a:r>
-              <a:rPr sz="1150" b="0" i="0">
-                <a:solidFill>
-                  <a:srgbClr val="5A5A5A"/>
-                </a:solidFill>
-                <a:latin typeface="맑은 고딕"/>
-              </a:rPr>
-              <a:t>점선 원 = 잡음 반경 B 안의 후보들 (겹치면 유일성이 깨짐)</a:t>
-            </a:r>
-          </a:p>
-        </p:txBody>
-      </p:sp>
-      <p:sp>
-        <p:nvSpPr>
-          <p:cNvPr id="20" name="TextBox 19"/>
-          <p:cNvSpPr txBox="1"/>
-          <p:nvPr/>
-        </p:nvSpPr>
-        <p:spPr>
-          <a:xfrm>
-            <a:off x="685800" y="4114800"/>
-            <a:ext cx="10789920" cy="2377440"/>
-          </a:xfrm>
-          <a:prstGeom prst="rect">
-            <a:avLst/>
-          </a:prstGeom>
-          <a:noFill/>
-        </p:spPr>
-        <p:txBody>
-          <a:bodyPr wrap="square" lIns="0" rIns="0" tIns="0" bIns="0">
-            <a:spAutoFit/>
-          </a:bodyPr>
-          <a:lstStyle/>
-          <a:p>
-            <a:pPr>
-              <a:lnSpc>
-                <a:spcPct val="125000"/>
-              </a:lnSpc>
-              <a:spcAft>
-                <a:spcPts val="1000"/>
-              </a:spcAft>
-            </a:pPr>
-            <a:r>
-              <a:rPr sz="1850">
-                <a:solidFill>
-                  <a:srgbClr val="222222"/>
-                </a:solidFill>
-                <a:latin typeface="맑은 고딕"/>
-              </a:rPr>
-              <a:t>—  b = As+e 는 As를 중심으로 반지름 B인 “잡음 구” 안 어딘가에 위치</a:t>
-            </a:r>
-          </a:p>
-          <a:p>
-            <a:pPr>
-              <a:lnSpc>
-                <a:spcPct val="125000"/>
-              </a:lnSpc>
-              <a:spcAft>
-                <a:spcPts val="1000"/>
-              </a:spcAft>
-            </a:pPr>
-            <a:r>
-              <a:rPr sz="1850">
-                <a:solidFill>
-                  <a:srgbClr val="222222"/>
-                </a:solidFill>
-                <a:latin typeface="맑은 고딕"/>
-              </a:rPr>
-              <a:t>—  서로 다른 s₁ ≠ s₂의 구가 겹치지 않아야 b만 보고 유일한 s를 특정할 수 있음</a:t>
-            </a:r>
-          </a:p>
-          <a:p>
-            <a:pPr>
-              <a:lnSpc>
-                <a:spcPct val="125000"/>
-              </a:lnSpc>
-              <a:spcAft>
-                <a:spcPts val="1000"/>
-              </a:spcAft>
-            </a:pPr>
-            <a:r>
-              <a:rPr sz="1850">
-                <a:solidFill>
-                  <a:srgbClr val="222222"/>
-                </a:solidFill>
-                <a:latin typeface="맑은 고딕"/>
-              </a:rPr>
-              <a:t>—  겹칠 확률의 union bound: (qⁿ-1)·((4B+1)/q)ᵐ — m ≫ n 이면 무시할 만큼 작아짐</a:t>
+              <a:t>—  그래서 B는 “적당히” 커야 한다 — Kyber/Dilithium이 극단적으로 작은 B 대신 이항분포를 쓰는 이유</a:t>
             </a:r>
           </a:p>
         </p:txBody>
@@ -8115,7 +8414,7 @@
                 </a:solidFill>
                 <a:latin typeface="맑은 고딕"/>
               </a:rPr>
-              <a:t>2 / 27</a:t>
+              <a:t>2 / 33</a:t>
             </a:r>
           </a:p>
         </p:txBody>
@@ -8323,7 +8622,7 @@
                 </a:solidFill>
                 <a:latin typeface="맑은 고딕"/>
               </a:rPr>
-              <a:t>Decisional LWE (DLWE) — 탐색 vs 결정</a:t>
+              <a:t>파라미터 m, n — 해의 유일성</a:t>
             </a:r>
           </a:p>
         </p:txBody>
@@ -8362,7 +8661,7 @@
                 </a:solidFill>
                 <a:latin typeface="맑은 고딕"/>
               </a:rPr>
-              <a:t>3강 LWE · Part 3</a:t>
+              <a:t>3강 LWE · Part 2.2</a:t>
             </a:r>
           </a:p>
         </p:txBody>
@@ -8401,21 +8700,626 @@
                 </a:solidFill>
                 <a:latin typeface="맑은 고딕"/>
               </a:rPr>
-              <a:t>20 / 27</a:t>
-            </a:r>
-          </a:p>
-        </p:txBody>
-      </p:sp>
-      <p:sp>
-        <p:nvSpPr>
-          <p:cNvPr id="6" name="TextBox 5"/>
-          <p:cNvSpPr txBox="1"/>
-          <p:nvPr/>
-        </p:nvSpPr>
-        <p:spPr>
-          <a:xfrm>
-            <a:off x="685800" y="1463040"/>
-            <a:ext cx="10789920" cy="4572000"/>
+              <a:t>20 / 33</a:t>
+            </a:r>
+          </a:p>
+        </p:txBody>
+      </p:sp>
+      <p:sp>
+        <p:nvSpPr>
+          <p:cNvPr id="6" name="Rounded Rectangle 5"/>
+          <p:cNvSpPr/>
+          <p:nvPr/>
+        </p:nvSpPr>
+        <p:spPr>
+          <a:xfrm>
+            <a:off x="914400" y="1691640"/>
+            <a:ext cx="10332720" cy="2103120"/>
+          </a:xfrm>
+          <a:prstGeom prst="roundRect">
+            <a:avLst/>
+          </a:prstGeom>
+          <a:solidFill>
+            <a:srgbClr val="F4F5F7"/>
+          </a:solidFill>
+          <a:ln>
+            <a:solidFill>
+              <a:srgbClr val="C7CBD3"/>
+            </a:solidFill>
+          </a:ln>
+          <a:effectLst/>
+        </p:spPr>
+        <p:style>
+          <a:lnRef idx="1">
+            <a:schemeClr val="accent1"/>
+          </a:lnRef>
+          <a:fillRef idx="3">
+            <a:schemeClr val="accent1"/>
+          </a:fillRef>
+          <a:effectRef idx="2">
+            <a:schemeClr val="accent1"/>
+          </a:effectRef>
+          <a:fontRef idx="minor">
+            <a:schemeClr val="lt1"/>
+          </a:fontRef>
+        </p:style>
+        <p:txBody>
+          <a:bodyPr rtlCol="0" anchor="ctr"/>
+          <a:lstStyle/>
+          <a:p>
+            <a:pPr algn="ctr"/>
+          </a:p>
+        </p:txBody>
+      </p:sp>
+      <p:sp>
+        <p:nvSpPr>
+          <p:cNvPr id="7" name="Oval 6"/>
+          <p:cNvSpPr/>
+          <p:nvPr/>
+        </p:nvSpPr>
+        <p:spPr>
+          <a:xfrm>
+            <a:off x="1097280" y="2103120"/>
+            <a:ext cx="768096" cy="768096"/>
+          </a:xfrm>
+          <a:prstGeom prst="ellipse">
+            <a:avLst/>
+          </a:prstGeom>
+          <a:noFill/>
+          <a:ln w="22225">
+            <a:solidFill>
+              <a:srgbClr val="B8860B"/>
+            </a:solidFill>
+            <a:prstDash val="dash"/>
+          </a:ln>
+          <a:effectLst/>
+        </p:spPr>
+        <p:style>
+          <a:lnRef idx="1">
+            <a:schemeClr val="accent1"/>
+          </a:lnRef>
+          <a:fillRef idx="3">
+            <a:schemeClr val="accent1"/>
+          </a:fillRef>
+          <a:effectRef idx="2">
+            <a:schemeClr val="accent1"/>
+          </a:effectRef>
+          <a:fontRef idx="minor">
+            <a:schemeClr val="lt1"/>
+          </a:fontRef>
+        </p:style>
+        <p:txBody>
+          <a:bodyPr rtlCol="0" anchor="ctr"/>
+          <a:lstStyle/>
+          <a:p>
+            <a:pPr algn="ctr"/>
+          </a:p>
+        </p:txBody>
+      </p:sp>
+      <p:sp>
+        <p:nvSpPr>
+          <p:cNvPr id="8" name="Oval 7"/>
+          <p:cNvSpPr/>
+          <p:nvPr/>
+        </p:nvSpPr>
+        <p:spPr>
+          <a:xfrm>
+            <a:off x="1440180" y="2446020"/>
+            <a:ext cx="82296" cy="82296"/>
+          </a:xfrm>
+          <a:prstGeom prst="ellipse">
+            <a:avLst/>
+          </a:prstGeom>
+          <a:solidFill>
+            <a:srgbClr val="B3361E"/>
+          </a:solidFill>
+          <a:ln>
+            <a:solidFill>
+              <a:srgbClr val="B3361E"/>
+            </a:solidFill>
+          </a:ln>
+          <a:effectLst/>
+        </p:spPr>
+        <p:style>
+          <a:lnRef idx="1">
+            <a:schemeClr val="accent1"/>
+          </a:lnRef>
+          <a:fillRef idx="3">
+            <a:schemeClr val="accent1"/>
+          </a:fillRef>
+          <a:effectRef idx="2">
+            <a:schemeClr val="accent1"/>
+          </a:effectRef>
+          <a:fontRef idx="minor">
+            <a:schemeClr val="lt1"/>
+          </a:fontRef>
+        </p:style>
+        <p:txBody>
+          <a:bodyPr rtlCol="0" anchor="ctr"/>
+          <a:lstStyle/>
+          <a:p>
+            <a:pPr algn="ctr"/>
+          </a:p>
+        </p:txBody>
+      </p:sp>
+      <p:sp>
+        <p:nvSpPr>
+          <p:cNvPr id="9" name="TextBox 8"/>
+          <p:cNvSpPr txBox="1"/>
+          <p:nvPr/>
+        </p:nvSpPr>
+        <p:spPr>
+          <a:xfrm>
+            <a:off x="978407" y="1792223"/>
+            <a:ext cx="1005840" cy="274320"/>
+          </a:xfrm>
+          <a:prstGeom prst="rect">
+            <a:avLst/>
+          </a:prstGeom>
+          <a:noFill/>
+        </p:spPr>
+        <p:txBody>
+          <a:bodyPr wrap="square" anchor="t" lIns="0" rIns="0" tIns="0" bIns="0">
+            <a:spAutoFit/>
+          </a:bodyPr>
+          <a:lstStyle/>
+          <a:p>
+            <a:pPr algn="ctr">
+              <a:lnSpc>
+                <a:spcPct val="115000"/>
+              </a:lnSpc>
+            </a:pPr>
+            <a:r>
+              <a:rPr sz="1300" b="0" i="1">
+                <a:solidFill>
+                  <a:srgbClr val="222222"/>
+                </a:solidFill>
+                <a:latin typeface="맑은 고딕"/>
+              </a:rPr>
+              <a:t>As₁</a:t>
+            </a:r>
+          </a:p>
+        </p:txBody>
+      </p:sp>
+      <p:sp>
+        <p:nvSpPr>
+          <p:cNvPr id="10" name="Oval 9"/>
+          <p:cNvSpPr/>
+          <p:nvPr/>
+        </p:nvSpPr>
+        <p:spPr>
+          <a:xfrm>
+            <a:off x="4163568" y="2615184"/>
+            <a:ext cx="768096" cy="768096"/>
+          </a:xfrm>
+          <a:prstGeom prst="ellipse">
+            <a:avLst/>
+          </a:prstGeom>
+          <a:noFill/>
+          <a:ln w="22225">
+            <a:solidFill>
+              <a:srgbClr val="B8860B"/>
+            </a:solidFill>
+            <a:prstDash val="dash"/>
+          </a:ln>
+          <a:effectLst/>
+        </p:spPr>
+        <p:style>
+          <a:lnRef idx="1">
+            <a:schemeClr val="accent1"/>
+          </a:lnRef>
+          <a:fillRef idx="3">
+            <a:schemeClr val="accent1"/>
+          </a:fillRef>
+          <a:effectRef idx="2">
+            <a:schemeClr val="accent1"/>
+          </a:effectRef>
+          <a:fontRef idx="minor">
+            <a:schemeClr val="lt1"/>
+          </a:fontRef>
+        </p:style>
+        <p:txBody>
+          <a:bodyPr rtlCol="0" anchor="ctr"/>
+          <a:lstStyle/>
+          <a:p>
+            <a:pPr algn="ctr"/>
+          </a:p>
+        </p:txBody>
+      </p:sp>
+      <p:sp>
+        <p:nvSpPr>
+          <p:cNvPr id="11" name="Oval 10"/>
+          <p:cNvSpPr/>
+          <p:nvPr/>
+        </p:nvSpPr>
+        <p:spPr>
+          <a:xfrm>
+            <a:off x="4506468" y="2958084"/>
+            <a:ext cx="82296" cy="82296"/>
+          </a:xfrm>
+          <a:prstGeom prst="ellipse">
+            <a:avLst/>
+          </a:prstGeom>
+          <a:solidFill>
+            <a:srgbClr val="B3361E"/>
+          </a:solidFill>
+          <a:ln>
+            <a:solidFill>
+              <a:srgbClr val="B3361E"/>
+            </a:solidFill>
+          </a:ln>
+          <a:effectLst/>
+        </p:spPr>
+        <p:style>
+          <a:lnRef idx="1">
+            <a:schemeClr val="accent1"/>
+          </a:lnRef>
+          <a:fillRef idx="3">
+            <a:schemeClr val="accent1"/>
+          </a:fillRef>
+          <a:effectRef idx="2">
+            <a:schemeClr val="accent1"/>
+          </a:effectRef>
+          <a:fontRef idx="minor">
+            <a:schemeClr val="lt1"/>
+          </a:fontRef>
+        </p:style>
+        <p:txBody>
+          <a:bodyPr rtlCol="0" anchor="ctr"/>
+          <a:lstStyle/>
+          <a:p>
+            <a:pPr algn="ctr"/>
+          </a:p>
+        </p:txBody>
+      </p:sp>
+      <p:sp>
+        <p:nvSpPr>
+          <p:cNvPr id="12" name="TextBox 11"/>
+          <p:cNvSpPr txBox="1"/>
+          <p:nvPr/>
+        </p:nvSpPr>
+        <p:spPr>
+          <a:xfrm>
+            <a:off x="4044696" y="2304288"/>
+            <a:ext cx="1005840" cy="274320"/>
+          </a:xfrm>
+          <a:prstGeom prst="rect">
+            <a:avLst/>
+          </a:prstGeom>
+          <a:noFill/>
+        </p:spPr>
+        <p:txBody>
+          <a:bodyPr wrap="square" anchor="t" lIns="0" rIns="0" tIns="0" bIns="0">
+            <a:spAutoFit/>
+          </a:bodyPr>
+          <a:lstStyle/>
+          <a:p>
+            <a:pPr algn="ctr">
+              <a:lnSpc>
+                <a:spcPct val="115000"/>
+              </a:lnSpc>
+            </a:pPr>
+            <a:r>
+              <a:rPr sz="1300" b="0" i="1">
+                <a:solidFill>
+                  <a:srgbClr val="222222"/>
+                </a:solidFill>
+                <a:latin typeface="맑은 고딕"/>
+              </a:rPr>
+              <a:t>As₂</a:t>
+            </a:r>
+          </a:p>
+        </p:txBody>
+      </p:sp>
+      <p:sp>
+        <p:nvSpPr>
+          <p:cNvPr id="13" name="Oval 12"/>
+          <p:cNvSpPr/>
+          <p:nvPr/>
+        </p:nvSpPr>
+        <p:spPr>
+          <a:xfrm>
+            <a:off x="7229856" y="2103120"/>
+            <a:ext cx="768096" cy="768096"/>
+          </a:xfrm>
+          <a:prstGeom prst="ellipse">
+            <a:avLst/>
+          </a:prstGeom>
+          <a:noFill/>
+          <a:ln w="22225">
+            <a:solidFill>
+              <a:srgbClr val="B8860B"/>
+            </a:solidFill>
+            <a:prstDash val="dash"/>
+          </a:ln>
+          <a:effectLst/>
+        </p:spPr>
+        <p:style>
+          <a:lnRef idx="1">
+            <a:schemeClr val="accent1"/>
+          </a:lnRef>
+          <a:fillRef idx="3">
+            <a:schemeClr val="accent1"/>
+          </a:fillRef>
+          <a:effectRef idx="2">
+            <a:schemeClr val="accent1"/>
+          </a:effectRef>
+          <a:fontRef idx="minor">
+            <a:schemeClr val="lt1"/>
+          </a:fontRef>
+        </p:style>
+        <p:txBody>
+          <a:bodyPr rtlCol="0" anchor="ctr"/>
+          <a:lstStyle/>
+          <a:p>
+            <a:pPr algn="ctr"/>
+          </a:p>
+        </p:txBody>
+      </p:sp>
+      <p:sp>
+        <p:nvSpPr>
+          <p:cNvPr id="14" name="Oval 13"/>
+          <p:cNvSpPr/>
+          <p:nvPr/>
+        </p:nvSpPr>
+        <p:spPr>
+          <a:xfrm>
+            <a:off x="7572756" y="2446020"/>
+            <a:ext cx="82296" cy="82296"/>
+          </a:xfrm>
+          <a:prstGeom prst="ellipse">
+            <a:avLst/>
+          </a:prstGeom>
+          <a:solidFill>
+            <a:srgbClr val="B3361E"/>
+          </a:solidFill>
+          <a:ln>
+            <a:solidFill>
+              <a:srgbClr val="B3361E"/>
+            </a:solidFill>
+          </a:ln>
+          <a:effectLst/>
+        </p:spPr>
+        <p:style>
+          <a:lnRef idx="1">
+            <a:schemeClr val="accent1"/>
+          </a:lnRef>
+          <a:fillRef idx="3">
+            <a:schemeClr val="accent1"/>
+          </a:fillRef>
+          <a:effectRef idx="2">
+            <a:schemeClr val="accent1"/>
+          </a:effectRef>
+          <a:fontRef idx="minor">
+            <a:schemeClr val="lt1"/>
+          </a:fontRef>
+        </p:style>
+        <p:txBody>
+          <a:bodyPr rtlCol="0" anchor="ctr"/>
+          <a:lstStyle/>
+          <a:p>
+            <a:pPr algn="ctr"/>
+          </a:p>
+        </p:txBody>
+      </p:sp>
+      <p:sp>
+        <p:nvSpPr>
+          <p:cNvPr id="15" name="TextBox 14"/>
+          <p:cNvSpPr txBox="1"/>
+          <p:nvPr/>
+        </p:nvSpPr>
+        <p:spPr>
+          <a:xfrm>
+            <a:off x="7110984" y="1792223"/>
+            <a:ext cx="1005840" cy="274320"/>
+          </a:xfrm>
+          <a:prstGeom prst="rect">
+            <a:avLst/>
+          </a:prstGeom>
+          <a:noFill/>
+        </p:spPr>
+        <p:txBody>
+          <a:bodyPr wrap="square" anchor="t" lIns="0" rIns="0" tIns="0" bIns="0">
+            <a:spAutoFit/>
+          </a:bodyPr>
+          <a:lstStyle/>
+          <a:p>
+            <a:pPr algn="ctr">
+              <a:lnSpc>
+                <a:spcPct val="115000"/>
+              </a:lnSpc>
+            </a:pPr>
+            <a:r>
+              <a:rPr sz="1300" b="0" i="1">
+                <a:solidFill>
+                  <a:srgbClr val="222222"/>
+                </a:solidFill>
+                <a:latin typeface="맑은 고딕"/>
+              </a:rPr>
+              <a:t>As₃</a:t>
+            </a:r>
+          </a:p>
+        </p:txBody>
+      </p:sp>
+      <p:sp>
+        <p:nvSpPr>
+          <p:cNvPr id="16" name="Oval 15"/>
+          <p:cNvSpPr/>
+          <p:nvPr/>
+        </p:nvSpPr>
+        <p:spPr>
+          <a:xfrm>
+            <a:off x="10296144" y="2615184"/>
+            <a:ext cx="768096" cy="768096"/>
+          </a:xfrm>
+          <a:prstGeom prst="ellipse">
+            <a:avLst/>
+          </a:prstGeom>
+          <a:noFill/>
+          <a:ln w="22225">
+            <a:solidFill>
+              <a:srgbClr val="B8860B"/>
+            </a:solidFill>
+            <a:prstDash val="dash"/>
+          </a:ln>
+          <a:effectLst/>
+        </p:spPr>
+        <p:style>
+          <a:lnRef idx="1">
+            <a:schemeClr val="accent1"/>
+          </a:lnRef>
+          <a:fillRef idx="3">
+            <a:schemeClr val="accent1"/>
+          </a:fillRef>
+          <a:effectRef idx="2">
+            <a:schemeClr val="accent1"/>
+          </a:effectRef>
+          <a:fontRef idx="minor">
+            <a:schemeClr val="lt1"/>
+          </a:fontRef>
+        </p:style>
+        <p:txBody>
+          <a:bodyPr rtlCol="0" anchor="ctr"/>
+          <a:lstStyle/>
+          <a:p>
+            <a:pPr algn="ctr"/>
+          </a:p>
+        </p:txBody>
+      </p:sp>
+      <p:sp>
+        <p:nvSpPr>
+          <p:cNvPr id="17" name="Oval 16"/>
+          <p:cNvSpPr/>
+          <p:nvPr/>
+        </p:nvSpPr>
+        <p:spPr>
+          <a:xfrm>
+            <a:off x="10639044" y="2958084"/>
+            <a:ext cx="82296" cy="82296"/>
+          </a:xfrm>
+          <a:prstGeom prst="ellipse">
+            <a:avLst/>
+          </a:prstGeom>
+          <a:solidFill>
+            <a:srgbClr val="B3361E"/>
+          </a:solidFill>
+          <a:ln>
+            <a:solidFill>
+              <a:srgbClr val="B3361E"/>
+            </a:solidFill>
+          </a:ln>
+          <a:effectLst/>
+        </p:spPr>
+        <p:style>
+          <a:lnRef idx="1">
+            <a:schemeClr val="accent1"/>
+          </a:lnRef>
+          <a:fillRef idx="3">
+            <a:schemeClr val="accent1"/>
+          </a:fillRef>
+          <a:effectRef idx="2">
+            <a:schemeClr val="accent1"/>
+          </a:effectRef>
+          <a:fontRef idx="minor">
+            <a:schemeClr val="lt1"/>
+          </a:fontRef>
+        </p:style>
+        <p:txBody>
+          <a:bodyPr rtlCol="0" anchor="ctr"/>
+          <a:lstStyle/>
+          <a:p>
+            <a:pPr algn="ctr"/>
+          </a:p>
+        </p:txBody>
+      </p:sp>
+      <p:sp>
+        <p:nvSpPr>
+          <p:cNvPr id="18" name="TextBox 17"/>
+          <p:cNvSpPr txBox="1"/>
+          <p:nvPr/>
+        </p:nvSpPr>
+        <p:spPr>
+          <a:xfrm>
+            <a:off x="10177272" y="2304288"/>
+            <a:ext cx="1005840" cy="274320"/>
+          </a:xfrm>
+          <a:prstGeom prst="rect">
+            <a:avLst/>
+          </a:prstGeom>
+          <a:noFill/>
+        </p:spPr>
+        <p:txBody>
+          <a:bodyPr wrap="square" anchor="t" lIns="0" rIns="0" tIns="0" bIns="0">
+            <a:spAutoFit/>
+          </a:bodyPr>
+          <a:lstStyle/>
+          <a:p>
+            <a:pPr algn="ctr">
+              <a:lnSpc>
+                <a:spcPct val="115000"/>
+              </a:lnSpc>
+            </a:pPr>
+            <a:r>
+              <a:rPr sz="1300" b="0" i="1">
+                <a:solidFill>
+                  <a:srgbClr val="222222"/>
+                </a:solidFill>
+                <a:latin typeface="맑은 고딕"/>
+              </a:rPr>
+              <a:t>As₄</a:t>
+            </a:r>
+          </a:p>
+        </p:txBody>
+      </p:sp>
+      <p:sp>
+        <p:nvSpPr>
+          <p:cNvPr id="19" name="TextBox 18"/>
+          <p:cNvSpPr txBox="1"/>
+          <p:nvPr/>
+        </p:nvSpPr>
+        <p:spPr>
+          <a:xfrm>
+            <a:off x="1051560" y="3483864"/>
+            <a:ext cx="10058400" cy="274320"/>
+          </a:xfrm>
+          <a:prstGeom prst="rect">
+            <a:avLst/>
+          </a:prstGeom>
+          <a:noFill/>
+        </p:spPr>
+        <p:txBody>
+          <a:bodyPr wrap="square" anchor="t" lIns="0" rIns="0" tIns="0" bIns="0">
+            <a:spAutoFit/>
+          </a:bodyPr>
+          <a:lstStyle/>
+          <a:p>
+            <a:pPr algn="ctr">
+              <a:lnSpc>
+                <a:spcPct val="115000"/>
+              </a:lnSpc>
+            </a:pPr>
+            <a:r>
+              <a:rPr sz="1150" b="0" i="0">
+                <a:solidFill>
+                  <a:srgbClr val="5A5A5A"/>
+                </a:solidFill>
+                <a:latin typeface="맑은 고딕"/>
+              </a:rPr>
+              <a:t>점선 원 = 잡음 반경 B 안의 후보들 (겹치면 유일성이 깨짐)</a:t>
+            </a:r>
+          </a:p>
+        </p:txBody>
+      </p:sp>
+      <p:sp>
+        <p:nvSpPr>
+          <p:cNvPr id="20" name="TextBox 19"/>
+          <p:cNvSpPr txBox="1"/>
+          <p:nvPr/>
+        </p:nvSpPr>
+        <p:spPr>
+          <a:xfrm>
+            <a:off x="685800" y="4114800"/>
+            <a:ext cx="10789920" cy="2377440"/>
           </a:xfrm>
           <a:prstGeom prst="rect">
             <a:avLst/>
@@ -8433,17 +9337,17 @@
                 <a:spcPct val="125000"/>
               </a:lnSpc>
               <a:spcAft>
-                <a:spcPts val="1600"/>
+                <a:spcPts val="1000"/>
               </a:spcAft>
             </a:pPr>
             <a:r>
-              <a:rPr sz="1950">
+              <a:rPr sz="1850">
                 <a:solidFill>
                   <a:srgbClr val="222222"/>
                 </a:solidFill>
                 <a:latin typeface="맑은 고딕"/>
               </a:rPr>
-              <a:t>—  LWE(탐색): (A,b)에서 정확한 비밀 s를 찾아라</a:t>
+              <a:t>—  b = As+e 는 As를 중심으로 반지름 B인 “잡음 구” 안 어딘가에 위치</a:t>
             </a:r>
           </a:p>
           <a:p>
@@ -8452,17 +9356,17 @@
                 <a:spcPct val="125000"/>
               </a:lnSpc>
               <a:spcAft>
-                <a:spcPts val="1600"/>
+                <a:spcPts val="1000"/>
               </a:spcAft>
             </a:pPr>
             <a:r>
-              <a:rPr sz="1950">
+              <a:rPr sz="1850">
                 <a:solidFill>
                   <a:srgbClr val="222222"/>
                 </a:solidFill>
                 <a:latin typeface="맑은 고딕"/>
               </a:rPr>
-              <a:t>—  DLWE(결정): (A,c)가 진짜 LWE 표본(c=As+e)인지, 완전히 무작위(c=r)인지만 구별하라</a:t>
+              <a:t>—  서로 다른 s₁ ≠ s₂의 구가 겹치지 않아야 b만 보고 유일한 s를 특정할 수 있음</a:t>
             </a:r>
           </a:p>
           <a:p>
@@ -8471,36 +9375,17 @@
                 <a:spcPct val="125000"/>
               </a:lnSpc>
               <a:spcAft>
-                <a:spcPts val="1600"/>
+                <a:spcPts val="1000"/>
               </a:spcAft>
             </a:pPr>
             <a:r>
-              <a:rPr sz="1950">
+              <a:rPr sz="1850">
                 <a:solidFill>
                   <a:srgbClr val="222222"/>
                 </a:solidFill>
                 <a:latin typeface="맑은 고딕"/>
               </a:rPr>
-              <a:t>—  두 방향 모두 다항식 시간 환원 가능 — LWE와 DLWE는 계산적으로 동치</a:t>
-            </a:r>
-          </a:p>
-          <a:p>
-            <a:pPr>
-              <a:lnSpc>
-                <a:spcPct val="125000"/>
-              </a:lnSpc>
-              <a:spcAft>
-                <a:spcPts val="1600"/>
-              </a:spcAft>
-            </a:pPr>
-            <a:r>
-              <a:rPr sz="1950">
-                <a:solidFill>
-                  <a:srgbClr val="222222"/>
-                </a:solidFill>
-                <a:latin typeface="맑은 고딕"/>
-              </a:rPr>
-              <a:t>—  환원 과정에서 파라미터 (m,n,q,B)가 전혀 변하지 않는다 — SIS/ISIS와 대비되는 점</a:t>
+              <a:t>—  겹칠 확률의 union bound: (qⁿ-1)·((4B+1)/q)ᵐ — m ≫ n 이면 무시할 만큼 작아짐</a:t>
             </a:r>
           </a:p>
         </p:txBody>
@@ -8609,7 +9494,7 @@
                 </a:solidFill>
                 <a:latin typeface="맑은 고딕"/>
               </a:rPr>
-              <a:t>Short-Secret LWE (ss-LWE)</a:t>
+              <a:t>Decisional LWE (DLWE) — 탐색 vs 결정</a:t>
             </a:r>
           </a:p>
         </p:txBody>
@@ -8648,7 +9533,7 @@
                 </a:solidFill>
                 <a:latin typeface="맑은 고딕"/>
               </a:rPr>
-              <a:t>3강 LWE · Part 4</a:t>
+              <a:t>3강 LWE · Part 3</a:t>
             </a:r>
           </a:p>
         </p:txBody>
@@ -8687,7 +9572,7 @@
                 </a:solidFill>
                 <a:latin typeface="맑은 고딕"/>
               </a:rPr>
-              <a:t>21 / 27</a:t>
+              <a:t>21 / 33</a:t>
             </a:r>
           </a:p>
         </p:txBody>
@@ -8729,7 +9614,7 @@
                 </a:solidFill>
                 <a:latin typeface="맑은 고딕"/>
               </a:rPr>
-              <a:t>—  비밀 s도 오차 e처럼 [-B,B]ⁿ 에서 뽑는 LWE 변형</a:t>
+              <a:t>—  LWE(탐색): (A,b)에서 정확한 비밀 s를 찾아라</a:t>
             </a:r>
           </a:p>
           <a:p>
@@ -8748,7 +9633,7 @@
                 </a:solidFill>
                 <a:latin typeface="맑은 고딕"/>
               </a:rPr>
-              <a:t>—  일반 LWE와 달리 m ≫ n 조건 없이도(심지어 m=n인 정사각행렬이어도) 해가 높은 확률로 유일</a:t>
+              <a:t>—  DLWE(결정): (A,c)가 진짜 LWE 표본(c=As+e)인지, 완전히 무작위(c=r)인지만 구별하라</a:t>
             </a:r>
           </a:p>
           <a:p>
@@ -8767,7 +9652,7 @@
                 </a:solidFill>
                 <a:latin typeface="맑은 고딕"/>
               </a:rPr>
-              <a:t>—  LWE와 계산적으로 동치: ss-LWE(m,n,q,B) ≤ LWE(m,n,q,B) 이고 LWE(m,n,q,B) ≤ ss-LWE(m-n,n,q,B)</a:t>
+              <a:t>—  두 방향 모두 다항식 시간 환원 가능 → 계산적으로 동치 (다음 두 슬라이드에서 증명)</a:t>
             </a:r>
           </a:p>
           <a:p>
@@ -8786,7 +9671,7 @@
                 </a:solidFill>
                 <a:latin typeface="맑은 고딕"/>
               </a:rPr>
-              <a:t>—  → 이 성질 덕분에 다음의 Lindner-Peikert 암호가 정사각 행렬만으로 안전하게 동작한다</a:t>
+              <a:t>—  환원 과정에서 파라미터 (m,n,q,B)가 전혀 변하지 않는다 — SIS/ISIS와 대비되는 점</a:t>
             </a:r>
           </a:p>
         </p:txBody>
@@ -8895,7 +9780,7 @@
                 </a:solidFill>
                 <a:latin typeface="맑은 고딕"/>
               </a:rPr>
-              <a:t>응용: Lindner-Peikert 공개키 암호</a:t>
+              <a:t>DLWE ≤ LWE 증명 (Claim 1)</a:t>
             </a:r>
           </a:p>
         </p:txBody>
@@ -8934,7 +9819,7 @@
                 </a:solidFill>
                 <a:latin typeface="맑은 고딕"/>
               </a:rPr>
-              <a:t>3강 LWE · Part 5.1-5.2</a:t>
+              <a:t>3강 LWE · Part 3.2</a:t>
             </a:r>
           </a:p>
         </p:txBody>
@@ -8973,7 +9858,1570 @@
                 </a:solidFill>
                 <a:latin typeface="맑은 고딕"/>
               </a:rPr>
-              <a:t>22 / 27</a:t>
+              <a:t>22 / 33</a:t>
+            </a:r>
+          </a:p>
+        </p:txBody>
+      </p:sp>
+      <p:sp>
+        <p:nvSpPr>
+          <p:cNvPr id="6" name="TextBox 5"/>
+          <p:cNvSpPr txBox="1"/>
+          <p:nvPr/>
+        </p:nvSpPr>
+        <p:spPr>
+          <a:xfrm>
+            <a:off x="685800" y="1508760"/>
+            <a:ext cx="10789920" cy="4206240"/>
+          </a:xfrm>
+          <a:prstGeom prst="rect">
+            <a:avLst/>
+          </a:prstGeom>
+          <a:noFill/>
+        </p:spPr>
+        <p:txBody>
+          <a:bodyPr wrap="square" lIns="0" rIns="0" tIns="0" bIns="0">
+            <a:spAutoFit/>
+          </a:bodyPr>
+          <a:lstStyle/>
+          <a:p>
+            <a:pPr>
+              <a:lnSpc>
+                <a:spcPct val="125000"/>
+              </a:lnSpc>
+              <a:spcAft>
+                <a:spcPts val="1400"/>
+              </a:spcAft>
+            </a:pPr>
+            <a:r>
+              <a:rPr sz="1900">
+                <a:solidFill>
+                  <a:srgbClr val="222222"/>
+                </a:solidFill>
+                <a:latin typeface="맑은 고딕"/>
+              </a:rPr>
+              <a:t>—  DLWE 인스턴스 (A,c)가 주어졌을 때, LWE 솔버를 그대로 (A,c)에 입력한다</a:t>
+            </a:r>
+          </a:p>
+          <a:p>
+            <a:pPr>
+              <a:lnSpc>
+                <a:spcPct val="125000"/>
+              </a:lnSpc>
+              <a:spcAft>
+                <a:spcPts val="1400"/>
+              </a:spcAft>
+            </a:pPr>
+            <a:r>
+              <a:rPr sz="1900">
+                <a:solidFill>
+                  <a:srgbClr val="222222"/>
+                </a:solidFill>
+                <a:latin typeface="맑은 고딕"/>
+              </a:rPr>
+              <a:t>—  c=b 인 경우: (A,c)는 진짜 LWE 인스턴스이므로 유일한 해 (s,e)를 가질 것으로 기대 → LWE 솔버가 유효한 해를 반환</a:t>
+            </a:r>
+          </a:p>
+          <a:p>
+            <a:pPr>
+              <a:lnSpc>
+                <a:spcPct val="125000"/>
+              </a:lnSpc>
+              <a:spcAft>
+                <a:spcPts val="1400"/>
+              </a:spcAft>
+            </a:pPr>
+            <a:r>
+              <a:rPr sz="1900">
+                <a:solidFill>
+                  <a:srgbClr val="222222"/>
+                </a:solidFill>
+                <a:latin typeface="맑은 고딕"/>
+              </a:rPr>
+              <a:t>—  c=r 인 경우: 해가 존재하지 않을 것으로 기대 → LWE 솔버가 유효한 해를 못 찾거나 종료하지 않음</a:t>
+            </a:r>
+          </a:p>
+          <a:p>
+            <a:pPr>
+              <a:lnSpc>
+                <a:spcPct val="125000"/>
+              </a:lnSpc>
+              <a:spcAft>
+                <a:spcPts val="1400"/>
+              </a:spcAft>
+            </a:pPr>
+            <a:r>
+              <a:rPr sz="1900">
+                <a:solidFill>
+                  <a:srgbClr val="222222"/>
+                </a:solidFill>
+                <a:latin typeface="맑은 고딕"/>
+              </a:rPr>
+              <a:t>—  이 차이로 c=b 인지 c=r 인지 판별 — LWE 솔버 하나로 DLWE를 그대로 풀어낸다</a:t>
+            </a:r>
+          </a:p>
+        </p:txBody>
+      </p:sp>
+    </p:spTree>
+  </p:cSld>
+  <p:clrMapOvr>
+    <a:masterClrMapping/>
+  </p:clrMapOvr>
+</p:sld>
+</file>
+
+<file path=ppt/slides/slide23.xml><?xml version="1.0" encoding="utf-8"?>
+<p:sld xmlns:a="http://schemas.openxmlformats.org/drawingml/2006/main" xmlns:p="http://schemas.openxmlformats.org/presentationml/2006/main" xmlns:r="http://schemas.openxmlformats.org/officeDocument/2006/relationships">
+  <p:cSld>
+    <p:bg>
+      <p:bgPr>
+        <a:solidFill>
+          <a:srgbClr val="FFFFFF"/>
+        </a:solidFill>
+        <a:effectLst/>
+      </p:bgPr>
+    </p:bg>
+    <p:spTree>
+      <p:nvGrpSpPr>
+        <p:cNvPr id="1" name=""/>
+        <p:cNvGrpSpPr/>
+        <p:nvPr/>
+      </p:nvGrpSpPr>
+      <p:grpSpPr/>
+      <p:sp>
+        <p:nvSpPr>
+          <p:cNvPr id="2" name="Rectangle 1"/>
+          <p:cNvSpPr/>
+          <p:nvPr/>
+        </p:nvSpPr>
+        <p:spPr>
+          <a:xfrm>
+            <a:off x="0" y="0"/>
+            <a:ext cx="12191695" cy="1051560"/>
+          </a:xfrm>
+          <a:prstGeom prst="rect">
+            <a:avLst/>
+          </a:prstGeom>
+          <a:solidFill>
+            <a:srgbClr val="0E6E6A"/>
+          </a:solidFill>
+          <a:ln>
+            <a:noFill/>
+          </a:ln>
+          <a:effectLst/>
+        </p:spPr>
+        <p:style>
+          <a:lnRef idx="1">
+            <a:schemeClr val="accent1"/>
+          </a:lnRef>
+          <a:fillRef idx="3">
+            <a:schemeClr val="accent1"/>
+          </a:fillRef>
+          <a:effectRef idx="2">
+            <a:schemeClr val="accent1"/>
+          </a:effectRef>
+          <a:fontRef idx="minor">
+            <a:schemeClr val="lt1"/>
+          </a:fontRef>
+        </p:style>
+        <p:txBody>
+          <a:bodyPr rtlCol="0" anchor="ctr"/>
+          <a:lstStyle/>
+          <a:p>
+            <a:pPr algn="ctr"/>
+          </a:p>
+        </p:txBody>
+      </p:sp>
+      <p:sp>
+        <p:nvSpPr>
+          <p:cNvPr id="3" name="TextBox 2"/>
+          <p:cNvSpPr txBox="1"/>
+          <p:nvPr/>
+        </p:nvSpPr>
+        <p:spPr>
+          <a:xfrm>
+            <a:off x="502920" y="118872"/>
+            <a:ext cx="11185855" cy="822960"/>
+          </a:xfrm>
+          <a:prstGeom prst="rect">
+            <a:avLst/>
+          </a:prstGeom>
+          <a:noFill/>
+        </p:spPr>
+        <p:txBody>
+          <a:bodyPr wrap="square" anchor="ctr" lIns="0" rIns="0" tIns="0" bIns="0">
+            <a:spAutoFit/>
+          </a:bodyPr>
+          <a:lstStyle/>
+          <a:p>
+            <a:pPr algn="l">
+              <a:lnSpc>
+                <a:spcPct val="115000"/>
+              </a:lnSpc>
+            </a:pPr>
+            <a:r>
+              <a:rPr sz="2700" b="1" i="0">
+                <a:solidFill>
+                  <a:srgbClr val="FFFFFF"/>
+                </a:solidFill>
+                <a:latin typeface="맑은 고딕"/>
+              </a:rPr>
+              <a:t>LWE ≤ DLWE 증명 (Claim 2)</a:t>
+            </a:r>
+          </a:p>
+        </p:txBody>
+      </p:sp>
+      <p:sp>
+        <p:nvSpPr>
+          <p:cNvPr id="4" name="TextBox 3"/>
+          <p:cNvSpPr txBox="1"/>
+          <p:nvPr/>
+        </p:nvSpPr>
+        <p:spPr>
+          <a:xfrm>
+            <a:off x="502920" y="6473952"/>
+            <a:ext cx="5486400" cy="320040"/>
+          </a:xfrm>
+          <a:prstGeom prst="rect">
+            <a:avLst/>
+          </a:prstGeom>
+          <a:noFill/>
+        </p:spPr>
+        <p:txBody>
+          <a:bodyPr wrap="square" anchor="t" lIns="0" rIns="0" tIns="0" bIns="0">
+            <a:spAutoFit/>
+          </a:bodyPr>
+          <a:lstStyle/>
+          <a:p>
+            <a:pPr algn="l">
+              <a:lnSpc>
+                <a:spcPct val="115000"/>
+              </a:lnSpc>
+            </a:pPr>
+            <a:r>
+              <a:rPr sz="1100" b="0" i="0">
+                <a:solidFill>
+                  <a:srgbClr val="5A5A5A"/>
+                </a:solidFill>
+                <a:latin typeface="맑은 고딕"/>
+              </a:rPr>
+              <a:t>3강 LWE · Part 3.2</a:t>
+            </a:r>
+          </a:p>
+        </p:txBody>
+      </p:sp>
+      <p:sp>
+        <p:nvSpPr>
+          <p:cNvPr id="5" name="TextBox 4"/>
+          <p:cNvSpPr txBox="1"/>
+          <p:nvPr/>
+        </p:nvSpPr>
+        <p:spPr>
+          <a:xfrm>
+            <a:off x="11002975" y="6473952"/>
+            <a:ext cx="822960" cy="320040"/>
+          </a:xfrm>
+          <a:prstGeom prst="rect">
+            <a:avLst/>
+          </a:prstGeom>
+          <a:noFill/>
+        </p:spPr>
+        <p:txBody>
+          <a:bodyPr wrap="square" anchor="t" lIns="0" rIns="0" tIns="0" bIns="0">
+            <a:spAutoFit/>
+          </a:bodyPr>
+          <a:lstStyle/>
+          <a:p>
+            <a:pPr algn="r">
+              <a:lnSpc>
+                <a:spcPct val="115000"/>
+              </a:lnSpc>
+            </a:pPr>
+            <a:r>
+              <a:rPr sz="1100" b="0" i="0">
+                <a:solidFill>
+                  <a:srgbClr val="5A5A5A"/>
+                </a:solidFill>
+                <a:latin typeface="맑은 고딕"/>
+              </a:rPr>
+              <a:t>23 / 33</a:t>
+            </a:r>
+          </a:p>
+        </p:txBody>
+      </p:sp>
+      <p:sp>
+        <p:nvSpPr>
+          <p:cNvPr id="6" name="TextBox 5"/>
+          <p:cNvSpPr txBox="1"/>
+          <p:nvPr/>
+        </p:nvSpPr>
+        <p:spPr>
+          <a:xfrm>
+            <a:off x="685800" y="1463040"/>
+            <a:ext cx="10789920" cy="4846320"/>
+          </a:xfrm>
+          <a:prstGeom prst="rect">
+            <a:avLst/>
+          </a:prstGeom>
+          <a:noFill/>
+        </p:spPr>
+        <p:txBody>
+          <a:bodyPr wrap="square" lIns="0" rIns="0" tIns="0" bIns="0">
+            <a:spAutoFit/>
+          </a:bodyPr>
+          <a:lstStyle/>
+          <a:p>
+            <a:pPr>
+              <a:lnSpc>
+                <a:spcPct val="125000"/>
+              </a:lnSpc>
+              <a:spcAft>
+                <a:spcPts val="1000"/>
+              </a:spcAft>
+            </a:pPr>
+            <a:r>
+              <a:rPr sz="1700">
+                <a:solidFill>
+                  <a:srgbClr val="222222"/>
+                </a:solidFill>
+                <a:latin typeface="맑은 고딕"/>
+              </a:rPr>
+              <a:t>—  LWE 인스턴스 (A,b)의 비밀 s의 좌표 s₁,s₂,…를 한 번에 하나씩 DLWE 솔버로 테스트</a:t>
+            </a:r>
+          </a:p>
+          <a:p>
+            <a:pPr>
+              <a:lnSpc>
+                <a:spcPct val="125000"/>
+              </a:lnSpc>
+              <a:spcAft>
+                <a:spcPts val="1000"/>
+              </a:spcAft>
+            </a:pPr>
+            <a:r>
+              <a:rPr sz="1700">
+                <a:solidFill>
+                  <a:srgbClr val="222222"/>
+                </a:solidFill>
+                <a:latin typeface="맑은 고딕"/>
+              </a:rPr>
+              <a:t>—  “s₁=d 인가?” 테스트: Δ∈R ℤqᵐ 을 뽑아, A의 첫 번째 열에 Δ를 더한 행렬 A′과 b′=b+dΔ 를 만든다</a:t>
+            </a:r>
+          </a:p>
+          <a:p>
+            <a:pPr>
+              <a:lnSpc>
+                <a:spcPct val="125000"/>
+              </a:lnSpc>
+              <a:spcAft>
+                <a:spcPts val="1000"/>
+              </a:spcAft>
+            </a:pPr>
+            <a:r>
+              <a:rPr sz="1700">
+                <a:solidFill>
+                  <a:srgbClr val="222222"/>
+                </a:solidFill>
+                <a:latin typeface="맑은 고딕"/>
+              </a:rPr>
+              <a:t>—  s₁=d 이면: b′=A′s+e → (A′,b′)은 유효한 LWE 인스턴스</a:t>
+            </a:r>
+          </a:p>
+          <a:p>
+            <a:pPr>
+              <a:lnSpc>
+                <a:spcPct val="125000"/>
+              </a:lnSpc>
+              <a:spcAft>
+                <a:spcPts val="1000"/>
+              </a:spcAft>
+            </a:pPr>
+            <a:r>
+              <a:rPr sz="1700">
+                <a:solidFill>
+                  <a:srgbClr val="222222"/>
+                </a:solidFill>
+                <a:latin typeface="맑은 고딕"/>
+              </a:rPr>
+              <a:t>—  s₁≠d 이면: b′=A′s+e+(d−s₁)Δ, 이때 Δ는 균등 난수이므로 b′도 A′과 독립인 균등 난수 → (A′,b′)은 랜덤 인스턴스처럼 보임</a:t>
+            </a:r>
+          </a:p>
+          <a:p>
+            <a:pPr>
+              <a:lnSpc>
+                <a:spcPct val="125000"/>
+              </a:lnSpc>
+              <a:spcAft>
+                <a:spcPts val="1000"/>
+              </a:spcAft>
+            </a:pPr>
+            <a:r>
+              <a:rPr sz="1700">
+                <a:solidFill>
+                  <a:srgbClr val="222222"/>
+                </a:solidFill>
+                <a:latin typeface="맑은 고딕"/>
+              </a:rPr>
+              <a:t>—  DLWE 솔버에 (A′,b′)을 넣은 결과가 “LWE 인스턴스처럼 보이는가”의 답 = “s₁=d 인가”의 답 — d∈ℤq 후보를 모든 좌표에 반복(최악 qn번)하면 s 전체 복원</a:t>
+            </a:r>
+          </a:p>
+        </p:txBody>
+      </p:sp>
+    </p:spTree>
+  </p:cSld>
+  <p:clrMapOvr>
+    <a:masterClrMapping/>
+  </p:clrMapOvr>
+</p:sld>
+</file>
+
+<file path=ppt/slides/slide24.xml><?xml version="1.0" encoding="utf-8"?>
+<p:sld xmlns:a="http://schemas.openxmlformats.org/drawingml/2006/main" xmlns:p="http://schemas.openxmlformats.org/presentationml/2006/main" xmlns:r="http://schemas.openxmlformats.org/officeDocument/2006/relationships">
+  <p:cSld>
+    <p:bg>
+      <p:bgPr>
+        <a:solidFill>
+          <a:srgbClr val="FFFFFF"/>
+        </a:solidFill>
+        <a:effectLst/>
+      </p:bgPr>
+    </p:bg>
+    <p:spTree>
+      <p:nvGrpSpPr>
+        <p:cNvPr id="1" name=""/>
+        <p:cNvGrpSpPr/>
+        <p:nvPr/>
+      </p:nvGrpSpPr>
+      <p:grpSpPr/>
+      <p:sp>
+        <p:nvSpPr>
+          <p:cNvPr id="2" name="Rectangle 1"/>
+          <p:cNvSpPr/>
+          <p:nvPr/>
+        </p:nvSpPr>
+        <p:spPr>
+          <a:xfrm>
+            <a:off x="0" y="0"/>
+            <a:ext cx="12191695" cy="1051560"/>
+          </a:xfrm>
+          <a:prstGeom prst="rect">
+            <a:avLst/>
+          </a:prstGeom>
+          <a:solidFill>
+            <a:srgbClr val="0E6E6A"/>
+          </a:solidFill>
+          <a:ln>
+            <a:noFill/>
+          </a:ln>
+          <a:effectLst/>
+        </p:spPr>
+        <p:style>
+          <a:lnRef idx="1">
+            <a:schemeClr val="accent1"/>
+          </a:lnRef>
+          <a:fillRef idx="3">
+            <a:schemeClr val="accent1"/>
+          </a:fillRef>
+          <a:effectRef idx="2">
+            <a:schemeClr val="accent1"/>
+          </a:effectRef>
+          <a:fontRef idx="minor">
+            <a:schemeClr val="lt1"/>
+          </a:fontRef>
+        </p:style>
+        <p:txBody>
+          <a:bodyPr rtlCol="0" anchor="ctr"/>
+          <a:lstStyle/>
+          <a:p>
+            <a:pPr algn="ctr"/>
+          </a:p>
+        </p:txBody>
+      </p:sp>
+      <p:sp>
+        <p:nvSpPr>
+          <p:cNvPr id="3" name="TextBox 2"/>
+          <p:cNvSpPr txBox="1"/>
+          <p:nvPr/>
+        </p:nvSpPr>
+        <p:spPr>
+          <a:xfrm>
+            <a:off x="502920" y="118872"/>
+            <a:ext cx="11185855" cy="822960"/>
+          </a:xfrm>
+          <a:prstGeom prst="rect">
+            <a:avLst/>
+          </a:prstGeom>
+          <a:noFill/>
+        </p:spPr>
+        <p:txBody>
+          <a:bodyPr wrap="square" anchor="ctr" lIns="0" rIns="0" tIns="0" bIns="0">
+            <a:spAutoFit/>
+          </a:bodyPr>
+          <a:lstStyle/>
+          <a:p>
+            <a:pPr algn="l">
+              <a:lnSpc>
+                <a:spcPct val="115000"/>
+              </a:lnSpc>
+            </a:pPr>
+            <a:r>
+              <a:rPr sz="2700" b="1" i="0">
+                <a:solidFill>
+                  <a:srgbClr val="FFFFFF"/>
+                </a:solidFill>
+                <a:latin typeface="맑은 고딕"/>
+              </a:rPr>
+              <a:t>Short-Secret LWE (ss-LWE)</a:t>
+            </a:r>
+          </a:p>
+        </p:txBody>
+      </p:sp>
+      <p:sp>
+        <p:nvSpPr>
+          <p:cNvPr id="4" name="TextBox 3"/>
+          <p:cNvSpPr txBox="1"/>
+          <p:nvPr/>
+        </p:nvSpPr>
+        <p:spPr>
+          <a:xfrm>
+            <a:off x="502920" y="6473952"/>
+            <a:ext cx="5486400" cy="320040"/>
+          </a:xfrm>
+          <a:prstGeom prst="rect">
+            <a:avLst/>
+          </a:prstGeom>
+          <a:noFill/>
+        </p:spPr>
+        <p:txBody>
+          <a:bodyPr wrap="square" anchor="t" lIns="0" rIns="0" tIns="0" bIns="0">
+            <a:spAutoFit/>
+          </a:bodyPr>
+          <a:lstStyle/>
+          <a:p>
+            <a:pPr algn="l">
+              <a:lnSpc>
+                <a:spcPct val="115000"/>
+              </a:lnSpc>
+            </a:pPr>
+            <a:r>
+              <a:rPr sz="1100" b="0" i="0">
+                <a:solidFill>
+                  <a:srgbClr val="5A5A5A"/>
+                </a:solidFill>
+                <a:latin typeface="맑은 고딕"/>
+              </a:rPr>
+              <a:t>3강 LWE · Part 4</a:t>
+            </a:r>
+          </a:p>
+        </p:txBody>
+      </p:sp>
+      <p:sp>
+        <p:nvSpPr>
+          <p:cNvPr id="5" name="TextBox 4"/>
+          <p:cNvSpPr txBox="1"/>
+          <p:nvPr/>
+        </p:nvSpPr>
+        <p:spPr>
+          <a:xfrm>
+            <a:off x="11002975" y="6473952"/>
+            <a:ext cx="822960" cy="320040"/>
+          </a:xfrm>
+          <a:prstGeom prst="rect">
+            <a:avLst/>
+          </a:prstGeom>
+          <a:noFill/>
+        </p:spPr>
+        <p:txBody>
+          <a:bodyPr wrap="square" anchor="t" lIns="0" rIns="0" tIns="0" bIns="0">
+            <a:spAutoFit/>
+          </a:bodyPr>
+          <a:lstStyle/>
+          <a:p>
+            <a:pPr algn="r">
+              <a:lnSpc>
+                <a:spcPct val="115000"/>
+              </a:lnSpc>
+            </a:pPr>
+            <a:r>
+              <a:rPr sz="1100" b="0" i="0">
+                <a:solidFill>
+                  <a:srgbClr val="5A5A5A"/>
+                </a:solidFill>
+                <a:latin typeface="맑은 고딕"/>
+              </a:rPr>
+              <a:t>24 / 33</a:t>
+            </a:r>
+          </a:p>
+        </p:txBody>
+      </p:sp>
+      <p:sp>
+        <p:nvSpPr>
+          <p:cNvPr id="6" name="TextBox 5"/>
+          <p:cNvSpPr txBox="1"/>
+          <p:nvPr/>
+        </p:nvSpPr>
+        <p:spPr>
+          <a:xfrm>
+            <a:off x="685800" y="1463040"/>
+            <a:ext cx="10789920" cy="4572000"/>
+          </a:xfrm>
+          <a:prstGeom prst="rect">
+            <a:avLst/>
+          </a:prstGeom>
+          <a:noFill/>
+        </p:spPr>
+        <p:txBody>
+          <a:bodyPr wrap="square" lIns="0" rIns="0" tIns="0" bIns="0">
+            <a:spAutoFit/>
+          </a:bodyPr>
+          <a:lstStyle/>
+          <a:p>
+            <a:pPr>
+              <a:lnSpc>
+                <a:spcPct val="125000"/>
+              </a:lnSpc>
+              <a:spcAft>
+                <a:spcPts val="1600"/>
+              </a:spcAft>
+            </a:pPr>
+            <a:r>
+              <a:rPr sz="1950">
+                <a:solidFill>
+                  <a:srgbClr val="222222"/>
+                </a:solidFill>
+                <a:latin typeface="맑은 고딕"/>
+              </a:rPr>
+              <a:t>—  비밀 s도 오차 e처럼 [-B,B]ⁿ 에서 뽑는 LWE 변형</a:t>
+            </a:r>
+          </a:p>
+          <a:p>
+            <a:pPr>
+              <a:lnSpc>
+                <a:spcPct val="125000"/>
+              </a:lnSpc>
+              <a:spcAft>
+                <a:spcPts val="1600"/>
+              </a:spcAft>
+            </a:pPr>
+            <a:r>
+              <a:rPr sz="1950">
+                <a:solidFill>
+                  <a:srgbClr val="222222"/>
+                </a:solidFill>
+                <a:latin typeface="맑은 고딕"/>
+              </a:rPr>
+              <a:t>—  일반 LWE와 달리 m ≫ n 조건 없이도(심지어 m=n인 정사각행렬이어도) 해가 높은 확률로 유일</a:t>
+            </a:r>
+          </a:p>
+          <a:p>
+            <a:pPr>
+              <a:lnSpc>
+                <a:spcPct val="125000"/>
+              </a:lnSpc>
+              <a:spcAft>
+                <a:spcPts val="1600"/>
+              </a:spcAft>
+            </a:pPr>
+            <a:r>
+              <a:rPr sz="1950">
+                <a:solidFill>
+                  <a:srgbClr val="222222"/>
+                </a:solidFill>
+                <a:latin typeface="맑은 고딕"/>
+              </a:rPr>
+              <a:t>—  LWE와 계산적으로 동치: ss-LWE(m,n,q,B) ≤ LWE(m,n,q,B) 이고 LWE(m,n,q,B) ≤ ss-LWE(m-n,n,q,B) (다음 두 슬라이드에서 증명)</a:t>
+            </a:r>
+          </a:p>
+          <a:p>
+            <a:pPr>
+              <a:lnSpc>
+                <a:spcPct val="125000"/>
+              </a:lnSpc>
+              <a:spcAft>
+                <a:spcPts val="1600"/>
+              </a:spcAft>
+            </a:pPr>
+            <a:r>
+              <a:rPr sz="1950">
+                <a:solidFill>
+                  <a:srgbClr val="222222"/>
+                </a:solidFill>
+                <a:latin typeface="맑은 고딕"/>
+              </a:rPr>
+              <a:t>—  → 이 성질 덕분에 다음의 Lindner-Peikert 암호가 정사각 행렬만으로 안전하게 동작한다</a:t>
+            </a:r>
+          </a:p>
+        </p:txBody>
+      </p:sp>
+    </p:spTree>
+  </p:cSld>
+  <p:clrMapOvr>
+    <a:masterClrMapping/>
+  </p:clrMapOvr>
+</p:sld>
+</file>
+
+<file path=ppt/slides/slide25.xml><?xml version="1.0" encoding="utf-8"?>
+<p:sld xmlns:a="http://schemas.openxmlformats.org/drawingml/2006/main" xmlns:p="http://schemas.openxmlformats.org/presentationml/2006/main" xmlns:r="http://schemas.openxmlformats.org/officeDocument/2006/relationships">
+  <p:cSld>
+    <p:bg>
+      <p:bgPr>
+        <a:solidFill>
+          <a:srgbClr val="FFFFFF"/>
+        </a:solidFill>
+        <a:effectLst/>
+      </p:bgPr>
+    </p:bg>
+    <p:spTree>
+      <p:nvGrpSpPr>
+        <p:cNvPr id="1" name=""/>
+        <p:cNvGrpSpPr/>
+        <p:nvPr/>
+      </p:nvGrpSpPr>
+      <p:grpSpPr/>
+      <p:sp>
+        <p:nvSpPr>
+          <p:cNvPr id="2" name="Rectangle 1"/>
+          <p:cNvSpPr/>
+          <p:nvPr/>
+        </p:nvSpPr>
+        <p:spPr>
+          <a:xfrm>
+            <a:off x="0" y="0"/>
+            <a:ext cx="12191695" cy="1051560"/>
+          </a:xfrm>
+          <a:prstGeom prst="rect">
+            <a:avLst/>
+          </a:prstGeom>
+          <a:solidFill>
+            <a:srgbClr val="0E6E6A"/>
+          </a:solidFill>
+          <a:ln>
+            <a:noFill/>
+          </a:ln>
+          <a:effectLst/>
+        </p:spPr>
+        <p:style>
+          <a:lnRef idx="1">
+            <a:schemeClr val="accent1"/>
+          </a:lnRef>
+          <a:fillRef idx="3">
+            <a:schemeClr val="accent1"/>
+          </a:fillRef>
+          <a:effectRef idx="2">
+            <a:schemeClr val="accent1"/>
+          </a:effectRef>
+          <a:fontRef idx="minor">
+            <a:schemeClr val="lt1"/>
+          </a:fontRef>
+        </p:style>
+        <p:txBody>
+          <a:bodyPr rtlCol="0" anchor="ctr"/>
+          <a:lstStyle/>
+          <a:p>
+            <a:pPr algn="ctr"/>
+          </a:p>
+        </p:txBody>
+      </p:sp>
+      <p:sp>
+        <p:nvSpPr>
+          <p:cNvPr id="3" name="TextBox 2"/>
+          <p:cNvSpPr txBox="1"/>
+          <p:nvPr/>
+        </p:nvSpPr>
+        <p:spPr>
+          <a:xfrm>
+            <a:off x="502920" y="118872"/>
+            <a:ext cx="11185855" cy="822960"/>
+          </a:xfrm>
+          <a:prstGeom prst="rect">
+            <a:avLst/>
+          </a:prstGeom>
+          <a:noFill/>
+        </p:spPr>
+        <p:txBody>
+          <a:bodyPr wrap="square" anchor="ctr" lIns="0" rIns="0" tIns="0" bIns="0">
+            <a:spAutoFit/>
+          </a:bodyPr>
+          <a:lstStyle/>
+          <a:p>
+            <a:pPr algn="l">
+              <a:lnSpc>
+                <a:spcPct val="115000"/>
+              </a:lnSpc>
+            </a:pPr>
+            <a:r>
+              <a:rPr sz="2700" b="1" i="0">
+                <a:solidFill>
+                  <a:srgbClr val="FFFFFF"/>
+                </a:solidFill>
+                <a:latin typeface="맑은 고딕"/>
+              </a:rPr>
+              <a:t>ss-LWE ≤ LWE 증명 (Claim 1)</a:t>
+            </a:r>
+          </a:p>
+        </p:txBody>
+      </p:sp>
+      <p:sp>
+        <p:nvSpPr>
+          <p:cNvPr id="4" name="TextBox 3"/>
+          <p:cNvSpPr txBox="1"/>
+          <p:nvPr/>
+        </p:nvSpPr>
+        <p:spPr>
+          <a:xfrm>
+            <a:off x="502920" y="6473952"/>
+            <a:ext cx="5486400" cy="320040"/>
+          </a:xfrm>
+          <a:prstGeom prst="rect">
+            <a:avLst/>
+          </a:prstGeom>
+          <a:noFill/>
+        </p:spPr>
+        <p:txBody>
+          <a:bodyPr wrap="square" anchor="t" lIns="0" rIns="0" tIns="0" bIns="0">
+            <a:spAutoFit/>
+          </a:bodyPr>
+          <a:lstStyle/>
+          <a:p>
+            <a:pPr algn="l">
+              <a:lnSpc>
+                <a:spcPct val="115000"/>
+              </a:lnSpc>
+            </a:pPr>
+            <a:r>
+              <a:rPr sz="1100" b="0" i="0">
+                <a:solidFill>
+                  <a:srgbClr val="5A5A5A"/>
+                </a:solidFill>
+                <a:latin typeface="맑은 고딕"/>
+              </a:rPr>
+              <a:t>3강 LWE · Part 4.2</a:t>
+            </a:r>
+          </a:p>
+        </p:txBody>
+      </p:sp>
+      <p:sp>
+        <p:nvSpPr>
+          <p:cNvPr id="5" name="TextBox 4"/>
+          <p:cNvSpPr txBox="1"/>
+          <p:nvPr/>
+        </p:nvSpPr>
+        <p:spPr>
+          <a:xfrm>
+            <a:off x="11002975" y="6473952"/>
+            <a:ext cx="822960" cy="320040"/>
+          </a:xfrm>
+          <a:prstGeom prst="rect">
+            <a:avLst/>
+          </a:prstGeom>
+          <a:noFill/>
+        </p:spPr>
+        <p:txBody>
+          <a:bodyPr wrap="square" anchor="t" lIns="0" rIns="0" tIns="0" bIns="0">
+            <a:spAutoFit/>
+          </a:bodyPr>
+          <a:lstStyle/>
+          <a:p>
+            <a:pPr algn="r">
+              <a:lnSpc>
+                <a:spcPct val="115000"/>
+              </a:lnSpc>
+            </a:pPr>
+            <a:r>
+              <a:rPr sz="1100" b="0" i="0">
+                <a:solidFill>
+                  <a:srgbClr val="5A5A5A"/>
+                </a:solidFill>
+                <a:latin typeface="맑은 고딕"/>
+              </a:rPr>
+              <a:t>25 / 33</a:t>
+            </a:r>
+          </a:p>
+        </p:txBody>
+      </p:sp>
+      <p:sp>
+        <p:nvSpPr>
+          <p:cNvPr id="6" name="TextBox 5"/>
+          <p:cNvSpPr txBox="1"/>
+          <p:nvPr/>
+        </p:nvSpPr>
+        <p:spPr>
+          <a:xfrm>
+            <a:off x="685800" y="1508760"/>
+            <a:ext cx="10789920" cy="3291840"/>
+          </a:xfrm>
+          <a:prstGeom prst="rect">
+            <a:avLst/>
+          </a:prstGeom>
+          <a:noFill/>
+        </p:spPr>
+        <p:txBody>
+          <a:bodyPr wrap="square" lIns="0" rIns="0" tIns="0" bIns="0">
+            <a:spAutoFit/>
+          </a:bodyPr>
+          <a:lstStyle/>
+          <a:p>
+            <a:pPr>
+              <a:lnSpc>
+                <a:spcPct val="125000"/>
+              </a:lnSpc>
+              <a:spcAft>
+                <a:spcPts val="1200"/>
+              </a:spcAft>
+            </a:pPr>
+            <a:r>
+              <a:rPr sz="1850">
+                <a:solidFill>
+                  <a:srgbClr val="222222"/>
+                </a:solidFill>
+                <a:latin typeface="맑은 고딕"/>
+              </a:rPr>
+              <a:t>—  ss-LWE 인스턴스 (A,b), b=As+e (s∈[-B,B]ⁿ)가 주어짐</a:t>
+            </a:r>
+          </a:p>
+          <a:p>
+            <a:pPr>
+              <a:lnSpc>
+                <a:spcPct val="125000"/>
+              </a:lnSpc>
+              <a:spcAft>
+                <a:spcPts val="1200"/>
+              </a:spcAft>
+            </a:pPr>
+            <a:r>
+              <a:rPr sz="1850">
+                <a:solidFill>
+                  <a:srgbClr val="222222"/>
+                </a:solidFill>
+                <a:latin typeface="맑은 고딕"/>
+              </a:rPr>
+              <a:t>—  d∈R ℤqⁿ 을 뽑아 b′=b+Ad=A(s+d)+e 로 두면, (A,b′)은 비밀이 s+d∈ℤqⁿ 인 일반 LWE(m,n,q,B) 인스턴스</a:t>
+            </a:r>
+          </a:p>
+          <a:p>
+            <a:pPr>
+              <a:lnSpc>
+                <a:spcPct val="125000"/>
+              </a:lnSpc>
+              <a:spcAft>
+                <a:spcPts val="1200"/>
+              </a:spcAft>
+            </a:pPr>
+            <a:r>
+              <a:rPr sz="1850">
+                <a:solidFill>
+                  <a:srgbClr val="222222"/>
+                </a:solidFill>
+                <a:latin typeface="맑은 고딕"/>
+              </a:rPr>
+              <a:t>—  이 LWE 인스턴스의 해 (s′,e)를 얻으면 s=s′−d 로 원래 ss-LWE 해를 즉시 복원 — 파라미터 (m,n,q,B) 그대로 유지</a:t>
+            </a:r>
+          </a:p>
+        </p:txBody>
+      </p:sp>
+      <p:sp>
+        <p:nvSpPr>
+          <p:cNvPr id="7" name="TextBox 6"/>
+          <p:cNvSpPr txBox="1"/>
+          <p:nvPr/>
+        </p:nvSpPr>
+        <p:spPr>
+          <a:xfrm>
+            <a:off x="685800" y="4663440"/>
+            <a:ext cx="10789920" cy="274320"/>
+          </a:xfrm>
+          <a:prstGeom prst="rect">
+            <a:avLst/>
+          </a:prstGeom>
+          <a:noFill/>
+        </p:spPr>
+        <p:txBody>
+          <a:bodyPr wrap="square" anchor="t" lIns="0" rIns="0" tIns="0" bIns="0">
+            <a:spAutoFit/>
+          </a:bodyPr>
+          <a:lstStyle/>
+          <a:p>
+            <a:pPr algn="l">
+              <a:lnSpc>
+                <a:spcPct val="115000"/>
+              </a:lnSpc>
+            </a:pPr>
+            <a:r>
+              <a:rPr sz="1500" b="1" i="0">
+                <a:solidFill>
+                  <a:srgbClr val="5A5A5A"/>
+                </a:solidFill>
+                <a:latin typeface="맑은 고딕"/>
+              </a:rPr>
+              <a:t>작은 수로 검산 (q=11, n=2, m=3)</a:t>
+            </a:r>
+          </a:p>
+        </p:txBody>
+      </p:sp>
+      <p:sp>
+        <p:nvSpPr>
+          <p:cNvPr id="8" name="TextBox 7"/>
+          <p:cNvSpPr txBox="1"/>
+          <p:nvPr/>
+        </p:nvSpPr>
+        <p:spPr>
+          <a:xfrm>
+            <a:off x="822960" y="4983480"/>
+            <a:ext cx="10515600" cy="1280160"/>
+          </a:xfrm>
+          <a:prstGeom prst="rect">
+            <a:avLst/>
+          </a:prstGeom>
+          <a:noFill/>
+        </p:spPr>
+        <p:txBody>
+          <a:bodyPr wrap="none">
+            <a:spAutoFit/>
+          </a:bodyPr>
+          <a:lstStyle/>
+          <a:p>
+            <a:pPr algn="l"/>
+            <a:r>
+              <a:rPr sz="1300">
+                <a:solidFill>
+                  <a:srgbClr val="222222"/>
+                </a:solidFill>
+                <a:latin typeface="Consolas"/>
+              </a:rPr>
+              <a:t>A=[1 2;3 4;5 6], s=(1,-1), e=(0,1,-1) → b=As+e mod11=(10,0,9)</a:t>
+            </a:r>
+          </a:p>
+          <a:p>
+            <a:pPr algn="l"/>
+            <a:r>
+              <a:rPr sz="1300">
+                <a:solidFill>
+                  <a:srgbClr val="222222"/>
+                </a:solidFill>
+                <a:latin typeface="Consolas"/>
+              </a:rPr>
+              <a:t>d=(3,4) → b′=b+Ad mod11=(10,3,4): (A,b′)은 비밀 s′=s+d=(4,3) 인 LWE. s=s′-d=(1,-1) 복원 ✓</a:t>
+            </a:r>
+          </a:p>
+        </p:txBody>
+      </p:sp>
+    </p:spTree>
+  </p:cSld>
+  <p:clrMapOvr>
+    <a:masterClrMapping/>
+  </p:clrMapOvr>
+</p:sld>
+</file>
+
+<file path=ppt/slides/slide26.xml><?xml version="1.0" encoding="utf-8"?>
+<p:sld xmlns:a="http://schemas.openxmlformats.org/drawingml/2006/main" xmlns:p="http://schemas.openxmlformats.org/presentationml/2006/main" xmlns:r="http://schemas.openxmlformats.org/officeDocument/2006/relationships">
+  <p:cSld>
+    <p:bg>
+      <p:bgPr>
+        <a:solidFill>
+          <a:srgbClr val="FFFFFF"/>
+        </a:solidFill>
+        <a:effectLst/>
+      </p:bgPr>
+    </p:bg>
+    <p:spTree>
+      <p:nvGrpSpPr>
+        <p:cNvPr id="1" name=""/>
+        <p:cNvGrpSpPr/>
+        <p:nvPr/>
+      </p:nvGrpSpPr>
+      <p:grpSpPr/>
+      <p:sp>
+        <p:nvSpPr>
+          <p:cNvPr id="2" name="Rectangle 1"/>
+          <p:cNvSpPr/>
+          <p:nvPr/>
+        </p:nvSpPr>
+        <p:spPr>
+          <a:xfrm>
+            <a:off x="0" y="0"/>
+            <a:ext cx="12191695" cy="1051560"/>
+          </a:xfrm>
+          <a:prstGeom prst="rect">
+            <a:avLst/>
+          </a:prstGeom>
+          <a:solidFill>
+            <a:srgbClr val="0E6E6A"/>
+          </a:solidFill>
+          <a:ln>
+            <a:noFill/>
+          </a:ln>
+          <a:effectLst/>
+        </p:spPr>
+        <p:style>
+          <a:lnRef idx="1">
+            <a:schemeClr val="accent1"/>
+          </a:lnRef>
+          <a:fillRef idx="3">
+            <a:schemeClr val="accent1"/>
+          </a:fillRef>
+          <a:effectRef idx="2">
+            <a:schemeClr val="accent1"/>
+          </a:effectRef>
+          <a:fontRef idx="minor">
+            <a:schemeClr val="lt1"/>
+          </a:fontRef>
+        </p:style>
+        <p:txBody>
+          <a:bodyPr rtlCol="0" anchor="ctr"/>
+          <a:lstStyle/>
+          <a:p>
+            <a:pPr algn="ctr"/>
+          </a:p>
+        </p:txBody>
+      </p:sp>
+      <p:sp>
+        <p:nvSpPr>
+          <p:cNvPr id="3" name="TextBox 2"/>
+          <p:cNvSpPr txBox="1"/>
+          <p:nvPr/>
+        </p:nvSpPr>
+        <p:spPr>
+          <a:xfrm>
+            <a:off x="502920" y="118872"/>
+            <a:ext cx="11185855" cy="822960"/>
+          </a:xfrm>
+          <a:prstGeom prst="rect">
+            <a:avLst/>
+          </a:prstGeom>
+          <a:noFill/>
+        </p:spPr>
+        <p:txBody>
+          <a:bodyPr wrap="square" anchor="ctr" lIns="0" rIns="0" tIns="0" bIns="0">
+            <a:spAutoFit/>
+          </a:bodyPr>
+          <a:lstStyle/>
+          <a:p>
+            <a:pPr algn="l">
+              <a:lnSpc>
+                <a:spcPct val="115000"/>
+              </a:lnSpc>
+            </a:pPr>
+            <a:r>
+              <a:rPr sz="2700" b="1" i="0">
+                <a:solidFill>
+                  <a:srgbClr val="FFFFFF"/>
+                </a:solidFill>
+                <a:latin typeface="맑은 고딕"/>
+              </a:rPr>
+              <a:t>LWE ≤ ss-LWE 증명 (Claim 2)</a:t>
+            </a:r>
+          </a:p>
+        </p:txBody>
+      </p:sp>
+      <p:sp>
+        <p:nvSpPr>
+          <p:cNvPr id="4" name="TextBox 3"/>
+          <p:cNvSpPr txBox="1"/>
+          <p:nvPr/>
+        </p:nvSpPr>
+        <p:spPr>
+          <a:xfrm>
+            <a:off x="502920" y="6473952"/>
+            <a:ext cx="5486400" cy="320040"/>
+          </a:xfrm>
+          <a:prstGeom prst="rect">
+            <a:avLst/>
+          </a:prstGeom>
+          <a:noFill/>
+        </p:spPr>
+        <p:txBody>
+          <a:bodyPr wrap="square" anchor="t" lIns="0" rIns="0" tIns="0" bIns="0">
+            <a:spAutoFit/>
+          </a:bodyPr>
+          <a:lstStyle/>
+          <a:p>
+            <a:pPr algn="l">
+              <a:lnSpc>
+                <a:spcPct val="115000"/>
+              </a:lnSpc>
+            </a:pPr>
+            <a:r>
+              <a:rPr sz="1100" b="0" i="0">
+                <a:solidFill>
+                  <a:srgbClr val="5A5A5A"/>
+                </a:solidFill>
+                <a:latin typeface="맑은 고딕"/>
+              </a:rPr>
+              <a:t>3강 LWE · Part 4.2</a:t>
+            </a:r>
+          </a:p>
+        </p:txBody>
+      </p:sp>
+      <p:sp>
+        <p:nvSpPr>
+          <p:cNvPr id="5" name="TextBox 4"/>
+          <p:cNvSpPr txBox="1"/>
+          <p:nvPr/>
+        </p:nvSpPr>
+        <p:spPr>
+          <a:xfrm>
+            <a:off x="11002975" y="6473952"/>
+            <a:ext cx="822960" cy="320040"/>
+          </a:xfrm>
+          <a:prstGeom prst="rect">
+            <a:avLst/>
+          </a:prstGeom>
+          <a:noFill/>
+        </p:spPr>
+        <p:txBody>
+          <a:bodyPr wrap="square" anchor="t" lIns="0" rIns="0" tIns="0" bIns="0">
+            <a:spAutoFit/>
+          </a:bodyPr>
+          <a:lstStyle/>
+          <a:p>
+            <a:pPr algn="r">
+              <a:lnSpc>
+                <a:spcPct val="115000"/>
+              </a:lnSpc>
+            </a:pPr>
+            <a:r>
+              <a:rPr sz="1100" b="0" i="0">
+                <a:solidFill>
+                  <a:srgbClr val="5A5A5A"/>
+                </a:solidFill>
+                <a:latin typeface="맑은 고딕"/>
+              </a:rPr>
+              <a:t>26 / 33</a:t>
+            </a:r>
+          </a:p>
+        </p:txBody>
+      </p:sp>
+      <p:sp>
+        <p:nvSpPr>
+          <p:cNvPr id="6" name="TextBox 5"/>
+          <p:cNvSpPr txBox="1"/>
+          <p:nvPr/>
+        </p:nvSpPr>
+        <p:spPr>
+          <a:xfrm>
+            <a:off x="2103120" y="1417320"/>
+            <a:ext cx="7315200" cy="822960"/>
+          </a:xfrm>
+          <a:prstGeom prst="rect">
+            <a:avLst/>
+          </a:prstGeom>
+          <a:noFill/>
+        </p:spPr>
+        <p:txBody>
+          <a:bodyPr wrap="none">
+            <a:spAutoFit/>
+          </a:bodyPr>
+          <a:lstStyle/>
+          <a:p>
+            <a:pPr algn="l"/>
+            <a:r>
+              <a:rPr sz="1450">
+                <a:solidFill>
+                  <a:srgbClr val="222222"/>
+                </a:solidFill>
+                <a:latin typeface="Consolas"/>
+              </a:rPr>
+              <a:t>A = [A₁]   b = [b₁]   e = [e₁]      A₁: n×n,  b₁,e₁: n×1</a:t>
+            </a:r>
+          </a:p>
+          <a:p>
+            <a:pPr algn="l"/>
+            <a:r>
+              <a:rPr sz="1450">
+                <a:solidFill>
+                  <a:srgbClr val="222222"/>
+                </a:solidFill>
+                <a:latin typeface="Consolas"/>
+              </a:rPr>
+              <a:t>    [A₂] ,     [b₂] ,     [e₂]      A₂: (m−n)×n,  b₂,e₂: (m−n)×1</a:t>
+            </a:r>
+          </a:p>
+        </p:txBody>
+      </p:sp>
+      <p:sp>
+        <p:nvSpPr>
+          <p:cNvPr id="7" name="TextBox 6"/>
+          <p:cNvSpPr txBox="1"/>
+          <p:nvPr/>
+        </p:nvSpPr>
+        <p:spPr>
+          <a:xfrm>
+            <a:off x="685800" y="2514600"/>
+            <a:ext cx="10789920" cy="3657600"/>
+          </a:xfrm>
+          <a:prstGeom prst="rect">
+            <a:avLst/>
+          </a:prstGeom>
+          <a:noFill/>
+        </p:spPr>
+        <p:txBody>
+          <a:bodyPr wrap="square" lIns="0" rIns="0" tIns="0" bIns="0">
+            <a:spAutoFit/>
+          </a:bodyPr>
+          <a:lstStyle/>
+          <a:p>
+            <a:pPr>
+              <a:lnSpc>
+                <a:spcPct val="125000"/>
+              </a:lnSpc>
+              <a:spcAft>
+                <a:spcPts val="800"/>
+              </a:spcAft>
+            </a:pPr>
+            <a:r>
+              <a:rPr sz="1650">
+                <a:solidFill>
+                  <a:srgbClr val="222222"/>
+                </a:solidFill>
+                <a:latin typeface="맑은 고딕"/>
+              </a:rPr>
+              <a:t>—  LWE 인스턴스 (A,b), b=As+e 를 위 n개 행(A₁,b₁,e₁)과 나머지 m−n개 행(A₂,b₂,e₂)으로 분할</a:t>
+            </a:r>
+          </a:p>
+          <a:p>
+            <a:pPr>
+              <a:lnSpc>
+                <a:spcPct val="125000"/>
+              </a:lnSpc>
+              <a:spcAft>
+                <a:spcPts val="800"/>
+              </a:spcAft>
+            </a:pPr>
+            <a:r>
+              <a:rPr sz="1650">
+                <a:solidFill>
+                  <a:srgbClr val="222222"/>
+                </a:solidFill>
+                <a:latin typeface="맑은 고딕"/>
+              </a:rPr>
+              <a:t>—  A₁이 (압도적 확률로) 가역이라 하고 A′=−A₂A₁⁻¹, b′=A′b₁+b₂ 로 정의하면</a:t>
+            </a:r>
+          </a:p>
+          <a:p>
+            <a:pPr>
+              <a:lnSpc>
+                <a:spcPct val="125000"/>
+              </a:lnSpc>
+              <a:spcAft>
+                <a:spcPts val="800"/>
+              </a:spcAft>
+            </a:pPr>
+            <a:r>
+              <a:rPr sz="1650">
+                <a:solidFill>
+                  <a:srgbClr val="222222"/>
+                </a:solidFill>
+                <a:latin typeface="맑은 고딕"/>
+              </a:rPr>
+              <a:t>—  b′ = −A₂A₁⁻¹(A₁s+e₁)+(A₂s+e₂) = A′e₁+e₂ → (A′,b′)은 비밀이 e₁∈[-B,B]ⁿ 인 ss-LWE(m−n,n,q,B) 인스턴스</a:t>
+            </a:r>
+          </a:p>
+          <a:p>
+            <a:pPr>
+              <a:lnSpc>
+                <a:spcPct val="125000"/>
+              </a:lnSpc>
+              <a:spcAft>
+                <a:spcPts val="800"/>
+              </a:spcAft>
+            </a:pPr>
+            <a:r>
+              <a:rPr sz="1650">
+                <a:solidFill>
+                  <a:srgbClr val="222222"/>
+                </a:solidFill>
+                <a:latin typeface="맑은 고딕"/>
+              </a:rPr>
+              <a:t>—  이 ss-LWE의 해 e₁을 얻으면 b₁=A₁s+e₁ 에서 s=A₁⁻¹(b₁−e₁) 로 원래 LWE 비밀 복원 — 표본 수가 m에서 m−n으로 감소(A₁의 n개 행을 A₁⁻¹ 만드는 데 “소모”)</a:t>
+            </a:r>
+          </a:p>
+        </p:txBody>
+      </p:sp>
+    </p:spTree>
+  </p:cSld>
+  <p:clrMapOvr>
+    <a:masterClrMapping/>
+  </p:clrMapOvr>
+</p:sld>
+</file>
+
+<file path=ppt/slides/slide27.xml><?xml version="1.0" encoding="utf-8"?>
+<p:sld xmlns:a="http://schemas.openxmlformats.org/drawingml/2006/main" xmlns:p="http://schemas.openxmlformats.org/presentationml/2006/main" xmlns:r="http://schemas.openxmlformats.org/officeDocument/2006/relationships">
+  <p:cSld>
+    <p:bg>
+      <p:bgPr>
+        <a:solidFill>
+          <a:srgbClr val="FFFFFF"/>
+        </a:solidFill>
+        <a:effectLst/>
+      </p:bgPr>
+    </p:bg>
+    <p:spTree>
+      <p:nvGrpSpPr>
+        <p:cNvPr id="1" name=""/>
+        <p:cNvGrpSpPr/>
+        <p:nvPr/>
+      </p:nvGrpSpPr>
+      <p:grpSpPr/>
+      <p:sp>
+        <p:nvSpPr>
+          <p:cNvPr id="2" name="Rectangle 1"/>
+          <p:cNvSpPr/>
+          <p:nvPr/>
+        </p:nvSpPr>
+        <p:spPr>
+          <a:xfrm>
+            <a:off x="0" y="0"/>
+            <a:ext cx="12191695" cy="1051560"/>
+          </a:xfrm>
+          <a:prstGeom prst="rect">
+            <a:avLst/>
+          </a:prstGeom>
+          <a:solidFill>
+            <a:srgbClr val="0E6E6A"/>
+          </a:solidFill>
+          <a:ln>
+            <a:noFill/>
+          </a:ln>
+          <a:effectLst/>
+        </p:spPr>
+        <p:style>
+          <a:lnRef idx="1">
+            <a:schemeClr val="accent1"/>
+          </a:lnRef>
+          <a:fillRef idx="3">
+            <a:schemeClr val="accent1"/>
+          </a:fillRef>
+          <a:effectRef idx="2">
+            <a:schemeClr val="accent1"/>
+          </a:effectRef>
+          <a:fontRef idx="minor">
+            <a:schemeClr val="lt1"/>
+          </a:fontRef>
+        </p:style>
+        <p:txBody>
+          <a:bodyPr rtlCol="0" anchor="ctr"/>
+          <a:lstStyle/>
+          <a:p>
+            <a:pPr algn="ctr"/>
+          </a:p>
+        </p:txBody>
+      </p:sp>
+      <p:sp>
+        <p:nvSpPr>
+          <p:cNvPr id="3" name="TextBox 2"/>
+          <p:cNvSpPr txBox="1"/>
+          <p:nvPr/>
+        </p:nvSpPr>
+        <p:spPr>
+          <a:xfrm>
+            <a:off x="502920" y="118872"/>
+            <a:ext cx="11185855" cy="822960"/>
+          </a:xfrm>
+          <a:prstGeom prst="rect">
+            <a:avLst/>
+          </a:prstGeom>
+          <a:noFill/>
+        </p:spPr>
+        <p:txBody>
+          <a:bodyPr wrap="square" anchor="ctr" lIns="0" rIns="0" tIns="0" bIns="0">
+            <a:spAutoFit/>
+          </a:bodyPr>
+          <a:lstStyle/>
+          <a:p>
+            <a:pPr algn="l">
+              <a:lnSpc>
+                <a:spcPct val="115000"/>
+              </a:lnSpc>
+            </a:pPr>
+            <a:r>
+              <a:rPr sz="2700" b="1" i="0">
+                <a:solidFill>
+                  <a:srgbClr val="FFFFFF"/>
+                </a:solidFill>
+                <a:latin typeface="맑은 고딕"/>
+              </a:rPr>
+              <a:t>응용: Lindner-Peikert 공개키 암호</a:t>
+            </a:r>
+          </a:p>
+        </p:txBody>
+      </p:sp>
+      <p:sp>
+        <p:nvSpPr>
+          <p:cNvPr id="4" name="TextBox 3"/>
+          <p:cNvSpPr txBox="1"/>
+          <p:nvPr/>
+        </p:nvSpPr>
+        <p:spPr>
+          <a:xfrm>
+            <a:off x="502920" y="6473952"/>
+            <a:ext cx="5486400" cy="320040"/>
+          </a:xfrm>
+          <a:prstGeom prst="rect">
+            <a:avLst/>
+          </a:prstGeom>
+          <a:noFill/>
+        </p:spPr>
+        <p:txBody>
+          <a:bodyPr wrap="square" anchor="t" lIns="0" rIns="0" tIns="0" bIns="0">
+            <a:spAutoFit/>
+          </a:bodyPr>
+          <a:lstStyle/>
+          <a:p>
+            <a:pPr algn="l">
+              <a:lnSpc>
+                <a:spcPct val="115000"/>
+              </a:lnSpc>
+            </a:pPr>
+            <a:r>
+              <a:rPr sz="1100" b="0" i="0">
+                <a:solidFill>
+                  <a:srgbClr val="5A5A5A"/>
+                </a:solidFill>
+                <a:latin typeface="맑은 고딕"/>
+              </a:rPr>
+              <a:t>3강 LWE · Part 5.1-5.2</a:t>
+            </a:r>
+          </a:p>
+        </p:txBody>
+      </p:sp>
+      <p:sp>
+        <p:nvSpPr>
+          <p:cNvPr id="5" name="TextBox 4"/>
+          <p:cNvSpPr txBox="1"/>
+          <p:nvPr/>
+        </p:nvSpPr>
+        <p:spPr>
+          <a:xfrm>
+            <a:off x="11002975" y="6473952"/>
+            <a:ext cx="822960" cy="320040"/>
+          </a:xfrm>
+          <a:prstGeom prst="rect">
+            <a:avLst/>
+          </a:prstGeom>
+          <a:noFill/>
+        </p:spPr>
+        <p:txBody>
+          <a:bodyPr wrap="square" anchor="t" lIns="0" rIns="0" tIns="0" bIns="0">
+            <a:spAutoFit/>
+          </a:bodyPr>
+          <a:lstStyle/>
+          <a:p>
+            <a:pPr algn="r">
+              <a:lnSpc>
+                <a:spcPct val="115000"/>
+              </a:lnSpc>
+            </a:pPr>
+            <a:r>
+              <a:rPr sz="1100" b="0" i="0">
+                <a:solidFill>
+                  <a:srgbClr val="5A5A5A"/>
+                </a:solidFill>
+                <a:latin typeface="맑은 고딕"/>
+              </a:rPr>
+              <a:t>27 / 33</a:t>
             </a:r>
           </a:p>
         </p:txBody>
@@ -9198,8 +11646,8 @@
         </p:nvSpPr>
         <p:spPr>
           <a:xfrm>
-            <a:off x="777240" y="5074920"/>
-            <a:ext cx="10607040" cy="1097280"/>
+            <a:off x="777240" y="4937760"/>
+            <a:ext cx="10607040" cy="685800"/>
           </a:xfrm>
           <a:prstGeom prst="rect">
             <a:avLst/>
@@ -9218,13 +11666,52 @@
               </a:lnSpc>
             </a:pPr>
             <a:r>
-              <a:rPr sz="1700" b="0" i="1">
+              <a:rPr sz="1550" b="0" i="1">
                 <a:solidFill>
                   <a:srgbClr val="5A5A5A"/>
                 </a:solidFill>
                 <a:latin typeface="맑은 고딕"/>
               </a:rPr>
               <a:t>핵심: A가 n×n 정사각행렬이어도 ss-DLWE 덕분에 유일성·안전성 논증이 그대로 성립 — 공개키를 “키가 큰” 행렬로 만들 필요가 없다.</a:t>
+            </a:r>
+          </a:p>
+        </p:txBody>
+      </p:sp>
+      <p:sp>
+        <p:nvSpPr>
+          <p:cNvPr id="9" name="TextBox 8"/>
+          <p:cNvSpPr txBox="1"/>
+          <p:nvPr/>
+        </p:nvSpPr>
+        <p:spPr>
+          <a:xfrm>
+            <a:off x="777240" y="5623560"/>
+            <a:ext cx="10607040" cy="411480"/>
+          </a:xfrm>
+          <a:prstGeom prst="rect">
+            <a:avLst/>
+          </a:prstGeom>
+          <a:noFill/>
+        </p:spPr>
+        <p:txBody>
+          <a:bodyPr wrap="square" anchor="t" lIns="0" rIns="0" tIns="0" bIns="0">
+            <a:spAutoFit/>
+          </a:bodyPr>
+          <a:lstStyle/>
+          <a:p>
+            <a:pPr algn="ctr">
+              <a:lnSpc>
+                <a:spcPct val="115000"/>
+              </a:lnSpc>
+            </a:pPr>
+            <a:r>
+              <a:rPr sz="1350" b="0" i="0">
+                <a:solidFill>
+                  <a:srgbClr val="5A5A5A"/>
+                </a:solidFill>
+                <a:latin typeface="맑은 고딕"/>
+              </a:rPr>
+              <a:t>대칭 mod: x mods q = x (x≤(q-1)/2), x-q (그 외)   /   Roundq(x): 0 (-q/4&lt;x mods q&lt;q/4), 1 (그 외)</a:t>
             </a:r>
           </a:p>
         </p:txBody>
@@ -9237,7 +11724,7 @@
 </p:sld>
 </file>
 
-<file path=ppt/slides/slide23.xml><?xml version="1.0" encoding="utf-8"?>
+<file path=ppt/slides/slide28.xml><?xml version="1.0" encoding="utf-8"?>
 <p:sld xmlns:a="http://schemas.openxmlformats.org/drawingml/2006/main" xmlns:p="http://schemas.openxmlformats.org/presentationml/2006/main" xmlns:r="http://schemas.openxmlformats.org/officeDocument/2006/relationships">
   <p:cSld>
     <p:bg>
@@ -9411,7 +11898,7 @@
                 </a:solidFill>
                 <a:latin typeface="맑은 고딕"/>
               </a:rPr>
-              <a:t>23 / 27</a:t>
+              <a:t>28 / 33</a:t>
             </a:r>
           </a:p>
         </p:txBody>
@@ -9659,7 +12146,7 @@
 </p:sld>
 </file>
 
-<file path=ppt/slides/slide24.xml><?xml version="1.0" encoding="utf-8"?>
+<file path=ppt/slides/slide29.xml><?xml version="1.0" encoding="utf-8"?>
 <p:sld xmlns:a="http://schemas.openxmlformats.org/drawingml/2006/main" xmlns:p="http://schemas.openxmlformats.org/presentationml/2006/main" xmlns:r="http://schemas.openxmlformats.org/officeDocument/2006/relationships">
   <p:cSld>
     <p:bg>
@@ -9833,7 +12320,7 @@
                 </a:solidFill>
                 <a:latin typeface="맑은 고딕"/>
               </a:rPr>
-              <a:t>24 / 27</a:t>
+              <a:t>29 / 33</a:t>
             </a:r>
           </a:p>
         </p:txBody>
@@ -10350,7 +12837,7 @@
 </p:sld>
 </file>
 
-<file path=ppt/slides/slide25.xml><?xml version="1.0" encoding="utf-8"?>
+<file path=ppt/slides/slide3.xml><?xml version="1.0" encoding="utf-8"?>
 <p:sld xmlns:a="http://schemas.openxmlformats.org/drawingml/2006/main" xmlns:p="http://schemas.openxmlformats.org/presentationml/2006/main" xmlns:r="http://schemas.openxmlformats.org/officeDocument/2006/relationships">
   <p:cSld>
     <p:bg>
@@ -10383,7 +12870,7 @@
             <a:avLst/>
           </a:prstGeom>
           <a:solidFill>
-            <a:srgbClr val="0E6E6A"/>
+            <a:srgbClr val="2C3E86"/>
           </a:solidFill>
           <a:ln>
             <a:noFill/>
@@ -10446,7 +12933,7 @@
                 </a:solidFill>
                 <a:latin typeface="맑은 고딕"/>
               </a:rPr>
-              <a:t>PKE 안전성 — IND-CPA</a:t>
+              <a:t>표기법 정리</a:t>
             </a:r>
           </a:p>
         </p:txBody>
@@ -10485,7 +12972,7 @@
                 </a:solidFill>
                 <a:latin typeface="맑은 고딕"/>
               </a:rPr>
-              <a:t>3강 LWE · Part 5.5</a:t>
+              <a:t>2강 SIS · 3강 LWE 공통</a:t>
             </a:r>
           </a:p>
         </p:txBody>
@@ -10524,7 +13011,7 @@
                 </a:solidFill>
                 <a:latin typeface="맑은 고딕"/>
               </a:rPr>
-              <a:t>25 / 27</a:t>
+              <a:t>3 / 33</a:t>
             </a:r>
           </a:p>
         </p:txBody>
@@ -10537,8 +13024,69 @@
         </p:nvSpPr>
         <p:spPr>
           <a:xfrm>
-            <a:off x="914400" y="1554480"/>
-            <a:ext cx="10058400" cy="1005840"/>
+            <a:off x="685800" y="1417320"/>
+            <a:ext cx="10789920" cy="1463040"/>
+          </a:xfrm>
+          <a:prstGeom prst="rect">
+            <a:avLst/>
+          </a:prstGeom>
+          <a:noFill/>
+        </p:spPr>
+        <p:txBody>
+          <a:bodyPr wrap="square" lIns="0" rIns="0" tIns="0" bIns="0">
+            <a:spAutoFit/>
+          </a:bodyPr>
+          <a:lstStyle/>
+          <a:p>
+            <a:pPr>
+              <a:lnSpc>
+                <a:spcPct val="125000"/>
+              </a:lnSpc>
+              <a:spcAft>
+                <a:spcPts val="1000"/>
+              </a:spcAft>
+            </a:pPr>
+            <a:r>
+              <a:rPr sz="1900">
+                <a:solidFill>
+                  <a:srgbClr val="222222"/>
+                </a:solidFill>
+                <a:latin typeface="맑은 고딕"/>
+              </a:rPr>
+              <a:t>—  ℤq = {0,1,…,q-1} (q는 소수), 모든 벡터는 열벡터</a:t>
+            </a:r>
+          </a:p>
+          <a:p>
+            <a:pPr>
+              <a:lnSpc>
+                <a:spcPct val="125000"/>
+              </a:lnSpc>
+              <a:spcAft>
+                <a:spcPts val="1000"/>
+              </a:spcAft>
+            </a:pPr>
+            <a:r>
+              <a:rPr sz="1900">
+                <a:solidFill>
+                  <a:srgbClr val="222222"/>
+                </a:solidFill>
+                <a:latin typeface="맑은 고딕"/>
+              </a:rPr>
+              <a:t>—  행렬-벡터 곱 Az: A의 i번째 행과 z의 내적 — (Az)ᵢ = Σⱼ Aᵢⱼzⱼ</a:t>
+            </a:r>
+          </a:p>
+        </p:txBody>
+      </p:sp>
+      <p:sp>
+        <p:nvSpPr>
+          <p:cNvPr id="7" name="TextBox 6"/>
+          <p:cNvSpPr txBox="1"/>
+          <p:nvPr/>
+        </p:nvSpPr>
+        <p:spPr>
+          <a:xfrm>
+            <a:off x="1097280" y="3108960"/>
+            <a:ext cx="8229600" cy="1463040"/>
           </a:xfrm>
           <a:prstGeom prst="rect">
             <a:avLst/>
@@ -10559,7 +13107,7 @@
                 </a:solidFill>
                 <a:latin typeface="Consolas"/>
               </a:rPr>
-              <a:t>[ c₁ ]   [ Aᵀ ]        [ z ]   [        0      ]</a:t>
+              <a:t>    [ 1  2 ]   [ 5 ]   [ 1(5)+2(6) ]   [ 17 ]</a:t>
             </a:r>
           </a:p>
           <a:p>
@@ -10571,87 +13119,46 @@
                 </a:solidFill>
                 <a:latin typeface="Consolas"/>
               </a:rPr>
-              <a:t>[ c₂ ] = [ bᵀ ] r  +  [ z' ] + [ ⌈q/2⌉·m ]</a:t>
-            </a:r>
-          </a:p>
-        </p:txBody>
-      </p:sp>
-      <p:sp>
-        <p:nvSpPr>
-          <p:cNvPr id="7" name="TextBox 6"/>
-          <p:cNvSpPr txBox="1"/>
-          <p:nvPr/>
-        </p:nvSpPr>
-        <p:spPr>
-          <a:xfrm>
-            <a:off x="685800" y="3017520"/>
-            <a:ext cx="10789920" cy="3291840"/>
-          </a:xfrm>
-          <a:prstGeom prst="rect">
-            <a:avLst/>
-          </a:prstGeom>
-          <a:noFill/>
-        </p:spPr>
-        <p:txBody>
-          <a:bodyPr wrap="square" lIns="0" rIns="0" tIns="0" bIns="0">
-            <a:spAutoFit/>
-          </a:bodyPr>
-          <a:lstStyle/>
-          <a:p>
-            <a:pPr>
-              <a:lnSpc>
-                <a:spcPct val="125000"/>
-              </a:lnSpc>
-              <a:spcAft>
-                <a:spcPts val="1400"/>
-              </a:spcAft>
-            </a:pPr>
-            <a:r>
-              <a:rPr sz="1850">
-                <a:solidFill>
-                  <a:srgbClr val="222222"/>
-                </a:solidFill>
-                <a:latin typeface="맑은 고딕"/>
-              </a:rPr>
-              <a:t>—  ss-DLWE 가정 하에 [Aᵀ;bᵀ]과 그 곱은 균등 랜덤과 구별 불가능</a:t>
-            </a:r>
-          </a:p>
-          <a:p>
-            <a:pPr>
-              <a:lnSpc>
-                <a:spcPct val="125000"/>
-              </a:lnSpc>
-              <a:spcAft>
-                <a:spcPts val="1400"/>
-              </a:spcAft>
-            </a:pPr>
-            <a:r>
-              <a:rPr sz="1850">
-                <a:solidFill>
-                  <a:srgbClr val="222222"/>
-                </a:solidFill>
-                <a:latin typeface="맑은 고딕"/>
-              </a:rPr>
-              <a:t>—  공격자 입장에서 c₂는 “균등 난수 + 평문”처럼 보여 평문 정보를 전혀 얻을 수 없음 (IND-CPA)</a:t>
-            </a:r>
-          </a:p>
-          <a:p>
-            <a:pPr>
-              <a:lnSpc>
-                <a:spcPct val="125000"/>
-              </a:lnSpc>
-              <a:spcAft>
-                <a:spcPts val="1400"/>
-              </a:spcAft>
-            </a:pPr>
-            <a:r>
-              <a:rPr sz="1850">
-                <a:solidFill>
-                  <a:srgbClr val="222222"/>
-                </a:solidFill>
-                <a:latin typeface="맑은 고딕"/>
-              </a:rPr>
-              <a:t>—  한계: (1) 비트 하나만 암호화 → 7강 Module-LWE(Kyber 원형)로 해결, (2) CPA까지만 안전 → Fujisaki-Okamoto 변환(Kyber KEM)으로 해결</a:t>
+              <a:t>A = [ 3  4 ] , [ 6 ] →  A·z  =  [ 3(5)+4(6) ] = [ 39 ]</a:t>
+            </a:r>
+          </a:p>
+        </p:txBody>
+      </p:sp>
+      <p:sp>
+        <p:nvSpPr>
+          <p:cNvPr id="8" name="TextBox 7"/>
+          <p:cNvSpPr txBox="1"/>
+          <p:nvPr/>
+        </p:nvSpPr>
+        <p:spPr>
+          <a:xfrm>
+            <a:off x="685800" y="4892040"/>
+            <a:ext cx="10789920" cy="1097280"/>
+          </a:xfrm>
+          <a:prstGeom prst="rect">
+            <a:avLst/>
+          </a:prstGeom>
+          <a:noFill/>
+        </p:spPr>
+        <p:txBody>
+          <a:bodyPr wrap="square" anchor="t" lIns="0" rIns="0" tIns="0" bIns="0">
+            <a:spAutoFit/>
+          </a:bodyPr>
+          <a:lstStyle/>
+          <a:p>
+            <a:pPr algn="l">
+              <a:lnSpc>
+                <a:spcPct val="115000"/>
+              </a:lnSpc>
+            </a:pPr>
+            <a:r>
+              <a:rPr sz="1800" b="0" i="1">
+                <a:solidFill>
+                  <a:srgbClr val="5A5A5A"/>
+                </a:solidFill>
+                <a:latin typeface="맑은 고딕"/>
+              </a:rPr>
+              <a:t>오늘 나오는 모든 정의는 “이 곱에 잡음이 섞여 있는가”, “우변이 0인가 아닌가”의 변주다.</a:t>
             </a:r>
           </a:p>
         </p:txBody>
@@ -10664,7 +13171,7 @@
 </p:sld>
 </file>
 
-<file path=ppt/slides/slide26.xml><?xml version="1.0" encoding="utf-8"?>
+<file path=ppt/slides/slide30.xml><?xml version="1.0" encoding="utf-8"?>
 <p:sld xmlns:a="http://schemas.openxmlformats.org/drawingml/2006/main" xmlns:p="http://schemas.openxmlformats.org/presentationml/2006/main" xmlns:r="http://schemas.openxmlformats.org/officeDocument/2006/relationships">
   <p:cSld>
     <p:bg>
@@ -10760,7 +13267,7 @@
                 </a:solidFill>
                 <a:latin typeface="맑은 고딕"/>
               </a:rPr>
-              <a:t>LWE 파트 정리 — SIS와의 평행 구조</a:t>
+              <a:t>PKE 복호화가 성공하는 이유 (일반 증명)</a:t>
             </a:r>
           </a:p>
         </p:txBody>
@@ -10799,7 +13306,7 @@
                 </a:solidFill>
                 <a:latin typeface="맑은 고딕"/>
               </a:rPr>
-              <a:t>3강 LWE</a:t>
+              <a:t>3강 LWE · Part 5.3</a:t>
             </a:r>
           </a:p>
         </p:txBody>
@@ -10838,7 +13345,717 @@
                 </a:solidFill>
                 <a:latin typeface="맑은 고딕"/>
               </a:rPr>
-              <a:t>26 / 27</a:t>
+              <a:t>30 / 33</a:t>
+            </a:r>
+          </a:p>
+        </p:txBody>
+      </p:sp>
+      <p:sp>
+        <p:nvSpPr>
+          <p:cNvPr id="6" name="TextBox 5"/>
+          <p:cNvSpPr txBox="1"/>
+          <p:nvPr/>
+        </p:nvSpPr>
+        <p:spPr>
+          <a:xfrm>
+            <a:off x="640080" y="1417320"/>
+            <a:ext cx="10972800" cy="1371600"/>
+          </a:xfrm>
+          <a:prstGeom prst="rect">
+            <a:avLst/>
+          </a:prstGeom>
+          <a:noFill/>
+        </p:spPr>
+        <p:txBody>
+          <a:bodyPr wrap="none">
+            <a:spAutoFit/>
+          </a:bodyPr>
+          <a:lstStyle/>
+          <a:p>
+            <a:pPr algn="l"/>
+            <a:r>
+              <a:rPr sz="1600">
+                <a:solidFill>
+                  <a:srgbClr val="222222"/>
+                </a:solidFill>
+                <a:latin typeface="Consolas"/>
+              </a:rPr>
+              <a:t>c₂ - sᵀc₁ = (bᵀr+z'+m⌈q/2⌉) - sᵀ(Aᵀr+z)</a:t>
+            </a:r>
+          </a:p>
+          <a:p>
+            <a:pPr algn="l"/>
+            <a:r>
+              <a:rPr sz="1600">
+                <a:solidFill>
+                  <a:srgbClr val="222222"/>
+                </a:solidFill>
+                <a:latin typeface="Consolas"/>
+              </a:rPr>
+              <a:t>         = (sᵀAᵀ+eᵀ)r+z'+m⌈q/2⌉ - sᵀ(Aᵀr+z)   [ b=As+e 대입, sᵀAᵀr 상쇄 ]</a:t>
+            </a:r>
+          </a:p>
+          <a:p>
+            <a:pPr algn="l"/>
+            <a:r>
+              <a:rPr sz="1600">
+                <a:solidFill>
+                  <a:srgbClr val="222222"/>
+                </a:solidFill>
+                <a:latin typeface="Consolas"/>
+              </a:rPr>
+              <a:t>         = eᵀr - sᵀz + z' + m⌈q/2⌉</a:t>
+            </a:r>
+          </a:p>
+        </p:txBody>
+      </p:sp>
+      <p:sp>
+        <p:nvSpPr>
+          <p:cNvPr id="7" name="TextBox 6"/>
+          <p:cNvSpPr txBox="1"/>
+          <p:nvPr/>
+        </p:nvSpPr>
+        <p:spPr>
+          <a:xfrm>
+            <a:off x="685800" y="3017520"/>
+            <a:ext cx="10789920" cy="1097280"/>
+          </a:xfrm>
+          <a:prstGeom prst="rect">
+            <a:avLst/>
+          </a:prstGeom>
+          <a:noFill/>
+        </p:spPr>
+        <p:txBody>
+          <a:bodyPr wrap="square" lIns="0" rIns="0" tIns="0" bIns="0">
+            <a:spAutoFit/>
+          </a:bodyPr>
+          <a:lstStyle/>
+          <a:p>
+            <a:pPr>
+              <a:lnSpc>
+                <a:spcPct val="125000"/>
+              </a:lnSpc>
+              <a:spcAft>
+                <a:spcPts val="1000"/>
+              </a:spcAft>
+            </a:pPr>
+            <a:r>
+              <a:rPr sz="1800">
+                <a:solidFill>
+                  <a:srgbClr val="222222"/>
+                </a:solidFill>
+                <a:latin typeface="맑은 고딕"/>
+              </a:rPr>
+              <a:t>—  따라서 복호화 성공(m=Roundq(c₂-sᵀc₁)) ⟺ |eᵀr-sᵀz+z' mods q| &lt; q/4</a:t>
+            </a:r>
+          </a:p>
+        </p:txBody>
+      </p:sp>
+      <p:sp>
+        <p:nvSpPr>
+          <p:cNvPr id="8" name="TextBox 7"/>
+          <p:cNvSpPr txBox="1"/>
+          <p:nvPr/>
+        </p:nvSpPr>
+        <p:spPr>
+          <a:xfrm>
+            <a:off x="548640" y="3977639"/>
+            <a:ext cx="11155680" cy="1371600"/>
+          </a:xfrm>
+          <a:prstGeom prst="rect">
+            <a:avLst/>
+          </a:prstGeom>
+          <a:noFill/>
+        </p:spPr>
+        <p:txBody>
+          <a:bodyPr wrap="none">
+            <a:spAutoFit/>
+          </a:bodyPr>
+          <a:lstStyle/>
+          <a:p>
+            <a:pPr algn="l"/>
+            <a:r>
+              <a:rPr sz="1450">
+                <a:solidFill>
+                  <a:srgbClr val="222222"/>
+                </a:solidFill>
+                <a:latin typeface="Consolas"/>
+              </a:rPr>
+              <a:t>B ≤ √(q/(4(2n+1))) 이면:</a:t>
+            </a:r>
+          </a:p>
+          <a:p>
+            <a:pPr algn="l"/>
+            <a:r>
+              <a:rPr sz="1450">
+                <a:solidFill>
+                  <a:srgbClr val="222222"/>
+                </a:solidFill>
+                <a:latin typeface="Consolas"/>
+              </a:rPr>
+              <a:t>|eᵀr-sᵀz+z'| ≤ nB²+nB² +B ≤ 2nq/(4(2n+1)) + √(q/(4(2n+1))) = nq/(2(2n+1)) + √(q/(4(2n+1))) &lt; q/4</a:t>
+            </a:r>
+          </a:p>
+        </p:txBody>
+      </p:sp>
+      <p:sp>
+        <p:nvSpPr>
+          <p:cNvPr id="9" name="TextBox 8"/>
+          <p:cNvSpPr txBox="1"/>
+          <p:nvPr/>
+        </p:nvSpPr>
+        <p:spPr>
+          <a:xfrm>
+            <a:off x="685800" y="5532120"/>
+            <a:ext cx="10789920" cy="731520"/>
+          </a:xfrm>
+          <a:prstGeom prst="rect">
+            <a:avLst/>
+          </a:prstGeom>
+          <a:noFill/>
+        </p:spPr>
+        <p:txBody>
+          <a:bodyPr wrap="square" lIns="0" rIns="0" tIns="0" bIns="0">
+            <a:spAutoFit/>
+          </a:bodyPr>
+          <a:lstStyle/>
+          <a:p>
+            <a:pPr>
+              <a:lnSpc>
+                <a:spcPct val="125000"/>
+              </a:lnSpc>
+              <a:spcAft>
+                <a:spcPts val="1000"/>
+              </a:spcAft>
+            </a:pPr>
+            <a:r>
+              <a:rPr sz="1550">
+                <a:solidFill>
+                  <a:srgbClr val="222222"/>
+                </a:solidFill>
+                <a:latin typeface="맑은 고딕"/>
+              </a:rPr>
+              <a:t>—  각 항을 좌표별로 |eᵢ|,|rᵢ|,|sᵢ|,|zᵢ|≤B 로 묶어 얻은 부등식 — 조건이 성립하면 복호화가 항상 성공</a:t>
+            </a:r>
+          </a:p>
+        </p:txBody>
+      </p:sp>
+    </p:spTree>
+  </p:cSld>
+  <p:clrMapOvr>
+    <a:masterClrMapping/>
+  </p:clrMapOvr>
+</p:sld>
+</file>
+
+<file path=ppt/slides/slide31.xml><?xml version="1.0" encoding="utf-8"?>
+<p:sld xmlns:a="http://schemas.openxmlformats.org/drawingml/2006/main" xmlns:p="http://schemas.openxmlformats.org/presentationml/2006/main" xmlns:r="http://schemas.openxmlformats.org/officeDocument/2006/relationships">
+  <p:cSld>
+    <p:bg>
+      <p:bgPr>
+        <a:solidFill>
+          <a:srgbClr val="FFFFFF"/>
+        </a:solidFill>
+        <a:effectLst/>
+      </p:bgPr>
+    </p:bg>
+    <p:spTree>
+      <p:nvGrpSpPr>
+        <p:cNvPr id="1" name=""/>
+        <p:cNvGrpSpPr/>
+        <p:nvPr/>
+      </p:nvGrpSpPr>
+      <p:grpSpPr/>
+      <p:sp>
+        <p:nvSpPr>
+          <p:cNvPr id="2" name="Rectangle 1"/>
+          <p:cNvSpPr/>
+          <p:nvPr/>
+        </p:nvSpPr>
+        <p:spPr>
+          <a:xfrm>
+            <a:off x="0" y="0"/>
+            <a:ext cx="12191695" cy="1051560"/>
+          </a:xfrm>
+          <a:prstGeom prst="rect">
+            <a:avLst/>
+          </a:prstGeom>
+          <a:solidFill>
+            <a:srgbClr val="0E6E6A"/>
+          </a:solidFill>
+          <a:ln>
+            <a:noFill/>
+          </a:ln>
+          <a:effectLst/>
+        </p:spPr>
+        <p:style>
+          <a:lnRef idx="1">
+            <a:schemeClr val="accent1"/>
+          </a:lnRef>
+          <a:fillRef idx="3">
+            <a:schemeClr val="accent1"/>
+          </a:fillRef>
+          <a:effectRef idx="2">
+            <a:schemeClr val="accent1"/>
+          </a:effectRef>
+          <a:fontRef idx="minor">
+            <a:schemeClr val="lt1"/>
+          </a:fontRef>
+        </p:style>
+        <p:txBody>
+          <a:bodyPr rtlCol="0" anchor="ctr"/>
+          <a:lstStyle/>
+          <a:p>
+            <a:pPr algn="ctr"/>
+          </a:p>
+        </p:txBody>
+      </p:sp>
+      <p:sp>
+        <p:nvSpPr>
+          <p:cNvPr id="3" name="TextBox 2"/>
+          <p:cNvSpPr txBox="1"/>
+          <p:nvPr/>
+        </p:nvSpPr>
+        <p:spPr>
+          <a:xfrm>
+            <a:off x="502920" y="118872"/>
+            <a:ext cx="11185855" cy="822960"/>
+          </a:xfrm>
+          <a:prstGeom prst="rect">
+            <a:avLst/>
+          </a:prstGeom>
+          <a:noFill/>
+        </p:spPr>
+        <p:txBody>
+          <a:bodyPr wrap="square" anchor="ctr" lIns="0" rIns="0" tIns="0" bIns="0">
+            <a:spAutoFit/>
+          </a:bodyPr>
+          <a:lstStyle/>
+          <a:p>
+            <a:pPr algn="l">
+              <a:lnSpc>
+                <a:spcPct val="115000"/>
+              </a:lnSpc>
+            </a:pPr>
+            <a:r>
+              <a:rPr sz="2700" b="1" i="0">
+                <a:solidFill>
+                  <a:srgbClr val="FFFFFF"/>
+                </a:solidFill>
+                <a:latin typeface="맑은 고딕"/>
+              </a:rPr>
+              <a:t>PKE 안전성 — IND-CPA</a:t>
+            </a:r>
+          </a:p>
+        </p:txBody>
+      </p:sp>
+      <p:sp>
+        <p:nvSpPr>
+          <p:cNvPr id="4" name="TextBox 3"/>
+          <p:cNvSpPr txBox="1"/>
+          <p:nvPr/>
+        </p:nvSpPr>
+        <p:spPr>
+          <a:xfrm>
+            <a:off x="502920" y="6473952"/>
+            <a:ext cx="5486400" cy="320040"/>
+          </a:xfrm>
+          <a:prstGeom prst="rect">
+            <a:avLst/>
+          </a:prstGeom>
+          <a:noFill/>
+        </p:spPr>
+        <p:txBody>
+          <a:bodyPr wrap="square" anchor="t" lIns="0" rIns="0" tIns="0" bIns="0">
+            <a:spAutoFit/>
+          </a:bodyPr>
+          <a:lstStyle/>
+          <a:p>
+            <a:pPr algn="l">
+              <a:lnSpc>
+                <a:spcPct val="115000"/>
+              </a:lnSpc>
+            </a:pPr>
+            <a:r>
+              <a:rPr sz="1100" b="0" i="0">
+                <a:solidFill>
+                  <a:srgbClr val="5A5A5A"/>
+                </a:solidFill>
+                <a:latin typeface="맑은 고딕"/>
+              </a:rPr>
+              <a:t>3강 LWE · Part 5.5</a:t>
+            </a:r>
+          </a:p>
+        </p:txBody>
+      </p:sp>
+      <p:sp>
+        <p:nvSpPr>
+          <p:cNvPr id="5" name="TextBox 4"/>
+          <p:cNvSpPr txBox="1"/>
+          <p:nvPr/>
+        </p:nvSpPr>
+        <p:spPr>
+          <a:xfrm>
+            <a:off x="11002975" y="6473952"/>
+            <a:ext cx="822960" cy="320040"/>
+          </a:xfrm>
+          <a:prstGeom prst="rect">
+            <a:avLst/>
+          </a:prstGeom>
+          <a:noFill/>
+        </p:spPr>
+        <p:txBody>
+          <a:bodyPr wrap="square" anchor="t" lIns="0" rIns="0" tIns="0" bIns="0">
+            <a:spAutoFit/>
+          </a:bodyPr>
+          <a:lstStyle/>
+          <a:p>
+            <a:pPr algn="r">
+              <a:lnSpc>
+                <a:spcPct val="115000"/>
+              </a:lnSpc>
+            </a:pPr>
+            <a:r>
+              <a:rPr sz="1100" b="0" i="0">
+                <a:solidFill>
+                  <a:srgbClr val="5A5A5A"/>
+                </a:solidFill>
+                <a:latin typeface="맑은 고딕"/>
+              </a:rPr>
+              <a:t>31 / 33</a:t>
+            </a:r>
+          </a:p>
+        </p:txBody>
+      </p:sp>
+      <p:sp>
+        <p:nvSpPr>
+          <p:cNvPr id="6" name="TextBox 5"/>
+          <p:cNvSpPr txBox="1"/>
+          <p:nvPr/>
+        </p:nvSpPr>
+        <p:spPr>
+          <a:xfrm>
+            <a:off x="914400" y="1554480"/>
+            <a:ext cx="10058400" cy="1005840"/>
+          </a:xfrm>
+          <a:prstGeom prst="rect">
+            <a:avLst/>
+          </a:prstGeom>
+          <a:noFill/>
+        </p:spPr>
+        <p:txBody>
+          <a:bodyPr wrap="none">
+            <a:spAutoFit/>
+          </a:bodyPr>
+          <a:lstStyle/>
+          <a:p>
+            <a:pPr algn="l"/>
+            <a:r>
+              <a:rPr sz="2000">
+                <a:solidFill>
+                  <a:srgbClr val="222222"/>
+                </a:solidFill>
+                <a:latin typeface="Consolas"/>
+              </a:rPr>
+              <a:t>[ c₁ ]   [ Aᵀ ]        [ z ]   [        0      ]</a:t>
+            </a:r>
+          </a:p>
+          <a:p>
+            <a:pPr algn="l"/>
+            <a:r>
+              <a:rPr sz="2000">
+                <a:solidFill>
+                  <a:srgbClr val="222222"/>
+                </a:solidFill>
+                <a:latin typeface="Consolas"/>
+              </a:rPr>
+              <a:t>[ c₂ ] = [ bᵀ ] r  +  [ z' ] + [ ⌈q/2⌉·m ]</a:t>
+            </a:r>
+          </a:p>
+        </p:txBody>
+      </p:sp>
+      <p:sp>
+        <p:nvSpPr>
+          <p:cNvPr id="7" name="TextBox 6"/>
+          <p:cNvSpPr txBox="1"/>
+          <p:nvPr/>
+        </p:nvSpPr>
+        <p:spPr>
+          <a:xfrm>
+            <a:off x="685800" y="3017520"/>
+            <a:ext cx="10789920" cy="3291840"/>
+          </a:xfrm>
+          <a:prstGeom prst="rect">
+            <a:avLst/>
+          </a:prstGeom>
+          <a:noFill/>
+        </p:spPr>
+        <p:txBody>
+          <a:bodyPr wrap="square" lIns="0" rIns="0" tIns="0" bIns="0">
+            <a:spAutoFit/>
+          </a:bodyPr>
+          <a:lstStyle/>
+          <a:p>
+            <a:pPr>
+              <a:lnSpc>
+                <a:spcPct val="125000"/>
+              </a:lnSpc>
+              <a:spcAft>
+                <a:spcPts val="1200"/>
+              </a:spcAft>
+            </a:pPr>
+            <a:r>
+              <a:rPr sz="1750">
+                <a:solidFill>
+                  <a:srgbClr val="222222"/>
+                </a:solidFill>
+                <a:latin typeface="맑은 고딕"/>
+              </a:rPr>
+              <a:t>—  ss-DLWE(n,n,q,B) 가정 하에 [Aᵀ;bᵀ](=공개키 (A,b) 자체)는 균등 랜덤 행렬과 구별 불가능</a:t>
+            </a:r>
+          </a:p>
+          <a:p>
+            <a:pPr>
+              <a:lnSpc>
+                <a:spcPct val="125000"/>
+              </a:lnSpc>
+              <a:spcAft>
+                <a:spcPts val="1200"/>
+              </a:spcAft>
+            </a:pPr>
+            <a:r>
+              <a:rPr sz="1750">
+                <a:solidFill>
+                  <a:srgbClr val="222222"/>
+                </a:solidFill>
+                <a:latin typeface="맑은 고딕"/>
+              </a:rPr>
+              <a:t>—  다시 ss-DLWE(n+1,n,q,B) 가정으로 [Aᵀ;bᵀ]r+[z;z'] 역시 균등 랜덤 벡터와 구별 불가능</a:t>
+            </a:r>
+          </a:p>
+          <a:p>
+            <a:pPr>
+              <a:lnSpc>
+                <a:spcPct val="125000"/>
+              </a:lnSpc>
+              <a:spcAft>
+                <a:spcPts val="1200"/>
+              </a:spcAft>
+            </a:pPr>
+            <a:r>
+              <a:rPr sz="1750">
+                <a:solidFill>
+                  <a:srgbClr val="222222"/>
+                </a:solidFill>
+                <a:latin typeface="맑은 고딕"/>
+              </a:rPr>
+              <a:t>—  공격자 입장에서 c₂는 “균등 난수 + 평문”처럼 보여 평문 정보를 전혀 얻을 수 없음 (IND-CPA)</a:t>
+            </a:r>
+          </a:p>
+          <a:p>
+            <a:pPr>
+              <a:lnSpc>
+                <a:spcPct val="125000"/>
+              </a:lnSpc>
+              <a:spcAft>
+                <a:spcPts val="1200"/>
+              </a:spcAft>
+            </a:pPr>
+            <a:r>
+              <a:rPr sz="1750">
+                <a:solidFill>
+                  <a:srgbClr val="222222"/>
+                </a:solidFill>
+                <a:latin typeface="맑은 고딕"/>
+              </a:rPr>
+              <a:t>—  한계: (1) 비트 하나만 암호화 → 7강 Module-LWE(Kyber 원형)로 해결, (2) CPA까지만 안전 → Fujisaki-Okamoto 변환(Kyber KEM)으로 해결</a:t>
+            </a:r>
+          </a:p>
+        </p:txBody>
+      </p:sp>
+    </p:spTree>
+  </p:cSld>
+  <p:clrMapOvr>
+    <a:masterClrMapping/>
+  </p:clrMapOvr>
+</p:sld>
+</file>
+
+<file path=ppt/slides/slide32.xml><?xml version="1.0" encoding="utf-8"?>
+<p:sld xmlns:a="http://schemas.openxmlformats.org/drawingml/2006/main" xmlns:p="http://schemas.openxmlformats.org/presentationml/2006/main" xmlns:r="http://schemas.openxmlformats.org/officeDocument/2006/relationships">
+  <p:cSld>
+    <p:bg>
+      <p:bgPr>
+        <a:solidFill>
+          <a:srgbClr val="FFFFFF"/>
+        </a:solidFill>
+        <a:effectLst/>
+      </p:bgPr>
+    </p:bg>
+    <p:spTree>
+      <p:nvGrpSpPr>
+        <p:cNvPr id="1" name=""/>
+        <p:cNvGrpSpPr/>
+        <p:nvPr/>
+      </p:nvGrpSpPr>
+      <p:grpSpPr/>
+      <p:sp>
+        <p:nvSpPr>
+          <p:cNvPr id="2" name="Rectangle 1"/>
+          <p:cNvSpPr/>
+          <p:nvPr/>
+        </p:nvSpPr>
+        <p:spPr>
+          <a:xfrm>
+            <a:off x="0" y="0"/>
+            <a:ext cx="12191695" cy="1051560"/>
+          </a:xfrm>
+          <a:prstGeom prst="rect">
+            <a:avLst/>
+          </a:prstGeom>
+          <a:solidFill>
+            <a:srgbClr val="0E6E6A"/>
+          </a:solidFill>
+          <a:ln>
+            <a:noFill/>
+          </a:ln>
+          <a:effectLst/>
+        </p:spPr>
+        <p:style>
+          <a:lnRef idx="1">
+            <a:schemeClr val="accent1"/>
+          </a:lnRef>
+          <a:fillRef idx="3">
+            <a:schemeClr val="accent1"/>
+          </a:fillRef>
+          <a:effectRef idx="2">
+            <a:schemeClr val="accent1"/>
+          </a:effectRef>
+          <a:fontRef idx="minor">
+            <a:schemeClr val="lt1"/>
+          </a:fontRef>
+        </p:style>
+        <p:txBody>
+          <a:bodyPr rtlCol="0" anchor="ctr"/>
+          <a:lstStyle/>
+          <a:p>
+            <a:pPr algn="ctr"/>
+          </a:p>
+        </p:txBody>
+      </p:sp>
+      <p:sp>
+        <p:nvSpPr>
+          <p:cNvPr id="3" name="TextBox 2"/>
+          <p:cNvSpPr txBox="1"/>
+          <p:nvPr/>
+        </p:nvSpPr>
+        <p:spPr>
+          <a:xfrm>
+            <a:off x="502920" y="118872"/>
+            <a:ext cx="11185855" cy="822960"/>
+          </a:xfrm>
+          <a:prstGeom prst="rect">
+            <a:avLst/>
+          </a:prstGeom>
+          <a:noFill/>
+        </p:spPr>
+        <p:txBody>
+          <a:bodyPr wrap="square" anchor="ctr" lIns="0" rIns="0" tIns="0" bIns="0">
+            <a:spAutoFit/>
+          </a:bodyPr>
+          <a:lstStyle/>
+          <a:p>
+            <a:pPr algn="l">
+              <a:lnSpc>
+                <a:spcPct val="115000"/>
+              </a:lnSpc>
+            </a:pPr>
+            <a:r>
+              <a:rPr sz="2700" b="1" i="0">
+                <a:solidFill>
+                  <a:srgbClr val="FFFFFF"/>
+                </a:solidFill>
+                <a:latin typeface="맑은 고딕"/>
+              </a:rPr>
+              <a:t>LWE 파트 정리 — SIS와의 평행 구조</a:t>
+            </a:r>
+          </a:p>
+        </p:txBody>
+      </p:sp>
+      <p:sp>
+        <p:nvSpPr>
+          <p:cNvPr id="4" name="TextBox 3"/>
+          <p:cNvSpPr txBox="1"/>
+          <p:nvPr/>
+        </p:nvSpPr>
+        <p:spPr>
+          <a:xfrm>
+            <a:off x="502920" y="6473952"/>
+            <a:ext cx="5486400" cy="320040"/>
+          </a:xfrm>
+          <a:prstGeom prst="rect">
+            <a:avLst/>
+          </a:prstGeom>
+          <a:noFill/>
+        </p:spPr>
+        <p:txBody>
+          <a:bodyPr wrap="square" anchor="t" lIns="0" rIns="0" tIns="0" bIns="0">
+            <a:spAutoFit/>
+          </a:bodyPr>
+          <a:lstStyle/>
+          <a:p>
+            <a:pPr algn="l">
+              <a:lnSpc>
+                <a:spcPct val="115000"/>
+              </a:lnSpc>
+            </a:pPr>
+            <a:r>
+              <a:rPr sz="1100" b="0" i="0">
+                <a:solidFill>
+                  <a:srgbClr val="5A5A5A"/>
+                </a:solidFill>
+                <a:latin typeface="맑은 고딕"/>
+              </a:rPr>
+              <a:t>3강 LWE</a:t>
+            </a:r>
+          </a:p>
+        </p:txBody>
+      </p:sp>
+      <p:sp>
+        <p:nvSpPr>
+          <p:cNvPr id="5" name="TextBox 4"/>
+          <p:cNvSpPr txBox="1"/>
+          <p:nvPr/>
+        </p:nvSpPr>
+        <p:spPr>
+          <a:xfrm>
+            <a:off x="11002975" y="6473952"/>
+            <a:ext cx="822960" cy="320040"/>
+          </a:xfrm>
+          <a:prstGeom prst="rect">
+            <a:avLst/>
+          </a:prstGeom>
+          <a:noFill/>
+        </p:spPr>
+        <p:txBody>
+          <a:bodyPr wrap="square" anchor="t" lIns="0" rIns="0" tIns="0" bIns="0">
+            <a:spAutoFit/>
+          </a:bodyPr>
+          <a:lstStyle/>
+          <a:p>
+            <a:pPr algn="r">
+              <a:lnSpc>
+                <a:spcPct val="115000"/>
+              </a:lnSpc>
+            </a:pPr>
+            <a:r>
+              <a:rPr sz="1100" b="0" i="0">
+                <a:solidFill>
+                  <a:srgbClr val="5A5A5A"/>
+                </a:solidFill>
+                <a:latin typeface="맑은 고딕"/>
+              </a:rPr>
+              <a:t>32 / 33</a:t>
             </a:r>
           </a:p>
         </p:txBody>
@@ -11201,7 +14418,7 @@
 </p:sld>
 </file>
 
-<file path=ppt/slides/slide27.xml><?xml version="1.0" encoding="utf-8"?>
+<file path=ppt/slides/slide33.xml><?xml version="1.0" encoding="utf-8"?>
 <p:sld xmlns:a="http://schemas.openxmlformats.org/drawingml/2006/main" xmlns:p="http://schemas.openxmlformats.org/presentationml/2006/main" xmlns:r="http://schemas.openxmlformats.org/officeDocument/2006/relationships">
   <p:cSld>
     <p:bg>
@@ -11398,340 +14615,6 @@
                 <a:latin typeface="맑은 고딕"/>
               </a:rPr>
               <a:t>Q &amp; A</a:t>
-            </a:r>
-          </a:p>
-        </p:txBody>
-      </p:sp>
-    </p:spTree>
-  </p:cSld>
-  <p:clrMapOvr>
-    <a:masterClrMapping/>
-  </p:clrMapOvr>
-</p:sld>
-</file>
-
-<file path=ppt/slides/slide3.xml><?xml version="1.0" encoding="utf-8"?>
-<p:sld xmlns:a="http://schemas.openxmlformats.org/drawingml/2006/main" xmlns:p="http://schemas.openxmlformats.org/presentationml/2006/main" xmlns:r="http://schemas.openxmlformats.org/officeDocument/2006/relationships">
-  <p:cSld>
-    <p:bg>
-      <p:bgPr>
-        <a:solidFill>
-          <a:srgbClr val="FFFFFF"/>
-        </a:solidFill>
-        <a:effectLst/>
-      </p:bgPr>
-    </p:bg>
-    <p:spTree>
-      <p:nvGrpSpPr>
-        <p:cNvPr id="1" name=""/>
-        <p:cNvGrpSpPr/>
-        <p:nvPr/>
-      </p:nvGrpSpPr>
-      <p:grpSpPr/>
-      <p:sp>
-        <p:nvSpPr>
-          <p:cNvPr id="2" name="Rectangle 1"/>
-          <p:cNvSpPr/>
-          <p:nvPr/>
-        </p:nvSpPr>
-        <p:spPr>
-          <a:xfrm>
-            <a:off x="0" y="0"/>
-            <a:ext cx="12191695" cy="1051560"/>
-          </a:xfrm>
-          <a:prstGeom prst="rect">
-            <a:avLst/>
-          </a:prstGeom>
-          <a:solidFill>
-            <a:srgbClr val="2C3E86"/>
-          </a:solidFill>
-          <a:ln>
-            <a:noFill/>
-          </a:ln>
-          <a:effectLst/>
-        </p:spPr>
-        <p:style>
-          <a:lnRef idx="1">
-            <a:schemeClr val="accent1"/>
-          </a:lnRef>
-          <a:fillRef idx="3">
-            <a:schemeClr val="accent1"/>
-          </a:fillRef>
-          <a:effectRef idx="2">
-            <a:schemeClr val="accent1"/>
-          </a:effectRef>
-          <a:fontRef idx="minor">
-            <a:schemeClr val="lt1"/>
-          </a:fontRef>
-        </p:style>
-        <p:txBody>
-          <a:bodyPr rtlCol="0" anchor="ctr"/>
-          <a:lstStyle/>
-          <a:p>
-            <a:pPr algn="ctr"/>
-          </a:p>
-        </p:txBody>
-      </p:sp>
-      <p:sp>
-        <p:nvSpPr>
-          <p:cNvPr id="3" name="TextBox 2"/>
-          <p:cNvSpPr txBox="1"/>
-          <p:nvPr/>
-        </p:nvSpPr>
-        <p:spPr>
-          <a:xfrm>
-            <a:off x="502920" y="118872"/>
-            <a:ext cx="11185855" cy="822960"/>
-          </a:xfrm>
-          <a:prstGeom prst="rect">
-            <a:avLst/>
-          </a:prstGeom>
-          <a:noFill/>
-        </p:spPr>
-        <p:txBody>
-          <a:bodyPr wrap="square" anchor="ctr" lIns="0" rIns="0" tIns="0" bIns="0">
-            <a:spAutoFit/>
-          </a:bodyPr>
-          <a:lstStyle/>
-          <a:p>
-            <a:pPr algn="l">
-              <a:lnSpc>
-                <a:spcPct val="115000"/>
-              </a:lnSpc>
-            </a:pPr>
-            <a:r>
-              <a:rPr sz="2700" b="1" i="0">
-                <a:solidFill>
-                  <a:srgbClr val="FFFFFF"/>
-                </a:solidFill>
-                <a:latin typeface="맑은 고딕"/>
-              </a:rPr>
-              <a:t>표기법 정리</a:t>
-            </a:r>
-          </a:p>
-        </p:txBody>
-      </p:sp>
-      <p:sp>
-        <p:nvSpPr>
-          <p:cNvPr id="4" name="TextBox 3"/>
-          <p:cNvSpPr txBox="1"/>
-          <p:nvPr/>
-        </p:nvSpPr>
-        <p:spPr>
-          <a:xfrm>
-            <a:off x="502920" y="6473952"/>
-            <a:ext cx="5486400" cy="320040"/>
-          </a:xfrm>
-          <a:prstGeom prst="rect">
-            <a:avLst/>
-          </a:prstGeom>
-          <a:noFill/>
-        </p:spPr>
-        <p:txBody>
-          <a:bodyPr wrap="square" anchor="t" lIns="0" rIns="0" tIns="0" bIns="0">
-            <a:spAutoFit/>
-          </a:bodyPr>
-          <a:lstStyle/>
-          <a:p>
-            <a:pPr algn="l">
-              <a:lnSpc>
-                <a:spcPct val="115000"/>
-              </a:lnSpc>
-            </a:pPr>
-            <a:r>
-              <a:rPr sz="1100" b="0" i="0">
-                <a:solidFill>
-                  <a:srgbClr val="5A5A5A"/>
-                </a:solidFill>
-                <a:latin typeface="맑은 고딕"/>
-              </a:rPr>
-              <a:t>2강 SIS · 3강 LWE 공통</a:t>
-            </a:r>
-          </a:p>
-        </p:txBody>
-      </p:sp>
-      <p:sp>
-        <p:nvSpPr>
-          <p:cNvPr id="5" name="TextBox 4"/>
-          <p:cNvSpPr txBox="1"/>
-          <p:nvPr/>
-        </p:nvSpPr>
-        <p:spPr>
-          <a:xfrm>
-            <a:off x="11002975" y="6473952"/>
-            <a:ext cx="822960" cy="320040"/>
-          </a:xfrm>
-          <a:prstGeom prst="rect">
-            <a:avLst/>
-          </a:prstGeom>
-          <a:noFill/>
-        </p:spPr>
-        <p:txBody>
-          <a:bodyPr wrap="square" anchor="t" lIns="0" rIns="0" tIns="0" bIns="0">
-            <a:spAutoFit/>
-          </a:bodyPr>
-          <a:lstStyle/>
-          <a:p>
-            <a:pPr algn="r">
-              <a:lnSpc>
-                <a:spcPct val="115000"/>
-              </a:lnSpc>
-            </a:pPr>
-            <a:r>
-              <a:rPr sz="1100" b="0" i="0">
-                <a:solidFill>
-                  <a:srgbClr val="5A5A5A"/>
-                </a:solidFill>
-                <a:latin typeface="맑은 고딕"/>
-              </a:rPr>
-              <a:t>3 / 27</a:t>
-            </a:r>
-          </a:p>
-        </p:txBody>
-      </p:sp>
-      <p:sp>
-        <p:nvSpPr>
-          <p:cNvPr id="6" name="TextBox 5"/>
-          <p:cNvSpPr txBox="1"/>
-          <p:nvPr/>
-        </p:nvSpPr>
-        <p:spPr>
-          <a:xfrm>
-            <a:off x="685800" y="1417320"/>
-            <a:ext cx="10789920" cy="1463040"/>
-          </a:xfrm>
-          <a:prstGeom prst="rect">
-            <a:avLst/>
-          </a:prstGeom>
-          <a:noFill/>
-        </p:spPr>
-        <p:txBody>
-          <a:bodyPr wrap="square" lIns="0" rIns="0" tIns="0" bIns="0">
-            <a:spAutoFit/>
-          </a:bodyPr>
-          <a:lstStyle/>
-          <a:p>
-            <a:pPr>
-              <a:lnSpc>
-                <a:spcPct val="125000"/>
-              </a:lnSpc>
-              <a:spcAft>
-                <a:spcPts val="1000"/>
-              </a:spcAft>
-            </a:pPr>
-            <a:r>
-              <a:rPr sz="1900">
-                <a:solidFill>
-                  <a:srgbClr val="222222"/>
-                </a:solidFill>
-                <a:latin typeface="맑은 고딕"/>
-              </a:rPr>
-              <a:t>—  ℤq = {0,1,…,q-1} (q는 소수), 모든 벡터는 열벡터</a:t>
-            </a:r>
-          </a:p>
-          <a:p>
-            <a:pPr>
-              <a:lnSpc>
-                <a:spcPct val="125000"/>
-              </a:lnSpc>
-              <a:spcAft>
-                <a:spcPts val="1000"/>
-              </a:spcAft>
-            </a:pPr>
-            <a:r>
-              <a:rPr sz="1900">
-                <a:solidFill>
-                  <a:srgbClr val="222222"/>
-                </a:solidFill>
-                <a:latin typeface="맑은 고딕"/>
-              </a:rPr>
-              <a:t>—  행렬-벡터 곱 Az: A의 i번째 행과 z의 내적 — (Az)ᵢ = Σⱼ Aᵢⱼzⱼ</a:t>
-            </a:r>
-          </a:p>
-        </p:txBody>
-      </p:sp>
-      <p:sp>
-        <p:nvSpPr>
-          <p:cNvPr id="7" name="TextBox 6"/>
-          <p:cNvSpPr txBox="1"/>
-          <p:nvPr/>
-        </p:nvSpPr>
-        <p:spPr>
-          <a:xfrm>
-            <a:off x="1097280" y="3108960"/>
-            <a:ext cx="8229600" cy="1463040"/>
-          </a:xfrm>
-          <a:prstGeom prst="rect">
-            <a:avLst/>
-          </a:prstGeom>
-          <a:noFill/>
-        </p:spPr>
-        <p:txBody>
-          <a:bodyPr wrap="none">
-            <a:spAutoFit/>
-          </a:bodyPr>
-          <a:lstStyle/>
-          <a:p>
-            <a:pPr algn="l"/>
-            <a:r>
-              <a:rPr sz="2000">
-                <a:solidFill>
-                  <a:srgbClr val="222222"/>
-                </a:solidFill>
-                <a:latin typeface="Consolas"/>
-              </a:rPr>
-              <a:t>    [ 1  2 ]   [ 5 ]   [ 1(5)+2(6) ]   [ 17 ]</a:t>
-            </a:r>
-          </a:p>
-          <a:p>
-            <a:pPr algn="l"/>
-            <a:r>
-              <a:rPr sz="2000">
-                <a:solidFill>
-                  <a:srgbClr val="222222"/>
-                </a:solidFill>
-                <a:latin typeface="Consolas"/>
-              </a:rPr>
-              <a:t>A = [ 3  4 ] , [ 6 ] →  A·z  =  [ 3(5)+4(6) ] = [ 39 ]</a:t>
-            </a:r>
-          </a:p>
-        </p:txBody>
-      </p:sp>
-      <p:sp>
-        <p:nvSpPr>
-          <p:cNvPr id="8" name="TextBox 7"/>
-          <p:cNvSpPr txBox="1"/>
-          <p:nvPr/>
-        </p:nvSpPr>
-        <p:spPr>
-          <a:xfrm>
-            <a:off x="685800" y="4892040"/>
-            <a:ext cx="10789920" cy="1097280"/>
-          </a:xfrm>
-          <a:prstGeom prst="rect">
-            <a:avLst/>
-          </a:prstGeom>
-          <a:noFill/>
-        </p:spPr>
-        <p:txBody>
-          <a:bodyPr wrap="square" anchor="t" lIns="0" rIns="0" tIns="0" bIns="0">
-            <a:spAutoFit/>
-          </a:bodyPr>
-          <a:lstStyle/>
-          <a:p>
-            <a:pPr algn="l">
-              <a:lnSpc>
-                <a:spcPct val="115000"/>
-              </a:lnSpc>
-            </a:pPr>
-            <a:r>
-              <a:rPr sz="1800" b="0" i="1">
-                <a:solidFill>
-                  <a:srgbClr val="5A5A5A"/>
-                </a:solidFill>
-                <a:latin typeface="맑은 고딕"/>
-              </a:rPr>
-              <a:t>오늘 나오는 모든 정의는 “이 곱에 잡음이 섞여 있는가”, “우변이 0인가 아닌가”의 변주다.</a:t>
             </a:r>
           </a:p>
         </p:txBody>
@@ -11918,7 +14801,7 @@
                 </a:solidFill>
                 <a:latin typeface="맑은 고딕"/>
               </a:rPr>
-              <a:t>4 / 27</a:t>
+              <a:t>4 / 33</a:t>
             </a:r>
           </a:p>
         </p:txBody>
@@ -12584,7 +15467,7 @@
                 </a:solidFill>
                 <a:latin typeface="맑은 고딕"/>
               </a:rPr>
-              <a:t>5 / 27</a:t>
+              <a:t>5 / 33</a:t>
             </a:r>
           </a:p>
         </p:txBody>
@@ -13047,7 +15930,7 @@
                 </a:solidFill>
                 <a:latin typeface="맑은 고딕"/>
               </a:rPr>
-              <a:t>6 / 27</a:t>
+              <a:t>6 / 33</a:t>
             </a:r>
           </a:p>
         </p:txBody>
@@ -13333,7 +16216,7 @@
                 </a:solidFill>
                 <a:latin typeface="맑은 고딕"/>
               </a:rPr>
-              <a:t>7 / 27</a:t>
+              <a:t>7 / 33</a:t>
             </a:r>
           </a:p>
         </p:txBody>
@@ -13756,7 +16639,7 @@
                 </a:solidFill>
                 <a:latin typeface="맑은 고딕"/>
               </a:rPr>
-              <a:t>8 / 27</a:t>
+              <a:t>8 / 33</a:t>
             </a:r>
           </a:p>
         </p:txBody>
@@ -14047,7 +16930,7 @@
                 </a:solidFill>
                 <a:latin typeface="맑은 고딕"/>
               </a:rPr>
-              <a:t>9 / 27</a:t>
+              <a:t>9 / 33</a:t>
             </a:r>
           </a:p>
         </p:txBody>

--- a/presentation/2강3강_발표자료_초안.pptx
+++ b/presentation/2강3강_발표자료_초안.pptx
@@ -4245,16 +4245,16 @@
         </p:nvSpPr>
         <p:spPr>
           <a:xfrm>
-            <a:off x="4206240" y="2404872"/>
-            <a:ext cx="2377440" cy="274320"/>
-          </a:xfrm>
-          <a:prstGeom prst="rect">
-            <a:avLst/>
-          </a:prstGeom>
-          <a:noFill/>
-        </p:spPr>
-        <p:txBody>
-          <a:bodyPr wrap="square" anchor="t" lIns="0" rIns="0" tIns="0" bIns="0">
+            <a:off x="3886200" y="2404872"/>
+            <a:ext cx="3017520" cy="274320"/>
+          </a:xfrm>
+          <a:prstGeom prst="rect">
+            <a:avLst/>
+          </a:prstGeom>
+          <a:noFill/>
+        </p:spPr>
+        <p:txBody>
+          <a:bodyPr wrap="none" anchor="t" lIns="0" rIns="0" tIns="0" bIns="0">
             <a:spAutoFit/>
           </a:bodyPr>
           <a:lstStyle/>
@@ -4339,16 +4339,16 @@
         </p:nvSpPr>
         <p:spPr>
           <a:xfrm>
-            <a:off x="6583679" y="2404872"/>
-            <a:ext cx="566928" cy="274320"/>
-          </a:xfrm>
-          <a:prstGeom prst="rect">
-            <a:avLst/>
-          </a:prstGeom>
-          <a:noFill/>
-        </p:spPr>
-        <p:txBody>
-          <a:bodyPr wrap="square" anchor="t" lIns="0" rIns="0" tIns="0" bIns="0">
+            <a:off x="6263640" y="2404872"/>
+            <a:ext cx="1207007" cy="274320"/>
+          </a:xfrm>
+          <a:prstGeom prst="rect">
+            <a:avLst/>
+          </a:prstGeom>
+          <a:noFill/>
+        </p:spPr>
+        <p:txBody>
+          <a:bodyPr wrap="none" anchor="t" lIns="0" rIns="0" tIns="0" bIns="0">
             <a:spAutoFit/>
           </a:bodyPr>
           <a:lstStyle/>
@@ -4825,16 +4825,16 @@
         </p:nvSpPr>
         <p:spPr>
           <a:xfrm>
-            <a:off x="3327044" y="2244851"/>
-            <a:ext cx="1247241" cy="274320"/>
-          </a:xfrm>
-          <a:prstGeom prst="rect">
-            <a:avLst/>
-          </a:prstGeom>
-          <a:noFill/>
-        </p:spPr>
-        <p:txBody>
-          <a:bodyPr wrap="square" anchor="t" lIns="0" rIns="0" tIns="0" bIns="0">
+            <a:off x="3007004" y="2244851"/>
+            <a:ext cx="1887321" cy="274320"/>
+          </a:xfrm>
+          <a:prstGeom prst="rect">
+            <a:avLst/>
+          </a:prstGeom>
+          <a:noFill/>
+        </p:spPr>
+        <p:txBody>
+          <a:bodyPr wrap="none" anchor="t" lIns="0" rIns="0" tIns="0" bIns="0">
             <a:spAutoFit/>
           </a:bodyPr>
           <a:lstStyle/>
@@ -4958,16 +4958,16 @@
         </p:nvSpPr>
         <p:spPr>
           <a:xfrm>
-            <a:off x="5479542" y="2244851"/>
-            <a:ext cx="453542" cy="274320"/>
-          </a:xfrm>
-          <a:prstGeom prst="rect">
-            <a:avLst/>
-          </a:prstGeom>
-          <a:noFill/>
-        </p:spPr>
-        <p:txBody>
-          <a:bodyPr wrap="square" anchor="t" lIns="0" rIns="0" tIns="0" bIns="0">
+            <a:off x="5159502" y="2244851"/>
+            <a:ext cx="1093622" cy="274320"/>
+          </a:xfrm>
+          <a:prstGeom prst="rect">
+            <a:avLst/>
+          </a:prstGeom>
+          <a:noFill/>
+        </p:spPr>
+        <p:txBody>
+          <a:bodyPr wrap="none" anchor="t" lIns="0" rIns="0" tIns="0" bIns="0">
             <a:spAutoFit/>
           </a:bodyPr>
           <a:lstStyle/>
@@ -5091,16 +5091,16 @@
         </p:nvSpPr>
         <p:spPr>
           <a:xfrm>
-            <a:off x="6838340" y="2244851"/>
-            <a:ext cx="453542" cy="274320"/>
-          </a:xfrm>
-          <a:prstGeom prst="rect">
-            <a:avLst/>
-          </a:prstGeom>
-          <a:noFill/>
-        </p:spPr>
-        <p:txBody>
-          <a:bodyPr wrap="square" anchor="t" lIns="0" rIns="0" tIns="0" bIns="0">
+            <a:off x="6518300" y="2244851"/>
+            <a:ext cx="1093622" cy="274320"/>
+          </a:xfrm>
+          <a:prstGeom prst="rect">
+            <a:avLst/>
+          </a:prstGeom>
+          <a:noFill/>
+        </p:spPr>
+        <p:txBody>
+          <a:bodyPr wrap="none" anchor="t" lIns="0" rIns="0" tIns="0" bIns="0">
             <a:spAutoFit/>
           </a:bodyPr>
           <a:lstStyle/>
@@ -6508,16 +6508,16 @@
         </p:nvSpPr>
         <p:spPr>
           <a:xfrm>
-            <a:off x="2732684" y="2884932"/>
-            <a:ext cx="1077163" cy="274320"/>
-          </a:xfrm>
-          <a:prstGeom prst="rect">
-            <a:avLst/>
-          </a:prstGeom>
-          <a:noFill/>
-        </p:spPr>
-        <p:txBody>
-          <a:bodyPr wrap="square" anchor="t" lIns="0" rIns="0" tIns="0" bIns="0">
+            <a:off x="2412644" y="2884932"/>
+            <a:ext cx="1717243" cy="274320"/>
+          </a:xfrm>
+          <a:prstGeom prst="rect">
+            <a:avLst/>
+          </a:prstGeom>
+          <a:noFill/>
+        </p:spPr>
+        <p:txBody>
+          <a:bodyPr wrap="none" anchor="t" lIns="0" rIns="0" tIns="0" bIns="0">
             <a:spAutoFit/>
           </a:bodyPr>
           <a:lstStyle/>
@@ -6641,16 +6641,16 @@
         </p:nvSpPr>
         <p:spPr>
           <a:xfrm>
-            <a:off x="4715103" y="2884932"/>
-            <a:ext cx="453542" cy="274320"/>
-          </a:xfrm>
-          <a:prstGeom prst="rect">
-            <a:avLst/>
-          </a:prstGeom>
-          <a:noFill/>
-        </p:spPr>
-        <p:txBody>
-          <a:bodyPr wrap="square" anchor="t" lIns="0" rIns="0" tIns="0" bIns="0">
+            <a:off x="4395063" y="2884932"/>
+            <a:ext cx="1093622" cy="274320"/>
+          </a:xfrm>
+          <a:prstGeom prst="rect">
+            <a:avLst/>
+          </a:prstGeom>
+          <a:noFill/>
+        </p:spPr>
+        <p:txBody>
+          <a:bodyPr wrap="none" anchor="t" lIns="0" rIns="0" tIns="0" bIns="0">
             <a:spAutoFit/>
           </a:bodyPr>
           <a:lstStyle/>
@@ -6774,16 +6774,16 @@
         </p:nvSpPr>
         <p:spPr>
           <a:xfrm>
-            <a:off x="6073902" y="2884932"/>
-            <a:ext cx="453542" cy="274320"/>
-          </a:xfrm>
-          <a:prstGeom prst="rect">
-            <a:avLst/>
-          </a:prstGeom>
-          <a:noFill/>
-        </p:spPr>
-        <p:txBody>
-          <a:bodyPr wrap="square" anchor="t" lIns="0" rIns="0" tIns="0" bIns="0">
+            <a:off x="5753862" y="2884932"/>
+            <a:ext cx="1093622" cy="274320"/>
+          </a:xfrm>
+          <a:prstGeom prst="rect">
+            <a:avLst/>
+          </a:prstGeom>
+          <a:noFill/>
+        </p:spPr>
+        <p:txBody>
+          <a:bodyPr wrap="none" anchor="t" lIns="0" rIns="0" tIns="0" bIns="0">
             <a:spAutoFit/>
           </a:bodyPr>
           <a:lstStyle/>
@@ -6907,16 +6907,16 @@
         </p:nvSpPr>
         <p:spPr>
           <a:xfrm>
-            <a:off x="7432700" y="2884932"/>
-            <a:ext cx="453542" cy="274320"/>
-          </a:xfrm>
-          <a:prstGeom prst="rect">
-            <a:avLst/>
-          </a:prstGeom>
-          <a:noFill/>
-        </p:spPr>
-        <p:txBody>
-          <a:bodyPr wrap="square" anchor="t" lIns="0" rIns="0" tIns="0" bIns="0">
+            <a:off x="7112660" y="2884932"/>
+            <a:ext cx="1093622" cy="274320"/>
+          </a:xfrm>
+          <a:prstGeom prst="rect">
+            <a:avLst/>
+          </a:prstGeom>
+          <a:noFill/>
+        </p:spPr>
+        <p:txBody>
+          <a:bodyPr wrap="none" anchor="t" lIns="0" rIns="0" tIns="0" bIns="0">
             <a:spAutoFit/>
           </a:bodyPr>
           <a:lstStyle/>
@@ -6977,15 +6977,211 @@
           </a:p>
         </p:txBody>
       </p:sp>
-      <p:sp>
-        <p:nvSpPr>
-          <p:cNvPr id="18" name="TextBox 17"/>
-          <p:cNvSpPr txBox="1"/>
-          <p:nvPr/>
-        </p:nvSpPr>
-        <p:spPr>
-          <a:xfrm>
-            <a:off x="685800" y="3977639"/>
+      <p:cxnSp>
+        <p:nvCxnSpPr>
+          <p:cNvPr id="18" name="Connector 17"/>
+          <p:cNvCxnSpPr/>
+          <p:nvPr/>
+        </p:nvCxnSpPr>
+        <p:spPr>
+          <a:xfrm>
+            <a:off x="3108960" y="3406140"/>
+            <a:ext cx="5943600" cy="0"/>
+          </a:xfrm>
+          <a:prstGeom prst="line">
+            <a:avLst/>
+          </a:prstGeom>
+          <a:ln w="19050">
+            <a:solidFill>
+              <a:srgbClr val="C7CBD3"/>
+            </a:solidFill>
+          </a:ln>
+        </p:spPr>
+        <p:style>
+          <a:lnRef idx="2">
+            <a:schemeClr val="accent1"/>
+          </a:lnRef>
+          <a:fillRef idx="0">
+            <a:schemeClr val="accent1"/>
+          </a:fillRef>
+          <a:effectRef idx="1">
+            <a:schemeClr val="accent1"/>
+          </a:effectRef>
+          <a:fontRef idx="minor">
+            <a:schemeClr val="tx1"/>
+          </a:fontRef>
+        </p:style>
+      </p:cxnSp>
+      <p:sp>
+        <p:nvSpPr>
+          <p:cNvPr id="19" name="Rectangle 18"/>
+          <p:cNvSpPr/>
+          <p:nvPr/>
+        </p:nvSpPr>
+        <p:spPr>
+          <a:xfrm>
+            <a:off x="5605272" y="3323844"/>
+            <a:ext cx="950976" cy="164592"/>
+          </a:xfrm>
+          <a:prstGeom prst="rect">
+            <a:avLst/>
+          </a:prstGeom>
+          <a:solidFill>
+            <a:srgbClr val="B3361E"/>
+          </a:solidFill>
+          <a:ln>
+            <a:noFill/>
+          </a:ln>
+          <a:effectLst/>
+        </p:spPr>
+        <p:style>
+          <a:lnRef idx="1">
+            <a:schemeClr val="accent1"/>
+          </a:lnRef>
+          <a:fillRef idx="3">
+            <a:schemeClr val="accent1"/>
+          </a:fillRef>
+          <a:effectRef idx="2">
+            <a:schemeClr val="accent1"/>
+          </a:effectRef>
+          <a:fontRef idx="minor">
+            <a:schemeClr val="lt1"/>
+          </a:fontRef>
+        </p:style>
+        <p:txBody>
+          <a:bodyPr rtlCol="0" anchor="ctr"/>
+          <a:lstStyle/>
+          <a:p>
+            <a:pPr algn="ctr"/>
+          </a:p>
+        </p:txBody>
+      </p:sp>
+      <p:sp>
+        <p:nvSpPr>
+          <p:cNvPr id="20" name="TextBox 19"/>
+          <p:cNvSpPr txBox="1"/>
+          <p:nvPr/>
+        </p:nvSpPr>
+        <p:spPr>
+          <a:xfrm>
+            <a:off x="5605272" y="3543300"/>
+            <a:ext cx="950976" cy="320040"/>
+          </a:xfrm>
+          <a:prstGeom prst="rect">
+            <a:avLst/>
+          </a:prstGeom>
+          <a:noFill/>
+        </p:spPr>
+        <p:txBody>
+          <a:bodyPr wrap="square" anchor="t" lIns="0" rIns="0" tIns="0" bIns="0">
+            <a:spAutoFit/>
+          </a:bodyPr>
+          <a:lstStyle/>
+          <a:p>
+            <a:pPr algn="ctr">
+              <a:lnSpc>
+                <a:spcPct val="115000"/>
+              </a:lnSpc>
+            </a:pPr>
+            <a:r>
+              <a:rPr sz="1300" b="0" i="0">
+                <a:solidFill>
+                  <a:srgbClr val="5A5A5A"/>
+                </a:solidFill>
+                <a:latin typeface="맑은 고딕"/>
+              </a:rPr>
+              <a:t>eᵢ ∈ [-B,B]</a:t>
+            </a:r>
+          </a:p>
+        </p:txBody>
+      </p:sp>
+      <p:sp>
+        <p:nvSpPr>
+          <p:cNvPr id="21" name="TextBox 20"/>
+          <p:cNvSpPr txBox="1"/>
+          <p:nvPr/>
+        </p:nvSpPr>
+        <p:spPr>
+          <a:xfrm>
+            <a:off x="2971800" y="3154680"/>
+            <a:ext cx="822960" cy="274320"/>
+          </a:xfrm>
+          <a:prstGeom prst="rect">
+            <a:avLst/>
+          </a:prstGeom>
+          <a:noFill/>
+        </p:spPr>
+        <p:txBody>
+          <a:bodyPr wrap="square" anchor="t" lIns="0" rIns="0" tIns="0" bIns="0">
+            <a:spAutoFit/>
+          </a:bodyPr>
+          <a:lstStyle/>
+          <a:p>
+            <a:pPr algn="l">
+              <a:lnSpc>
+                <a:spcPct val="115000"/>
+              </a:lnSpc>
+            </a:pPr>
+            <a:r>
+              <a:rPr sz="1400" b="0" i="1">
+                <a:solidFill>
+                  <a:srgbClr val="222222"/>
+                </a:solidFill>
+                <a:latin typeface="맑은 고딕"/>
+              </a:rPr>
+              <a:t>-q</a:t>
+            </a:r>
+          </a:p>
+        </p:txBody>
+      </p:sp>
+      <p:sp>
+        <p:nvSpPr>
+          <p:cNvPr id="22" name="TextBox 21"/>
+          <p:cNvSpPr txBox="1"/>
+          <p:nvPr/>
+        </p:nvSpPr>
+        <p:spPr>
+          <a:xfrm>
+            <a:off x="8366760" y="3154680"/>
+            <a:ext cx="822960" cy="274320"/>
+          </a:xfrm>
+          <a:prstGeom prst="rect">
+            <a:avLst/>
+          </a:prstGeom>
+          <a:noFill/>
+        </p:spPr>
+        <p:txBody>
+          <a:bodyPr wrap="square" anchor="t" lIns="0" rIns="0" tIns="0" bIns="0">
+            <a:spAutoFit/>
+          </a:bodyPr>
+          <a:lstStyle/>
+          <a:p>
+            <a:pPr algn="r">
+              <a:lnSpc>
+                <a:spcPct val="115000"/>
+              </a:lnSpc>
+            </a:pPr>
+            <a:r>
+              <a:rPr sz="1400" b="0" i="1">
+                <a:solidFill>
+                  <a:srgbClr val="222222"/>
+                </a:solidFill>
+                <a:latin typeface="맑은 고딕"/>
+              </a:rPr>
+              <a:t>q</a:t>
+            </a:r>
+          </a:p>
+        </p:txBody>
+      </p:sp>
+      <p:sp>
+        <p:nvSpPr>
+          <p:cNvPr id="23" name="TextBox 22"/>
+          <p:cNvSpPr txBox="1"/>
+          <p:nvPr/>
+        </p:nvSpPr>
+        <p:spPr>
+          <a:xfrm>
+            <a:off x="685800" y="4023360"/>
             <a:ext cx="10789920" cy="1005840"/>
           </a:xfrm>
           <a:prstGeom prst="rect">
@@ -7021,15 +7217,15 @@
       </p:sp>
       <p:graphicFrame>
         <p:nvGraphicFramePr>
-          <p:cNvPr id="19" name="Table 18"/>
+          <p:cNvPr id="24" name="Table 23"/>
           <p:cNvGraphicFramePr>
             <a:graphicFrameLocks noGrp="1"/>
           </p:cNvGraphicFramePr>
           <p:nvPr/>
         </p:nvGraphicFramePr>
         <p:xfrm>
-          <a:off x="1280160" y="5074920"/>
-          <a:ext cx="9601198" cy="1417320"/>
+          <a:off x="1280160" y="5120640"/>
+          <a:ext cx="9601198" cy="1371600"/>
         </p:xfrm>
         <a:graphic>
           <a:graphicData uri="http://schemas.openxmlformats.org/drawingml/2006/table">
@@ -7042,7 +7238,7 @@
                 <a:gridCol w="3749039"/>
                 <a:gridCol w="3749039"/>
               </a:tblGrid>
-              <a:tr h="472440">
+              <a:tr h="457200">
                 <a:tc>
                   <a:txBody>
                     <a:bodyPr/>
@@ -7104,7 +7300,7 @@
                   </a:tcPr>
                 </a:tc>
               </a:tr>
-              <a:tr h="472440">
+              <a:tr h="457200">
                 <a:tc>
                   <a:txBody>
                     <a:bodyPr/>
@@ -7175,7 +7371,7 @@
                   </a:tcPr>
                 </a:tc>
               </a:tr>
-              <a:tr h="472440">
+              <a:tr h="457200">
                 <a:tc>
                   <a:txBody>
                     <a:bodyPr/>
@@ -7439,14 +7635,241 @@
       </p:sp>
       <p:sp>
         <p:nvSpPr>
-          <p:cNvPr id="6" name="TextBox 5"/>
-          <p:cNvSpPr txBox="1"/>
-          <p:nvPr/>
-        </p:nvSpPr>
-        <p:spPr>
-          <a:xfrm>
-            <a:off x="685800" y="1554480"/>
-            <a:ext cx="10789920" cy="4206240"/>
+          <p:cNvPr id="6" name="Rectangle 5"/>
+          <p:cNvSpPr/>
+          <p:nvPr/>
+        </p:nvSpPr>
+        <p:spPr>
+          <a:xfrm>
+            <a:off x="1280160" y="1645920"/>
+            <a:ext cx="4297680" cy="1188720"/>
+          </a:xfrm>
+          <a:prstGeom prst="rect">
+            <a:avLst/>
+          </a:prstGeom>
+          <a:solidFill>
+            <a:srgbClr val="F4F5F7"/>
+          </a:solidFill>
+          <a:ln w="15875">
+            <a:solidFill>
+              <a:srgbClr val="C7CBD3"/>
+            </a:solidFill>
+          </a:ln>
+          <a:effectLst/>
+        </p:spPr>
+        <p:style>
+          <a:lnRef idx="1">
+            <a:schemeClr val="accent1"/>
+          </a:lnRef>
+          <a:fillRef idx="3">
+            <a:schemeClr val="accent1"/>
+          </a:fillRef>
+          <a:effectRef idx="2">
+            <a:schemeClr val="accent1"/>
+          </a:effectRef>
+          <a:fontRef idx="minor">
+            <a:schemeClr val="lt1"/>
+          </a:fontRef>
+        </p:style>
+        <p:txBody>
+          <a:bodyPr rtlCol="0" anchor="ctr" wrap="square"/>
+          <a:lstStyle/>
+          <a:p>
+            <a:pPr algn="ctr"/>
+            <a:r>
+              <a:rPr sz="2200" b="0" i="0">
+                <a:solidFill>
+                  <a:srgbClr val="222222"/>
+                </a:solidFill>
+                <a:latin typeface="Cambria Math"/>
+              </a:rPr>
+              <a:t>As ≡ b (mod q)</a:t>
+            </a:r>
+          </a:p>
+        </p:txBody>
+      </p:sp>
+      <p:sp>
+        <p:nvSpPr>
+          <p:cNvPr id="7" name="Rectangle 6"/>
+          <p:cNvSpPr/>
+          <p:nvPr/>
+        </p:nvSpPr>
+        <p:spPr>
+          <a:xfrm>
+            <a:off x="6583680" y="1645920"/>
+            <a:ext cx="4297680" cy="1188720"/>
+          </a:xfrm>
+          <a:prstGeom prst="rect">
+            <a:avLst/>
+          </a:prstGeom>
+          <a:solidFill>
+            <a:srgbClr val="E3F1EF"/>
+          </a:solidFill>
+          <a:ln w="15875">
+            <a:solidFill>
+              <a:srgbClr val="C7CBD3"/>
+            </a:solidFill>
+          </a:ln>
+          <a:effectLst/>
+        </p:spPr>
+        <p:style>
+          <a:lnRef idx="1">
+            <a:schemeClr val="accent1"/>
+          </a:lnRef>
+          <a:fillRef idx="3">
+            <a:schemeClr val="accent1"/>
+          </a:fillRef>
+          <a:effectRef idx="2">
+            <a:schemeClr val="accent1"/>
+          </a:effectRef>
+          <a:fontRef idx="minor">
+            <a:schemeClr val="lt1"/>
+          </a:fontRef>
+        </p:style>
+        <p:txBody>
+          <a:bodyPr rtlCol="0" anchor="ctr" wrap="square"/>
+          <a:lstStyle/>
+          <a:p>
+            <a:pPr algn="ctr"/>
+            <a:r>
+              <a:rPr sz="2200" b="0" i="0">
+                <a:solidFill>
+                  <a:srgbClr val="222222"/>
+                </a:solidFill>
+                <a:latin typeface="Cambria Math"/>
+              </a:rPr>
+              <a:t>As + e ≡ b (mod q)</a:t>
+            </a:r>
+          </a:p>
+        </p:txBody>
+      </p:sp>
+      <p:sp>
+        <p:nvSpPr>
+          <p:cNvPr id="8" name="TextBox 7"/>
+          <p:cNvSpPr txBox="1"/>
+          <p:nvPr/>
+        </p:nvSpPr>
+        <p:spPr>
+          <a:xfrm>
+            <a:off x="5532120" y="2011680"/>
+            <a:ext cx="914400" cy="548640"/>
+          </a:xfrm>
+          <a:prstGeom prst="rect">
+            <a:avLst/>
+          </a:prstGeom>
+          <a:noFill/>
+        </p:spPr>
+        <p:txBody>
+          <a:bodyPr wrap="square" anchor="ctr" lIns="0" rIns="0" tIns="0" bIns="0">
+            <a:spAutoFit/>
+          </a:bodyPr>
+          <a:lstStyle/>
+          <a:p>
+            <a:pPr algn="ctr">
+              <a:lnSpc>
+                <a:spcPct val="115000"/>
+              </a:lnSpc>
+            </a:pPr>
+            <a:r>
+              <a:rPr sz="3000" b="0" i="0">
+                <a:solidFill>
+                  <a:srgbClr val="222222"/>
+                </a:solidFill>
+                <a:latin typeface="맑은 고딕"/>
+              </a:rPr>
+              <a:t>→</a:t>
+            </a:r>
+          </a:p>
+        </p:txBody>
+      </p:sp>
+      <p:sp>
+        <p:nvSpPr>
+          <p:cNvPr id="9" name="TextBox 8"/>
+          <p:cNvSpPr txBox="1"/>
+          <p:nvPr/>
+        </p:nvSpPr>
+        <p:spPr>
+          <a:xfrm>
+            <a:off x="1280160" y="2880360"/>
+            <a:ext cx="4297680" cy="411480"/>
+          </a:xfrm>
+          <a:prstGeom prst="rect">
+            <a:avLst/>
+          </a:prstGeom>
+          <a:noFill/>
+        </p:spPr>
+        <p:txBody>
+          <a:bodyPr wrap="square" anchor="t" lIns="0" rIns="0" tIns="0" bIns="0">
+            <a:spAutoFit/>
+          </a:bodyPr>
+          <a:lstStyle/>
+          <a:p>
+            <a:pPr algn="ctr">
+              <a:lnSpc>
+                <a:spcPct val="115000"/>
+              </a:lnSpc>
+            </a:pPr>
+            <a:r>
+              <a:rPr sz="1350" b="0" i="0">
+                <a:solidFill>
+                  <a:srgbClr val="5A5A5A"/>
+                </a:solidFill>
+                <a:latin typeface="맑은 고딕"/>
+              </a:rPr>
+              <a:t>e = 0 — 정확한 선형방정식</a:t>
+            </a:r>
+          </a:p>
+        </p:txBody>
+      </p:sp>
+      <p:sp>
+        <p:nvSpPr>
+          <p:cNvPr id="10" name="TextBox 9"/>
+          <p:cNvSpPr txBox="1"/>
+          <p:nvPr/>
+        </p:nvSpPr>
+        <p:spPr>
+          <a:xfrm>
+            <a:off x="6583680" y="2880360"/>
+            <a:ext cx="4297680" cy="411480"/>
+          </a:xfrm>
+          <a:prstGeom prst="rect">
+            <a:avLst/>
+          </a:prstGeom>
+          <a:noFill/>
+        </p:spPr>
+        <p:txBody>
+          <a:bodyPr wrap="square" anchor="t" lIns="0" rIns="0" tIns="0" bIns="0">
+            <a:spAutoFit/>
+          </a:bodyPr>
+          <a:lstStyle/>
+          <a:p>
+            <a:pPr algn="ctr">
+              <a:lnSpc>
+                <a:spcPct val="115000"/>
+              </a:lnSpc>
+            </a:pPr>
+            <a:r>
+              <a:rPr sz="1350" b="0" i="0">
+                <a:solidFill>
+                  <a:srgbClr val="5A5A5A"/>
+                </a:solidFill>
+                <a:latin typeface="맑은 고딕"/>
+              </a:rPr>
+              <a:t>e ≠ 0 — 잡음 섞인 방정식</a:t>
+            </a:r>
+          </a:p>
+        </p:txBody>
+      </p:sp>
+      <p:sp>
+        <p:nvSpPr>
+          <p:cNvPr id="11" name="TextBox 10"/>
+          <p:cNvSpPr txBox="1"/>
+          <p:nvPr/>
+        </p:nvSpPr>
+        <p:spPr>
+          <a:xfrm>
+            <a:off x="685800" y="3383280"/>
+            <a:ext cx="10789920" cy="2743200"/>
           </a:xfrm>
           <a:prstGeom prst="rect">
             <a:avLst/>
@@ -7464,11 +7887,11 @@
                 <a:spcPct val="125000"/>
               </a:lnSpc>
               <a:spcAft>
-                <a:spcPts val="1800"/>
+                <a:spcPts val="1600"/>
               </a:spcAft>
             </a:pPr>
             <a:r>
-              <a:rPr sz="2000">
+              <a:rPr sz="1900">
                 <a:solidFill>
                   <a:srgbClr val="222222"/>
                 </a:solidFill>
@@ -7483,11 +7906,11 @@
                 <a:spcPct val="125000"/>
               </a:lnSpc>
               <a:spcAft>
-                <a:spcPts val="1800"/>
+                <a:spcPts val="1600"/>
               </a:spcAft>
             </a:pPr>
             <a:r>
-              <a:rPr sz="2000">
+              <a:rPr sz="1900">
                 <a:solidFill>
                   <a:srgbClr val="222222"/>
                 </a:solidFill>
@@ -7502,11 +7925,11 @@
                 <a:spcPct val="125000"/>
               </a:lnSpc>
               <a:spcAft>
-                <a:spcPts val="1800"/>
+                <a:spcPts val="1600"/>
               </a:spcAft>
             </a:pPr>
             <a:r>
-              <a:rPr sz="2000">
+              <a:rPr sz="1900">
                 <a:solidFill>
                   <a:srgbClr val="222222"/>
                 </a:solidFill>
@@ -9579,14 +10002,619 @@
       </p:sp>
       <p:sp>
         <p:nvSpPr>
-          <p:cNvPr id="6" name="TextBox 5"/>
-          <p:cNvSpPr txBox="1"/>
-          <p:nvPr/>
-        </p:nvSpPr>
-        <p:spPr>
-          <a:xfrm>
-            <a:off x="685800" y="1463040"/>
-            <a:ext cx="10789920" cy="4572000"/>
+          <p:cNvPr id="6" name="Rounded Rectangle 5"/>
+          <p:cNvSpPr/>
+          <p:nvPr/>
+        </p:nvSpPr>
+        <p:spPr>
+          <a:xfrm>
+            <a:off x="914400" y="1417320"/>
+            <a:ext cx="10332720" cy="1874519"/>
+          </a:xfrm>
+          <a:prstGeom prst="roundRect">
+            <a:avLst/>
+          </a:prstGeom>
+          <a:solidFill>
+            <a:srgbClr val="F4F5F7"/>
+          </a:solidFill>
+          <a:ln>
+            <a:solidFill>
+              <a:srgbClr val="C7CBD3"/>
+            </a:solidFill>
+          </a:ln>
+          <a:effectLst/>
+        </p:spPr>
+        <p:style>
+          <a:lnRef idx="1">
+            <a:schemeClr val="accent1"/>
+          </a:lnRef>
+          <a:fillRef idx="3">
+            <a:schemeClr val="accent1"/>
+          </a:fillRef>
+          <a:effectRef idx="2">
+            <a:schemeClr val="accent1"/>
+          </a:effectRef>
+          <a:fontRef idx="minor">
+            <a:schemeClr val="lt1"/>
+          </a:fontRef>
+        </p:style>
+        <p:txBody>
+          <a:bodyPr rtlCol="0" anchor="ctr"/>
+          <a:lstStyle/>
+          <a:p>
+            <a:pPr algn="ctr"/>
+          </a:p>
+        </p:txBody>
+      </p:sp>
+      <p:sp>
+        <p:nvSpPr>
+          <p:cNvPr id="7" name="Oval 6"/>
+          <p:cNvSpPr/>
+          <p:nvPr/>
+        </p:nvSpPr>
+        <p:spPr>
+          <a:xfrm>
+            <a:off x="1097280" y="1714500"/>
+            <a:ext cx="768096" cy="768096"/>
+          </a:xfrm>
+          <a:prstGeom prst="ellipse">
+            <a:avLst/>
+          </a:prstGeom>
+          <a:noFill/>
+          <a:ln w="22225">
+            <a:solidFill>
+              <a:srgbClr val="B8860B"/>
+            </a:solidFill>
+            <a:prstDash val="dash"/>
+          </a:ln>
+          <a:effectLst/>
+        </p:spPr>
+        <p:style>
+          <a:lnRef idx="1">
+            <a:schemeClr val="accent1"/>
+          </a:lnRef>
+          <a:fillRef idx="3">
+            <a:schemeClr val="accent1"/>
+          </a:fillRef>
+          <a:effectRef idx="2">
+            <a:schemeClr val="accent1"/>
+          </a:effectRef>
+          <a:fontRef idx="minor">
+            <a:schemeClr val="lt1"/>
+          </a:fontRef>
+        </p:style>
+        <p:txBody>
+          <a:bodyPr rtlCol="0" anchor="ctr"/>
+          <a:lstStyle/>
+          <a:p>
+            <a:pPr algn="ctr"/>
+          </a:p>
+        </p:txBody>
+      </p:sp>
+      <p:sp>
+        <p:nvSpPr>
+          <p:cNvPr id="8" name="Oval 7"/>
+          <p:cNvSpPr/>
+          <p:nvPr/>
+        </p:nvSpPr>
+        <p:spPr>
+          <a:xfrm>
+            <a:off x="1440180" y="2057400"/>
+            <a:ext cx="82296" cy="82296"/>
+          </a:xfrm>
+          <a:prstGeom prst="ellipse">
+            <a:avLst/>
+          </a:prstGeom>
+          <a:solidFill>
+            <a:srgbClr val="B3361E"/>
+          </a:solidFill>
+          <a:ln>
+            <a:solidFill>
+              <a:srgbClr val="B3361E"/>
+            </a:solidFill>
+          </a:ln>
+          <a:effectLst/>
+        </p:spPr>
+        <p:style>
+          <a:lnRef idx="1">
+            <a:schemeClr val="accent1"/>
+          </a:lnRef>
+          <a:fillRef idx="3">
+            <a:schemeClr val="accent1"/>
+          </a:fillRef>
+          <a:effectRef idx="2">
+            <a:schemeClr val="accent1"/>
+          </a:effectRef>
+          <a:fontRef idx="minor">
+            <a:schemeClr val="lt1"/>
+          </a:fontRef>
+        </p:style>
+        <p:txBody>
+          <a:bodyPr rtlCol="0" anchor="ctr"/>
+          <a:lstStyle/>
+          <a:p>
+            <a:pPr algn="ctr"/>
+          </a:p>
+        </p:txBody>
+      </p:sp>
+      <p:sp>
+        <p:nvSpPr>
+          <p:cNvPr id="9" name="TextBox 8"/>
+          <p:cNvSpPr txBox="1"/>
+          <p:nvPr/>
+        </p:nvSpPr>
+        <p:spPr>
+          <a:xfrm>
+            <a:off x="978407" y="1403604"/>
+            <a:ext cx="1005840" cy="274320"/>
+          </a:xfrm>
+          <a:prstGeom prst="rect">
+            <a:avLst/>
+          </a:prstGeom>
+          <a:noFill/>
+        </p:spPr>
+        <p:txBody>
+          <a:bodyPr wrap="square" anchor="t" lIns="0" rIns="0" tIns="0" bIns="0">
+            <a:spAutoFit/>
+          </a:bodyPr>
+          <a:lstStyle/>
+          <a:p>
+            <a:pPr algn="ctr">
+              <a:lnSpc>
+                <a:spcPct val="115000"/>
+              </a:lnSpc>
+            </a:pPr>
+            <a:r>
+              <a:rPr sz="1300" b="0" i="1">
+                <a:solidFill>
+                  <a:srgbClr val="222222"/>
+                </a:solidFill>
+                <a:latin typeface="맑은 고딕"/>
+              </a:rPr>
+              <a:t>As₁</a:t>
+            </a:r>
+          </a:p>
+        </p:txBody>
+      </p:sp>
+      <p:sp>
+        <p:nvSpPr>
+          <p:cNvPr id="10" name="Oval 9"/>
+          <p:cNvSpPr/>
+          <p:nvPr/>
+        </p:nvSpPr>
+        <p:spPr>
+          <a:xfrm>
+            <a:off x="4163568" y="2226564"/>
+            <a:ext cx="768096" cy="768096"/>
+          </a:xfrm>
+          <a:prstGeom prst="ellipse">
+            <a:avLst/>
+          </a:prstGeom>
+          <a:noFill/>
+          <a:ln w="22225">
+            <a:solidFill>
+              <a:srgbClr val="B8860B"/>
+            </a:solidFill>
+            <a:prstDash val="dash"/>
+          </a:ln>
+          <a:effectLst/>
+        </p:spPr>
+        <p:style>
+          <a:lnRef idx="1">
+            <a:schemeClr val="accent1"/>
+          </a:lnRef>
+          <a:fillRef idx="3">
+            <a:schemeClr val="accent1"/>
+          </a:fillRef>
+          <a:effectRef idx="2">
+            <a:schemeClr val="accent1"/>
+          </a:effectRef>
+          <a:fontRef idx="minor">
+            <a:schemeClr val="lt1"/>
+          </a:fontRef>
+        </p:style>
+        <p:txBody>
+          <a:bodyPr rtlCol="0" anchor="ctr"/>
+          <a:lstStyle/>
+          <a:p>
+            <a:pPr algn="ctr"/>
+          </a:p>
+        </p:txBody>
+      </p:sp>
+      <p:sp>
+        <p:nvSpPr>
+          <p:cNvPr id="11" name="Oval 10"/>
+          <p:cNvSpPr/>
+          <p:nvPr/>
+        </p:nvSpPr>
+        <p:spPr>
+          <a:xfrm>
+            <a:off x="4506468" y="2569464"/>
+            <a:ext cx="82296" cy="82296"/>
+          </a:xfrm>
+          <a:prstGeom prst="ellipse">
+            <a:avLst/>
+          </a:prstGeom>
+          <a:solidFill>
+            <a:srgbClr val="B3361E"/>
+          </a:solidFill>
+          <a:ln>
+            <a:solidFill>
+              <a:srgbClr val="B3361E"/>
+            </a:solidFill>
+          </a:ln>
+          <a:effectLst/>
+        </p:spPr>
+        <p:style>
+          <a:lnRef idx="1">
+            <a:schemeClr val="accent1"/>
+          </a:lnRef>
+          <a:fillRef idx="3">
+            <a:schemeClr val="accent1"/>
+          </a:fillRef>
+          <a:effectRef idx="2">
+            <a:schemeClr val="accent1"/>
+          </a:effectRef>
+          <a:fontRef idx="minor">
+            <a:schemeClr val="lt1"/>
+          </a:fontRef>
+        </p:style>
+        <p:txBody>
+          <a:bodyPr rtlCol="0" anchor="ctr"/>
+          <a:lstStyle/>
+          <a:p>
+            <a:pPr algn="ctr"/>
+          </a:p>
+        </p:txBody>
+      </p:sp>
+      <p:sp>
+        <p:nvSpPr>
+          <p:cNvPr id="12" name="TextBox 11"/>
+          <p:cNvSpPr txBox="1"/>
+          <p:nvPr/>
+        </p:nvSpPr>
+        <p:spPr>
+          <a:xfrm>
+            <a:off x="4044696" y="1915668"/>
+            <a:ext cx="1005840" cy="274320"/>
+          </a:xfrm>
+          <a:prstGeom prst="rect">
+            <a:avLst/>
+          </a:prstGeom>
+          <a:noFill/>
+        </p:spPr>
+        <p:txBody>
+          <a:bodyPr wrap="square" anchor="t" lIns="0" rIns="0" tIns="0" bIns="0">
+            <a:spAutoFit/>
+          </a:bodyPr>
+          <a:lstStyle/>
+          <a:p>
+            <a:pPr algn="ctr">
+              <a:lnSpc>
+                <a:spcPct val="115000"/>
+              </a:lnSpc>
+            </a:pPr>
+            <a:r>
+              <a:rPr sz="1300" b="0" i="1">
+                <a:solidFill>
+                  <a:srgbClr val="222222"/>
+                </a:solidFill>
+                <a:latin typeface="맑은 고딕"/>
+              </a:rPr>
+              <a:t>As₂</a:t>
+            </a:r>
+          </a:p>
+        </p:txBody>
+      </p:sp>
+      <p:sp>
+        <p:nvSpPr>
+          <p:cNvPr id="13" name="Oval 12"/>
+          <p:cNvSpPr/>
+          <p:nvPr/>
+        </p:nvSpPr>
+        <p:spPr>
+          <a:xfrm>
+            <a:off x="7229856" y="1714500"/>
+            <a:ext cx="768096" cy="768096"/>
+          </a:xfrm>
+          <a:prstGeom prst="ellipse">
+            <a:avLst/>
+          </a:prstGeom>
+          <a:noFill/>
+          <a:ln w="22225">
+            <a:solidFill>
+              <a:srgbClr val="B8860B"/>
+            </a:solidFill>
+            <a:prstDash val="dash"/>
+          </a:ln>
+          <a:effectLst/>
+        </p:spPr>
+        <p:style>
+          <a:lnRef idx="1">
+            <a:schemeClr val="accent1"/>
+          </a:lnRef>
+          <a:fillRef idx="3">
+            <a:schemeClr val="accent1"/>
+          </a:fillRef>
+          <a:effectRef idx="2">
+            <a:schemeClr val="accent1"/>
+          </a:effectRef>
+          <a:fontRef idx="minor">
+            <a:schemeClr val="lt1"/>
+          </a:fontRef>
+        </p:style>
+        <p:txBody>
+          <a:bodyPr rtlCol="0" anchor="ctr"/>
+          <a:lstStyle/>
+          <a:p>
+            <a:pPr algn="ctr"/>
+          </a:p>
+        </p:txBody>
+      </p:sp>
+      <p:sp>
+        <p:nvSpPr>
+          <p:cNvPr id="14" name="Oval 13"/>
+          <p:cNvSpPr/>
+          <p:nvPr/>
+        </p:nvSpPr>
+        <p:spPr>
+          <a:xfrm>
+            <a:off x="7572756" y="2057400"/>
+            <a:ext cx="82296" cy="82296"/>
+          </a:xfrm>
+          <a:prstGeom prst="ellipse">
+            <a:avLst/>
+          </a:prstGeom>
+          <a:solidFill>
+            <a:srgbClr val="B3361E"/>
+          </a:solidFill>
+          <a:ln>
+            <a:solidFill>
+              <a:srgbClr val="B3361E"/>
+            </a:solidFill>
+          </a:ln>
+          <a:effectLst/>
+        </p:spPr>
+        <p:style>
+          <a:lnRef idx="1">
+            <a:schemeClr val="accent1"/>
+          </a:lnRef>
+          <a:fillRef idx="3">
+            <a:schemeClr val="accent1"/>
+          </a:fillRef>
+          <a:effectRef idx="2">
+            <a:schemeClr val="accent1"/>
+          </a:effectRef>
+          <a:fontRef idx="minor">
+            <a:schemeClr val="lt1"/>
+          </a:fontRef>
+        </p:style>
+        <p:txBody>
+          <a:bodyPr rtlCol="0" anchor="ctr"/>
+          <a:lstStyle/>
+          <a:p>
+            <a:pPr algn="ctr"/>
+          </a:p>
+        </p:txBody>
+      </p:sp>
+      <p:sp>
+        <p:nvSpPr>
+          <p:cNvPr id="15" name="TextBox 14"/>
+          <p:cNvSpPr txBox="1"/>
+          <p:nvPr/>
+        </p:nvSpPr>
+        <p:spPr>
+          <a:xfrm>
+            <a:off x="7110984" y="1403604"/>
+            <a:ext cx="1005840" cy="274320"/>
+          </a:xfrm>
+          <a:prstGeom prst="rect">
+            <a:avLst/>
+          </a:prstGeom>
+          <a:noFill/>
+        </p:spPr>
+        <p:txBody>
+          <a:bodyPr wrap="square" anchor="t" lIns="0" rIns="0" tIns="0" bIns="0">
+            <a:spAutoFit/>
+          </a:bodyPr>
+          <a:lstStyle/>
+          <a:p>
+            <a:pPr algn="ctr">
+              <a:lnSpc>
+                <a:spcPct val="115000"/>
+              </a:lnSpc>
+            </a:pPr>
+            <a:r>
+              <a:rPr sz="1300" b="0" i="1">
+                <a:solidFill>
+                  <a:srgbClr val="222222"/>
+                </a:solidFill>
+                <a:latin typeface="맑은 고딕"/>
+              </a:rPr>
+              <a:t>As₃</a:t>
+            </a:r>
+          </a:p>
+        </p:txBody>
+      </p:sp>
+      <p:sp>
+        <p:nvSpPr>
+          <p:cNvPr id="16" name="Oval 15"/>
+          <p:cNvSpPr/>
+          <p:nvPr/>
+        </p:nvSpPr>
+        <p:spPr>
+          <a:xfrm>
+            <a:off x="10296144" y="2226564"/>
+            <a:ext cx="768096" cy="768096"/>
+          </a:xfrm>
+          <a:prstGeom prst="ellipse">
+            <a:avLst/>
+          </a:prstGeom>
+          <a:noFill/>
+          <a:ln w="22225">
+            <a:solidFill>
+              <a:srgbClr val="B8860B"/>
+            </a:solidFill>
+            <a:prstDash val="dash"/>
+          </a:ln>
+          <a:effectLst/>
+        </p:spPr>
+        <p:style>
+          <a:lnRef idx="1">
+            <a:schemeClr val="accent1"/>
+          </a:lnRef>
+          <a:fillRef idx="3">
+            <a:schemeClr val="accent1"/>
+          </a:fillRef>
+          <a:effectRef idx="2">
+            <a:schemeClr val="accent1"/>
+          </a:effectRef>
+          <a:fontRef idx="minor">
+            <a:schemeClr val="lt1"/>
+          </a:fontRef>
+        </p:style>
+        <p:txBody>
+          <a:bodyPr rtlCol="0" anchor="ctr"/>
+          <a:lstStyle/>
+          <a:p>
+            <a:pPr algn="ctr"/>
+          </a:p>
+        </p:txBody>
+      </p:sp>
+      <p:sp>
+        <p:nvSpPr>
+          <p:cNvPr id="17" name="Oval 16"/>
+          <p:cNvSpPr/>
+          <p:nvPr/>
+        </p:nvSpPr>
+        <p:spPr>
+          <a:xfrm>
+            <a:off x="10639044" y="2569464"/>
+            <a:ext cx="82296" cy="82296"/>
+          </a:xfrm>
+          <a:prstGeom prst="ellipse">
+            <a:avLst/>
+          </a:prstGeom>
+          <a:solidFill>
+            <a:srgbClr val="B3361E"/>
+          </a:solidFill>
+          <a:ln>
+            <a:solidFill>
+              <a:srgbClr val="B3361E"/>
+            </a:solidFill>
+          </a:ln>
+          <a:effectLst/>
+        </p:spPr>
+        <p:style>
+          <a:lnRef idx="1">
+            <a:schemeClr val="accent1"/>
+          </a:lnRef>
+          <a:fillRef idx="3">
+            <a:schemeClr val="accent1"/>
+          </a:fillRef>
+          <a:effectRef idx="2">
+            <a:schemeClr val="accent1"/>
+          </a:effectRef>
+          <a:fontRef idx="minor">
+            <a:schemeClr val="lt1"/>
+          </a:fontRef>
+        </p:style>
+        <p:txBody>
+          <a:bodyPr rtlCol="0" anchor="ctr"/>
+          <a:lstStyle/>
+          <a:p>
+            <a:pPr algn="ctr"/>
+          </a:p>
+        </p:txBody>
+      </p:sp>
+      <p:sp>
+        <p:nvSpPr>
+          <p:cNvPr id="18" name="TextBox 17"/>
+          <p:cNvSpPr txBox="1"/>
+          <p:nvPr/>
+        </p:nvSpPr>
+        <p:spPr>
+          <a:xfrm>
+            <a:off x="10177272" y="1915668"/>
+            <a:ext cx="1005840" cy="274320"/>
+          </a:xfrm>
+          <a:prstGeom prst="rect">
+            <a:avLst/>
+          </a:prstGeom>
+          <a:noFill/>
+        </p:spPr>
+        <p:txBody>
+          <a:bodyPr wrap="square" anchor="t" lIns="0" rIns="0" tIns="0" bIns="0">
+            <a:spAutoFit/>
+          </a:bodyPr>
+          <a:lstStyle/>
+          <a:p>
+            <a:pPr algn="ctr">
+              <a:lnSpc>
+                <a:spcPct val="115000"/>
+              </a:lnSpc>
+            </a:pPr>
+            <a:r>
+              <a:rPr sz="1300" b="0" i="1">
+                <a:solidFill>
+                  <a:srgbClr val="222222"/>
+                </a:solidFill>
+                <a:latin typeface="맑은 고딕"/>
+              </a:rPr>
+              <a:t>As₄</a:t>
+            </a:r>
+          </a:p>
+        </p:txBody>
+      </p:sp>
+      <p:sp>
+        <p:nvSpPr>
+          <p:cNvPr id="19" name="TextBox 18"/>
+          <p:cNvSpPr txBox="1"/>
+          <p:nvPr/>
+        </p:nvSpPr>
+        <p:spPr>
+          <a:xfrm>
+            <a:off x="1051560" y="2980944"/>
+            <a:ext cx="10058400" cy="274320"/>
+          </a:xfrm>
+          <a:prstGeom prst="rect">
+            <a:avLst/>
+          </a:prstGeom>
+          <a:noFill/>
+        </p:spPr>
+        <p:txBody>
+          <a:bodyPr wrap="square" anchor="t" lIns="0" rIns="0" tIns="0" bIns="0">
+            <a:spAutoFit/>
+          </a:bodyPr>
+          <a:lstStyle/>
+          <a:p>
+            <a:pPr algn="ctr">
+              <a:lnSpc>
+                <a:spcPct val="115000"/>
+              </a:lnSpc>
+            </a:pPr>
+            <a:r>
+              <a:rPr sz="1150" b="0" i="0">
+                <a:solidFill>
+                  <a:srgbClr val="5A5A5A"/>
+                </a:solidFill>
+                <a:latin typeface="맑은 고딕"/>
+              </a:rPr>
+              <a:t>점선 원 = 잡음 반경 B 안의 후보들 (겹치면 유일성이 깨짐)</a:t>
+            </a:r>
+          </a:p>
+        </p:txBody>
+      </p:sp>
+      <p:sp>
+        <p:nvSpPr>
+          <p:cNvPr id="20" name="TextBox 19"/>
+          <p:cNvSpPr txBox="1"/>
+          <p:nvPr/>
+        </p:nvSpPr>
+        <p:spPr>
+          <a:xfrm>
+            <a:off x="685800" y="3566160"/>
+            <a:ext cx="10789920" cy="3108960"/>
           </a:xfrm>
           <a:prstGeom prst="rect">
             <a:avLst/>
@@ -9604,17 +10632,17 @@
                 <a:spcPct val="125000"/>
               </a:lnSpc>
               <a:spcAft>
-                <a:spcPts val="1600"/>
+                <a:spcPts val="900"/>
               </a:spcAft>
             </a:pPr>
             <a:r>
-              <a:rPr sz="1950">
+              <a:rPr sz="1650">
                 <a:solidFill>
                   <a:srgbClr val="222222"/>
                 </a:solidFill>
                 <a:latin typeface="맑은 고딕"/>
               </a:rPr>
-              <a:t>—  LWE(탐색): (A,b)에서 정확한 비밀 s를 찾아라</a:t>
+              <a:t>—  DLWE(m,n,q,B): A∈R ℤq^(m×n), s∈R ℤqⁿ, e∈R[-B,B]ᵐ, r∈R ℤqᵐ, b=As+e — 확률 ½로 c=b, 확률 ½로 c=r</a:t>
             </a:r>
           </a:p>
           <a:p>
@@ -9623,17 +10651,17 @@
                 <a:spcPct val="125000"/>
               </a:lnSpc>
               <a:spcAft>
-                <a:spcPts val="1600"/>
+                <a:spcPts val="900"/>
               </a:spcAft>
             </a:pPr>
             <a:r>
-              <a:rPr sz="1950">
+              <a:rPr sz="1650">
                 <a:solidFill>
                   <a:srgbClr val="222222"/>
                 </a:solidFill>
                 <a:latin typeface="맑은 고딕"/>
               </a:rPr>
-              <a:t>—  DLWE(결정): (A,c)가 진짜 LWE 표본(c=As+e)인지, 완전히 무작위(c=r)인지만 구별하라</a:t>
+              <a:t>—  LWE(탐색): (A,b)에서 정확한 비밀 s를 찾아라 / DLWE(결정): (A,c)가 위 구들 중 하나에 속하는(c=b) 표본인지, 완전히 무작위(c=r)인지만 구별하라</a:t>
             </a:r>
           </a:p>
           <a:p>
@@ -9642,11 +10670,11 @@
                 <a:spcPct val="125000"/>
               </a:lnSpc>
               <a:spcAft>
-                <a:spcPts val="1600"/>
+                <a:spcPts val="900"/>
               </a:spcAft>
             </a:pPr>
             <a:r>
-              <a:rPr sz="1950">
+              <a:rPr sz="1650">
                 <a:solidFill>
                   <a:srgbClr val="222222"/>
                 </a:solidFill>
@@ -9661,11 +10689,11 @@
                 <a:spcPct val="125000"/>
               </a:lnSpc>
               <a:spcAft>
-                <a:spcPts val="1600"/>
+                <a:spcPts val="900"/>
               </a:spcAft>
             </a:pPr>
             <a:r>
-              <a:rPr sz="1950">
+              <a:rPr sz="1650">
                 <a:solidFill>
                   <a:srgbClr val="222222"/>
                 </a:solidFill>
@@ -10454,16 +11482,212 @@
           </a:p>
         </p:txBody>
       </p:sp>
-      <p:sp>
-        <p:nvSpPr>
-          <p:cNvPr id="6" name="TextBox 5"/>
-          <p:cNvSpPr txBox="1"/>
-          <p:nvPr/>
-        </p:nvSpPr>
-        <p:spPr>
-          <a:xfrm>
-            <a:off x="685800" y="1463040"/>
-            <a:ext cx="10789920" cy="4572000"/>
+      <p:cxnSp>
+        <p:nvCxnSpPr>
+          <p:cNvPr id="6" name="Connector 5"/>
+          <p:cNvCxnSpPr/>
+          <p:nvPr/>
+        </p:nvCxnSpPr>
+        <p:spPr>
+          <a:xfrm>
+            <a:off x="3108960" y="1805940"/>
+            <a:ext cx="5943600" cy="0"/>
+          </a:xfrm>
+          <a:prstGeom prst="line">
+            <a:avLst/>
+          </a:prstGeom>
+          <a:ln w="19050">
+            <a:solidFill>
+              <a:srgbClr val="C7CBD3"/>
+            </a:solidFill>
+          </a:ln>
+        </p:spPr>
+        <p:style>
+          <a:lnRef idx="2">
+            <a:schemeClr val="accent1"/>
+          </a:lnRef>
+          <a:fillRef idx="0">
+            <a:schemeClr val="accent1"/>
+          </a:fillRef>
+          <a:effectRef idx="1">
+            <a:schemeClr val="accent1"/>
+          </a:effectRef>
+          <a:fontRef idx="minor">
+            <a:schemeClr val="tx1"/>
+          </a:fontRef>
+        </p:style>
+      </p:cxnSp>
+      <p:sp>
+        <p:nvSpPr>
+          <p:cNvPr id="7" name="Rectangle 6"/>
+          <p:cNvSpPr/>
+          <p:nvPr/>
+        </p:nvSpPr>
+        <p:spPr>
+          <a:xfrm>
+            <a:off x="5605272" y="1723644"/>
+            <a:ext cx="950976" cy="164592"/>
+          </a:xfrm>
+          <a:prstGeom prst="rect">
+            <a:avLst/>
+          </a:prstGeom>
+          <a:solidFill>
+            <a:srgbClr val="B3361E"/>
+          </a:solidFill>
+          <a:ln>
+            <a:noFill/>
+          </a:ln>
+          <a:effectLst/>
+        </p:spPr>
+        <p:style>
+          <a:lnRef idx="1">
+            <a:schemeClr val="accent1"/>
+          </a:lnRef>
+          <a:fillRef idx="3">
+            <a:schemeClr val="accent1"/>
+          </a:fillRef>
+          <a:effectRef idx="2">
+            <a:schemeClr val="accent1"/>
+          </a:effectRef>
+          <a:fontRef idx="minor">
+            <a:schemeClr val="lt1"/>
+          </a:fontRef>
+        </p:style>
+        <p:txBody>
+          <a:bodyPr rtlCol="0" anchor="ctr"/>
+          <a:lstStyle/>
+          <a:p>
+            <a:pPr algn="ctr"/>
+          </a:p>
+        </p:txBody>
+      </p:sp>
+      <p:sp>
+        <p:nvSpPr>
+          <p:cNvPr id="8" name="TextBox 7"/>
+          <p:cNvSpPr txBox="1"/>
+          <p:nvPr/>
+        </p:nvSpPr>
+        <p:spPr>
+          <a:xfrm>
+            <a:off x="5605272" y="1943100"/>
+            <a:ext cx="950976" cy="320040"/>
+          </a:xfrm>
+          <a:prstGeom prst="rect">
+            <a:avLst/>
+          </a:prstGeom>
+          <a:noFill/>
+        </p:spPr>
+        <p:txBody>
+          <a:bodyPr wrap="square" anchor="t" lIns="0" rIns="0" tIns="0" bIns="0">
+            <a:spAutoFit/>
+          </a:bodyPr>
+          <a:lstStyle/>
+          <a:p>
+            <a:pPr algn="ctr">
+              <a:lnSpc>
+                <a:spcPct val="115000"/>
+              </a:lnSpc>
+            </a:pPr>
+            <a:r>
+              <a:rPr sz="1300" b="0" i="0">
+                <a:solidFill>
+                  <a:srgbClr val="5A5A5A"/>
+                </a:solidFill>
+                <a:latin typeface="맑은 고딕"/>
+              </a:rPr>
+              <a:t>sᵢ ∈ [-B,B]</a:t>
+            </a:r>
+          </a:p>
+        </p:txBody>
+      </p:sp>
+      <p:sp>
+        <p:nvSpPr>
+          <p:cNvPr id="9" name="TextBox 8"/>
+          <p:cNvSpPr txBox="1"/>
+          <p:nvPr/>
+        </p:nvSpPr>
+        <p:spPr>
+          <a:xfrm>
+            <a:off x="2971800" y="1554480"/>
+            <a:ext cx="822960" cy="274320"/>
+          </a:xfrm>
+          <a:prstGeom prst="rect">
+            <a:avLst/>
+          </a:prstGeom>
+          <a:noFill/>
+        </p:spPr>
+        <p:txBody>
+          <a:bodyPr wrap="square" anchor="t" lIns="0" rIns="0" tIns="0" bIns="0">
+            <a:spAutoFit/>
+          </a:bodyPr>
+          <a:lstStyle/>
+          <a:p>
+            <a:pPr algn="l">
+              <a:lnSpc>
+                <a:spcPct val="115000"/>
+              </a:lnSpc>
+            </a:pPr>
+            <a:r>
+              <a:rPr sz="1400" b="0" i="1">
+                <a:solidFill>
+                  <a:srgbClr val="222222"/>
+                </a:solidFill>
+                <a:latin typeface="맑은 고딕"/>
+              </a:rPr>
+              <a:t>-q</a:t>
+            </a:r>
+          </a:p>
+        </p:txBody>
+      </p:sp>
+      <p:sp>
+        <p:nvSpPr>
+          <p:cNvPr id="10" name="TextBox 9"/>
+          <p:cNvSpPr txBox="1"/>
+          <p:nvPr/>
+        </p:nvSpPr>
+        <p:spPr>
+          <a:xfrm>
+            <a:off x="8366760" y="1554480"/>
+            <a:ext cx="822960" cy="274320"/>
+          </a:xfrm>
+          <a:prstGeom prst="rect">
+            <a:avLst/>
+          </a:prstGeom>
+          <a:noFill/>
+        </p:spPr>
+        <p:txBody>
+          <a:bodyPr wrap="square" anchor="t" lIns="0" rIns="0" tIns="0" bIns="0">
+            <a:spAutoFit/>
+          </a:bodyPr>
+          <a:lstStyle/>
+          <a:p>
+            <a:pPr algn="r">
+              <a:lnSpc>
+                <a:spcPct val="115000"/>
+              </a:lnSpc>
+            </a:pPr>
+            <a:r>
+              <a:rPr sz="1400" b="0" i="1">
+                <a:solidFill>
+                  <a:srgbClr val="222222"/>
+                </a:solidFill>
+                <a:latin typeface="맑은 고딕"/>
+              </a:rPr>
+              <a:t>q</a:t>
+            </a:r>
+          </a:p>
+        </p:txBody>
+      </p:sp>
+      <p:sp>
+        <p:nvSpPr>
+          <p:cNvPr id="11" name="TextBox 10"/>
+          <p:cNvSpPr txBox="1"/>
+          <p:nvPr/>
+        </p:nvSpPr>
+        <p:spPr>
+          <a:xfrm>
+            <a:off x="685800" y="2606040"/>
+            <a:ext cx="10789920" cy="3566160"/>
           </a:xfrm>
           <a:prstGeom prst="rect">
             <a:avLst/>
@@ -10481,17 +11705,17 @@
                 <a:spcPct val="125000"/>
               </a:lnSpc>
               <a:spcAft>
-                <a:spcPts val="1600"/>
+                <a:spcPts val="1100"/>
               </a:spcAft>
             </a:pPr>
             <a:r>
-              <a:rPr sz="1950">
+              <a:rPr sz="1750">
                 <a:solidFill>
                   <a:srgbClr val="222222"/>
                 </a:solidFill>
                 <a:latin typeface="맑은 고딕"/>
               </a:rPr>
-              <a:t>—  비밀 s도 오차 e처럼 [-B,B]ⁿ 에서 뽑는 LWE 변형</a:t>
+              <a:t>—  비밀 s도 오차 e처럼 [-B,B]ⁿ 에서 뽑는 LWE 변형 — b=As+e (mod q), (A,b)에서 s 찾기</a:t>
             </a:r>
           </a:p>
           <a:p>
@@ -10500,11 +11724,11 @@
                 <a:spcPct val="125000"/>
               </a:lnSpc>
               <a:spcAft>
-                <a:spcPts val="1600"/>
+                <a:spcPts val="1100"/>
               </a:spcAft>
             </a:pPr>
             <a:r>
-              <a:rPr sz="1950">
+              <a:rPr sz="1750">
                 <a:solidFill>
                   <a:srgbClr val="222222"/>
                 </a:solidFill>
@@ -10519,11 +11743,11 @@
                 <a:spcPct val="125000"/>
               </a:lnSpc>
               <a:spcAft>
-                <a:spcPts val="1600"/>
+                <a:spcPts val="1100"/>
               </a:spcAft>
             </a:pPr>
             <a:r>
-              <a:rPr sz="1950">
+              <a:rPr sz="1750">
                 <a:solidFill>
                   <a:srgbClr val="222222"/>
                 </a:solidFill>
@@ -10538,11 +11762,11 @@
                 <a:spcPct val="125000"/>
               </a:lnSpc>
               <a:spcAft>
-                <a:spcPts val="1600"/>
+                <a:spcPts val="1100"/>
               </a:spcAft>
             </a:pPr>
             <a:r>
-              <a:rPr sz="1950">
+              <a:rPr sz="1750">
                 <a:solidFill>
                   <a:srgbClr val="222222"/>
                 </a:solidFill>
@@ -13024,8 +14248,8 @@
         </p:nvSpPr>
         <p:spPr>
           <a:xfrm>
-            <a:off x="685800" y="1417320"/>
-            <a:ext cx="10789920" cy="1463040"/>
+            <a:off x="685800" y="1371600"/>
+            <a:ext cx="10789920" cy="2194560"/>
           </a:xfrm>
           <a:prstGeom prst="rect">
             <a:avLst/>
@@ -13043,17 +14267,17 @@
                 <a:spcPct val="125000"/>
               </a:lnSpc>
               <a:spcAft>
-                <a:spcPts val="1000"/>
+                <a:spcPts val="900"/>
               </a:spcAft>
             </a:pPr>
             <a:r>
-              <a:rPr sz="1900">
+              <a:rPr sz="1850">
                 <a:solidFill>
                   <a:srgbClr val="222222"/>
                 </a:solidFill>
                 <a:latin typeface="맑은 고딕"/>
               </a:rPr>
-              <a:t>—  ℤq = {0,1,…,q-1} (q는 소수), 모든 벡터는 열벡터</a:t>
+              <a:t>—  ℤq = {0,1,…,q-1} (q는 소수), 모든 벡터는 열벡터(column vector)로 취급</a:t>
             </a:r>
           </a:p>
           <a:p>
@@ -13062,16 +14286,35 @@
                 <a:spcPct val="125000"/>
               </a:lnSpc>
               <a:spcAft>
-                <a:spcPts val="1000"/>
+                <a:spcPts val="900"/>
               </a:spcAft>
             </a:pPr>
             <a:r>
-              <a:rPr sz="1900">
+              <a:rPr sz="1850">
                 <a:solidFill>
                   <a:srgbClr val="222222"/>
                 </a:solidFill>
                 <a:latin typeface="맑은 고딕"/>
               </a:rPr>
+              <a:t>—  x ∈R S : x가 집합 S에서 균등(uniform)·독립적으로 무작위 선택됨을 뜻함</a:t>
+            </a:r>
+          </a:p>
+          <a:p>
+            <a:pPr>
+              <a:lnSpc>
+                <a:spcPct val="125000"/>
+              </a:lnSpc>
+              <a:spcAft>
+                <a:spcPts val="900"/>
+              </a:spcAft>
+            </a:pPr>
+            <a:r>
+              <a:rPr sz="1850">
+                <a:solidFill>
+                  <a:srgbClr val="222222"/>
+                </a:solidFill>
+                <a:latin typeface="맑은 고딕"/>
+              </a:rPr>
               <a:t>—  행렬-벡터 곱 Az: A의 i번째 행과 z의 내적 — (Az)ᵢ = Σⱼ Aᵢⱼzⱼ</a:t>
             </a:r>
           </a:p>
@@ -13085,7 +14328,7 @@
         </p:nvSpPr>
         <p:spPr>
           <a:xfrm>
-            <a:off x="1097280" y="3108960"/>
+            <a:off x="1097280" y="3429000"/>
             <a:ext cx="8229600" cy="1463040"/>
           </a:xfrm>
           <a:prstGeom prst="rect">
@@ -13132,7 +14375,7 @@
         </p:nvSpPr>
         <p:spPr>
           <a:xfrm>
-            <a:off x="685800" y="4892040"/>
+            <a:off x="685800" y="5212080"/>
             <a:ext cx="10789920" cy="1097280"/>
           </a:xfrm>
           <a:prstGeom prst="rect">
@@ -14869,16 +16112,16 @@
         </p:nvSpPr>
         <p:spPr>
           <a:xfrm>
-            <a:off x="3327044" y="2999232"/>
-            <a:ext cx="1247241" cy="274320"/>
-          </a:xfrm>
-          <a:prstGeom prst="rect">
-            <a:avLst/>
-          </a:prstGeom>
-          <a:noFill/>
-        </p:spPr>
-        <p:txBody>
-          <a:bodyPr wrap="square" anchor="t" lIns="0" rIns="0" tIns="0" bIns="0">
+            <a:off x="3007004" y="2999232"/>
+            <a:ext cx="1887321" cy="274320"/>
+          </a:xfrm>
+          <a:prstGeom prst="rect">
+            <a:avLst/>
+          </a:prstGeom>
+          <a:noFill/>
+        </p:spPr>
+        <p:txBody>
+          <a:bodyPr wrap="none" anchor="t" lIns="0" rIns="0" tIns="0" bIns="0">
             <a:spAutoFit/>
           </a:bodyPr>
           <a:lstStyle/>
@@ -15002,16 +16245,16 @@
         </p:nvSpPr>
         <p:spPr>
           <a:xfrm>
-            <a:off x="5479542" y="2999232"/>
-            <a:ext cx="453542" cy="274320"/>
-          </a:xfrm>
-          <a:prstGeom prst="rect">
-            <a:avLst/>
-          </a:prstGeom>
-          <a:noFill/>
-        </p:spPr>
-        <p:txBody>
-          <a:bodyPr wrap="square" anchor="t" lIns="0" rIns="0" tIns="0" bIns="0">
+            <a:off x="5159502" y="2999232"/>
+            <a:ext cx="1093622" cy="274320"/>
+          </a:xfrm>
+          <a:prstGeom prst="rect">
+            <a:avLst/>
+          </a:prstGeom>
+          <a:noFill/>
+        </p:spPr>
+        <p:txBody>
+          <a:bodyPr wrap="none" anchor="t" lIns="0" rIns="0" tIns="0" bIns="0">
             <a:spAutoFit/>
           </a:bodyPr>
           <a:lstStyle/>
@@ -15135,16 +16378,16 @@
         </p:nvSpPr>
         <p:spPr>
           <a:xfrm>
-            <a:off x="6838340" y="2999232"/>
-            <a:ext cx="453542" cy="274320"/>
-          </a:xfrm>
-          <a:prstGeom prst="rect">
-            <a:avLst/>
-          </a:prstGeom>
-          <a:noFill/>
-        </p:spPr>
-        <p:txBody>
-          <a:bodyPr wrap="square" anchor="t" lIns="0" rIns="0" tIns="0" bIns="0">
+            <a:off x="6518300" y="2999232"/>
+            <a:ext cx="1093622" cy="274320"/>
+          </a:xfrm>
+          <a:prstGeom prst="rect">
+            <a:avLst/>
+          </a:prstGeom>
+          <a:noFill/>
+        </p:spPr>
+        <p:txBody>
+          <a:bodyPr wrap="none" anchor="t" lIns="0" rIns="0" tIns="0" bIns="0">
             <a:spAutoFit/>
           </a:bodyPr>
           <a:lstStyle/>
@@ -15937,14 +17180,413 @@
       </p:sp>
       <p:sp>
         <p:nvSpPr>
-          <p:cNvPr id="6" name="TextBox 5"/>
-          <p:cNvSpPr txBox="1"/>
-          <p:nvPr/>
-        </p:nvSpPr>
-        <p:spPr>
-          <a:xfrm>
-            <a:off x="685800" y="1463040"/>
-            <a:ext cx="10789920" cy="4206240"/>
+          <p:cNvPr id="6" name="Rectangle 5"/>
+          <p:cNvSpPr/>
+          <p:nvPr/>
+        </p:nvSpPr>
+        <p:spPr>
+          <a:xfrm>
+            <a:off x="3616909" y="1280160"/>
+            <a:ext cx="963777" cy="822960"/>
+          </a:xfrm>
+          <a:prstGeom prst="rect">
+            <a:avLst/>
+          </a:prstGeom>
+          <a:solidFill>
+            <a:srgbClr val="F4F5F7"/>
+          </a:solidFill>
+          <a:ln w="15875">
+            <a:solidFill>
+              <a:srgbClr val="C7CBD3"/>
+            </a:solidFill>
+          </a:ln>
+          <a:effectLst/>
+        </p:spPr>
+        <p:style>
+          <a:lnRef idx="1">
+            <a:schemeClr val="accent1"/>
+          </a:lnRef>
+          <a:fillRef idx="3">
+            <a:schemeClr val="accent1"/>
+          </a:fillRef>
+          <a:effectRef idx="2">
+            <a:schemeClr val="accent1"/>
+          </a:effectRef>
+          <a:fontRef idx="minor">
+            <a:schemeClr val="lt1"/>
+          </a:fontRef>
+        </p:style>
+        <p:txBody>
+          <a:bodyPr rtlCol="0" anchor="ctr" wrap="square"/>
+          <a:lstStyle/>
+          <a:p>
+            <a:pPr algn="ctr"/>
+            <a:r>
+              <a:rPr sz="1900" b="0" i="1">
+                <a:solidFill>
+                  <a:srgbClr val="222222"/>
+                </a:solidFill>
+                <a:latin typeface="Cambria Math"/>
+              </a:rPr>
+              <a:t>A</a:t>
+            </a:r>
+          </a:p>
+        </p:txBody>
+      </p:sp>
+      <p:sp>
+        <p:nvSpPr>
+          <p:cNvPr id="7" name="TextBox 6"/>
+          <p:cNvSpPr txBox="1"/>
+          <p:nvPr/>
+        </p:nvSpPr>
+        <p:spPr>
+          <a:xfrm>
+            <a:off x="3296869" y="2130552"/>
+            <a:ext cx="1603857" cy="274320"/>
+          </a:xfrm>
+          <a:prstGeom prst="rect">
+            <a:avLst/>
+          </a:prstGeom>
+          <a:noFill/>
+        </p:spPr>
+        <p:txBody>
+          <a:bodyPr wrap="none" anchor="t" lIns="0" rIns="0" tIns="0" bIns="0">
+            <a:spAutoFit/>
+          </a:bodyPr>
+          <a:lstStyle/>
+          <a:p>
+            <a:pPr algn="ctr">
+              <a:lnSpc>
+                <a:spcPct val="115000"/>
+              </a:lnSpc>
+            </a:pPr>
+            <a:r>
+              <a:rPr sz="1200" b="0" i="1">
+                <a:solidFill>
+                  <a:srgbClr val="5A5A5A"/>
+                </a:solidFill>
+                <a:latin typeface="맑은 고딕"/>
+              </a:rPr>
+              <a:t>n × m</a:t>
+            </a:r>
+          </a:p>
+        </p:txBody>
+      </p:sp>
+      <p:sp>
+        <p:nvSpPr>
+          <p:cNvPr id="8" name="TextBox 7"/>
+          <p:cNvSpPr txBox="1"/>
+          <p:nvPr/>
+        </p:nvSpPr>
+        <p:spPr>
+          <a:xfrm>
+            <a:off x="4781854" y="1280160"/>
+            <a:ext cx="457200" cy="822960"/>
+          </a:xfrm>
+          <a:prstGeom prst="rect">
+            <a:avLst/>
+          </a:prstGeom>
+          <a:noFill/>
+        </p:spPr>
+        <p:txBody>
+          <a:bodyPr wrap="square" anchor="ctr" lIns="0" rIns="0" tIns="0" bIns="0">
+            <a:spAutoFit/>
+          </a:bodyPr>
+          <a:lstStyle/>
+          <a:p>
+            <a:pPr algn="ctr">
+              <a:lnSpc>
+                <a:spcPct val="115000"/>
+              </a:lnSpc>
+            </a:pPr>
+            <a:r>
+              <a:rPr sz="2500" b="0" i="0">
+                <a:solidFill>
+                  <a:srgbClr val="222222"/>
+                </a:solidFill>
+                <a:latin typeface="맑은 고딕"/>
+              </a:rPr>
+              <a:t/>
+            </a:r>
+          </a:p>
+        </p:txBody>
+      </p:sp>
+      <p:sp>
+        <p:nvSpPr>
+          <p:cNvPr id="9" name="Rectangle 8"/>
+          <p:cNvSpPr/>
+          <p:nvPr/>
+        </p:nvSpPr>
+        <p:spPr>
+          <a:xfrm>
+            <a:off x="5485942" y="1280160"/>
+            <a:ext cx="396849" cy="822960"/>
+          </a:xfrm>
+          <a:prstGeom prst="rect">
+            <a:avLst/>
+          </a:prstGeom>
+          <a:solidFill>
+            <a:srgbClr val="F4F5F7"/>
+          </a:solidFill>
+          <a:ln w="15875">
+            <a:solidFill>
+              <a:srgbClr val="C7CBD3"/>
+            </a:solidFill>
+          </a:ln>
+          <a:effectLst/>
+        </p:spPr>
+        <p:style>
+          <a:lnRef idx="1">
+            <a:schemeClr val="accent1"/>
+          </a:lnRef>
+          <a:fillRef idx="3">
+            <a:schemeClr val="accent1"/>
+          </a:fillRef>
+          <a:effectRef idx="2">
+            <a:schemeClr val="accent1"/>
+          </a:effectRef>
+          <a:fontRef idx="minor">
+            <a:schemeClr val="lt1"/>
+          </a:fontRef>
+        </p:style>
+        <p:txBody>
+          <a:bodyPr rtlCol="0" anchor="ctr" wrap="square"/>
+          <a:lstStyle/>
+          <a:p>
+            <a:pPr algn="ctr"/>
+            <a:r>
+              <a:rPr sz="1900" b="0" i="1">
+                <a:solidFill>
+                  <a:srgbClr val="222222"/>
+                </a:solidFill>
+                <a:latin typeface="Cambria Math"/>
+              </a:rPr>
+              <a:t>z</a:t>
+            </a:r>
+          </a:p>
+        </p:txBody>
+      </p:sp>
+      <p:sp>
+        <p:nvSpPr>
+          <p:cNvPr id="10" name="TextBox 9"/>
+          <p:cNvSpPr txBox="1"/>
+          <p:nvPr/>
+        </p:nvSpPr>
+        <p:spPr>
+          <a:xfrm>
+            <a:off x="5165902" y="2130552"/>
+            <a:ext cx="1036929" cy="274320"/>
+          </a:xfrm>
+          <a:prstGeom prst="rect">
+            <a:avLst/>
+          </a:prstGeom>
+          <a:noFill/>
+        </p:spPr>
+        <p:txBody>
+          <a:bodyPr wrap="none" anchor="t" lIns="0" rIns="0" tIns="0" bIns="0">
+            <a:spAutoFit/>
+          </a:bodyPr>
+          <a:lstStyle/>
+          <a:p>
+            <a:pPr algn="ctr">
+              <a:lnSpc>
+                <a:spcPct val="115000"/>
+              </a:lnSpc>
+            </a:pPr>
+            <a:r>
+              <a:rPr sz="1200" b="0" i="1">
+                <a:solidFill>
+                  <a:srgbClr val="5A5A5A"/>
+                </a:solidFill>
+                <a:latin typeface="맑은 고딕"/>
+              </a:rPr>
+              <a:t>m × 1</a:t>
+            </a:r>
+          </a:p>
+        </p:txBody>
+      </p:sp>
+      <p:sp>
+        <p:nvSpPr>
+          <p:cNvPr id="11" name="TextBox 10"/>
+          <p:cNvSpPr txBox="1"/>
+          <p:nvPr/>
+        </p:nvSpPr>
+        <p:spPr>
+          <a:xfrm>
+            <a:off x="6083960" y="1280160"/>
+            <a:ext cx="457200" cy="822960"/>
+          </a:xfrm>
+          <a:prstGeom prst="rect">
+            <a:avLst/>
+          </a:prstGeom>
+          <a:noFill/>
+        </p:spPr>
+        <p:txBody>
+          <a:bodyPr wrap="square" anchor="ctr" lIns="0" rIns="0" tIns="0" bIns="0">
+            <a:spAutoFit/>
+          </a:bodyPr>
+          <a:lstStyle/>
+          <a:p>
+            <a:pPr algn="ctr">
+              <a:lnSpc>
+                <a:spcPct val="115000"/>
+              </a:lnSpc>
+            </a:pPr>
+            <a:r>
+              <a:rPr sz="2500" b="0" i="0">
+                <a:solidFill>
+                  <a:srgbClr val="222222"/>
+                </a:solidFill>
+                <a:latin typeface="맑은 고딕"/>
+              </a:rPr>
+              <a:t>=</a:t>
+            </a:r>
+          </a:p>
+        </p:txBody>
+      </p:sp>
+      <p:sp>
+        <p:nvSpPr>
+          <p:cNvPr id="12" name="Rectangle 11"/>
+          <p:cNvSpPr/>
+          <p:nvPr/>
+        </p:nvSpPr>
+        <p:spPr>
+          <a:xfrm>
+            <a:off x="6788048" y="1280160"/>
+            <a:ext cx="396849" cy="822960"/>
+          </a:xfrm>
+          <a:prstGeom prst="rect">
+            <a:avLst/>
+          </a:prstGeom>
+          <a:solidFill>
+            <a:srgbClr val="F4F5F7"/>
+          </a:solidFill>
+          <a:ln w="15875">
+            <a:solidFill>
+              <a:srgbClr val="C7CBD3"/>
+            </a:solidFill>
+          </a:ln>
+          <a:effectLst/>
+        </p:spPr>
+        <p:style>
+          <a:lnRef idx="1">
+            <a:schemeClr val="accent1"/>
+          </a:lnRef>
+          <a:fillRef idx="3">
+            <a:schemeClr val="accent1"/>
+          </a:fillRef>
+          <a:effectRef idx="2">
+            <a:schemeClr val="accent1"/>
+          </a:effectRef>
+          <a:fontRef idx="minor">
+            <a:schemeClr val="lt1"/>
+          </a:fontRef>
+        </p:style>
+        <p:txBody>
+          <a:bodyPr rtlCol="0" anchor="ctr" wrap="square"/>
+          <a:lstStyle/>
+          <a:p>
+            <a:pPr algn="ctr"/>
+            <a:r>
+              <a:rPr sz="1900" b="0" i="1">
+                <a:solidFill>
+                  <a:srgbClr val="222222"/>
+                </a:solidFill>
+                <a:latin typeface="Cambria Math"/>
+              </a:rPr>
+              <a:t>0</a:t>
+            </a:r>
+          </a:p>
+        </p:txBody>
+      </p:sp>
+      <p:sp>
+        <p:nvSpPr>
+          <p:cNvPr id="13" name="TextBox 12"/>
+          <p:cNvSpPr txBox="1"/>
+          <p:nvPr/>
+        </p:nvSpPr>
+        <p:spPr>
+          <a:xfrm>
+            <a:off x="6468008" y="2130552"/>
+            <a:ext cx="1036929" cy="274320"/>
+          </a:xfrm>
+          <a:prstGeom prst="rect">
+            <a:avLst/>
+          </a:prstGeom>
+          <a:noFill/>
+        </p:spPr>
+        <p:txBody>
+          <a:bodyPr wrap="none" anchor="t" lIns="0" rIns="0" tIns="0" bIns="0">
+            <a:spAutoFit/>
+          </a:bodyPr>
+          <a:lstStyle/>
+          <a:p>
+            <a:pPr algn="ctr">
+              <a:lnSpc>
+                <a:spcPct val="115000"/>
+              </a:lnSpc>
+            </a:pPr>
+            <a:r>
+              <a:rPr sz="1200" b="0" i="1">
+                <a:solidFill>
+                  <a:srgbClr val="5A5A5A"/>
+                </a:solidFill>
+                <a:latin typeface="맑은 고딕"/>
+              </a:rPr>
+              <a:t>n × 1</a:t>
+            </a:r>
+          </a:p>
+        </p:txBody>
+      </p:sp>
+      <p:sp>
+        <p:nvSpPr>
+          <p:cNvPr id="14" name="TextBox 13"/>
+          <p:cNvSpPr txBox="1"/>
+          <p:nvPr/>
+        </p:nvSpPr>
+        <p:spPr>
+          <a:xfrm>
+            <a:off x="7386065" y="1280160"/>
+            <a:ext cx="1188720" cy="822960"/>
+          </a:xfrm>
+          <a:prstGeom prst="rect">
+            <a:avLst/>
+          </a:prstGeom>
+          <a:noFill/>
+        </p:spPr>
+        <p:txBody>
+          <a:bodyPr wrap="square" anchor="ctr" lIns="0" rIns="0" tIns="0" bIns="0">
+            <a:spAutoFit/>
+          </a:bodyPr>
+          <a:lstStyle/>
+          <a:p>
+            <a:pPr algn="ctr">
+              <a:lnSpc>
+                <a:spcPct val="115000"/>
+              </a:lnSpc>
+            </a:pPr>
+            <a:r>
+              <a:rPr sz="1300" b="0" i="0">
+                <a:solidFill>
+                  <a:srgbClr val="5A5A5A"/>
+                </a:solidFill>
+                <a:latin typeface="맑은 고딕"/>
+              </a:rPr>
+              <a:t>(mod q)</a:t>
+            </a:r>
+          </a:p>
+        </p:txBody>
+      </p:sp>
+      <p:sp>
+        <p:nvSpPr>
+          <p:cNvPr id="15" name="TextBox 14"/>
+          <p:cNvSpPr txBox="1"/>
+          <p:nvPr/>
+        </p:nvSpPr>
+        <p:spPr>
+          <a:xfrm>
+            <a:off x="685800" y="2743200"/>
+            <a:ext cx="10789920" cy="3840480"/>
           </a:xfrm>
           <a:prstGeom prst="rect">
             <a:avLst/>
@@ -15962,17 +17604,17 @@
                 <a:spcPct val="125000"/>
               </a:lnSpc>
               <a:spcAft>
-                <a:spcPts val="1400"/>
+                <a:spcPts val="900"/>
               </a:spcAft>
             </a:pPr>
             <a:r>
-              <a:rPr sz="1900">
+              <a:rPr sz="1650">
                 <a:solidFill>
                   <a:srgbClr val="222222"/>
                 </a:solidFill>
                 <a:latin typeface="맑은 고딕"/>
               </a:rPr>
-              <a:t>—  후보 z₁, z₂ ∈ [-B/2, B/2]ᵐ — 총 (B+1)ᵐ 가지</a:t>
+              <a:t>—  n ≥ m 이면: A가 (압도적 확률로) full column rank → Az≡0의 유일해가 z=0뿐이라 SIS 해가 존재하지 않음 — 이후 n &lt; m 을 가정</a:t>
             </a:r>
           </a:p>
           <a:p>
@@ -15981,16 +17623,35 @@
                 <a:spcPct val="125000"/>
               </a:lnSpc>
               <a:spcAft>
-                <a:spcPts val="1400"/>
+                <a:spcPts val="900"/>
               </a:spcAft>
             </a:pPr>
             <a:r>
-              <a:rPr sz="1900">
+              <a:rPr sz="1650">
                 <a:solidFill>
                   <a:srgbClr val="222222"/>
                 </a:solidFill>
                 <a:latin typeface="맑은 고딕"/>
               </a:rPr>
+              <a:t>—  n &lt; m 일 때, 후보 z₁, z₂ ∈ [-B/2, B/2]ᵐ (총 (B+1)ᵐ 가지) 를 생각하면</a:t>
+            </a:r>
+          </a:p>
+          <a:p>
+            <a:pPr>
+              <a:lnSpc>
+                <a:spcPct val="125000"/>
+              </a:lnSpc>
+              <a:spcAft>
+                <a:spcPts val="900"/>
+              </a:spcAft>
+            </a:pPr>
+            <a:r>
+              <a:rPr sz="1650">
+                <a:solidFill>
+                  <a:srgbClr val="222222"/>
+                </a:solidFill>
+                <a:latin typeface="맑은 고딕"/>
+              </a:rPr>
               <a:t>—  (B+1)ᵐ &gt; qⁿ 이면: Az mod q의 가능한 출력은 qⁿ가지뿐 → 비둘기집 원리로 서로 다른 z₁ ≠ z₂가 Az₁ ≡ Az₂ (mod q)를 만족</a:t>
             </a:r>
           </a:p>
@@ -16000,11 +17661,11 @@
                 <a:spcPct val="125000"/>
               </a:lnSpc>
               <a:spcAft>
-                <a:spcPts val="1400"/>
+                <a:spcPts val="900"/>
               </a:spcAft>
             </a:pPr>
             <a:r>
-              <a:rPr sz="1900">
+              <a:rPr sz="1650">
                 <a:solidFill>
                   <a:srgbClr val="222222"/>
                 </a:solidFill>
@@ -16019,11 +17680,11 @@
                 <a:spcPct val="125000"/>
               </a:lnSpc>
               <a:spcAft>
-                <a:spcPts val="1400"/>
+                <a:spcPts val="900"/>
               </a:spcAft>
             </a:pPr>
             <a:r>
-              <a:rPr sz="1900">
+              <a:rPr sz="1650">
                 <a:solidFill>
                   <a:srgbClr val="222222"/>
                 </a:solidFill>
@@ -16998,16 +18659,16 @@
         </p:nvSpPr>
         <p:spPr>
           <a:xfrm>
-            <a:off x="3327044" y="2953512"/>
-            <a:ext cx="1247241" cy="274320"/>
-          </a:xfrm>
-          <a:prstGeom prst="rect">
-            <a:avLst/>
-          </a:prstGeom>
-          <a:noFill/>
-        </p:spPr>
-        <p:txBody>
-          <a:bodyPr wrap="square" anchor="t" lIns="0" rIns="0" tIns="0" bIns="0">
+            <a:off x="3007004" y="2953512"/>
+            <a:ext cx="1887321" cy="274320"/>
+          </a:xfrm>
+          <a:prstGeom prst="rect">
+            <a:avLst/>
+          </a:prstGeom>
+          <a:noFill/>
+        </p:spPr>
+        <p:txBody>
+          <a:bodyPr wrap="none" anchor="t" lIns="0" rIns="0" tIns="0" bIns="0">
             <a:spAutoFit/>
           </a:bodyPr>
           <a:lstStyle/>
@@ -17131,16 +18792,16 @@
         </p:nvSpPr>
         <p:spPr>
           <a:xfrm>
-            <a:off x="5479542" y="2953512"/>
-            <a:ext cx="453542" cy="274320"/>
-          </a:xfrm>
-          <a:prstGeom prst="rect">
-            <a:avLst/>
-          </a:prstGeom>
-          <a:noFill/>
-        </p:spPr>
-        <p:txBody>
-          <a:bodyPr wrap="square" anchor="t" lIns="0" rIns="0" tIns="0" bIns="0">
+            <a:off x="5159502" y="2953512"/>
+            <a:ext cx="1093622" cy="274320"/>
+          </a:xfrm>
+          <a:prstGeom prst="rect">
+            <a:avLst/>
+          </a:prstGeom>
+          <a:noFill/>
+        </p:spPr>
+        <p:txBody>
+          <a:bodyPr wrap="none" anchor="t" lIns="0" rIns="0" tIns="0" bIns="0">
             <a:spAutoFit/>
           </a:bodyPr>
           <a:lstStyle/>
@@ -17264,16 +18925,16 @@
         </p:nvSpPr>
         <p:spPr>
           <a:xfrm>
-            <a:off x="6838340" y="2953512"/>
-            <a:ext cx="453542" cy="274320"/>
-          </a:xfrm>
-          <a:prstGeom prst="rect">
-            <a:avLst/>
-          </a:prstGeom>
-          <a:noFill/>
-        </p:spPr>
-        <p:txBody>
-          <a:bodyPr wrap="square" anchor="t" lIns="0" rIns="0" tIns="0" bIns="0">
+            <a:off x="6518300" y="2953512"/>
+            <a:ext cx="1093622" cy="274320"/>
+          </a:xfrm>
+          <a:prstGeom prst="rect">
+            <a:avLst/>
+          </a:prstGeom>
+          <a:noFill/>
+        </p:spPr>
+        <p:txBody>
+          <a:bodyPr wrap="none" anchor="t" lIns="0" rIns="0" tIns="0" bIns="0">
             <a:spAutoFit/>
           </a:bodyPr>
           <a:lstStyle/>
